--- a/EduCPU8-Teacher-Presenter.pptx
+++ b/EduCPU8-Teacher-Presenter.pptx
@@ -5,17 +5,17 @@
     <p:sldMasterId id="2147483648" r:id="rId1"/>
   </p:sldMasterIdLst>
   <p:sldIdLst>
-    <p:sldId id="256" r:id="rId7"/>
-    <p:sldId id="257" r:id="rId8"/>
-    <p:sldId id="258" r:id="rId9"/>
-    <p:sldId id="259" r:id="rId10"/>
-    <p:sldId id="260" r:id="rId11"/>
-    <p:sldId id="261" r:id="rId12"/>
-    <p:sldId id="262" r:id="rId13"/>
-    <p:sldId id="263" r:id="rId14"/>
-    <p:sldId id="264" r:id="rId15"/>
+    <p:sldId id="256" r:id="rId2"/>
+    <p:sldId id="257" r:id="rId3"/>
+    <p:sldId id="258" r:id="rId4"/>
+    <p:sldId id="259" r:id="rId5"/>
+    <p:sldId id="260" r:id="rId6"/>
+    <p:sldId id="261" r:id="rId7"/>
+    <p:sldId id="262" r:id="rId8"/>
+    <p:sldId id="264" r:id="rId9"/>
+    <p:sldId id="265" r:id="rId10"/>
   </p:sldIdLst>
-  <p:sldSz cx="12191695" cy="6858000" type="screen4x3"/>
+  <p:sldSz cx="12192000" cy="6858000"/>
   <p:notesSz cx="6858000" cy="9144000"/>
   <p:defaultTextStyle>
     <a:defPPr>
@@ -112,7 +112,233 @@
       </a:defRPr>
     </a:lvl9pPr>
   </p:defaultTextStyle>
+  <p:extLst>
+    <p:ext uri="{EFAFB233-063F-42B5-8137-9DF3F51BA10A}">
+      <p15:sldGuideLst xmlns:p15="http://schemas.microsoft.com/office/powerpoint/2012/main">
+        <p15:guide id="1" orient="horz" pos="2160">
+          <p15:clr>
+            <a:srgbClr val="A4A3A4"/>
+          </p15:clr>
+        </p15:guide>
+        <p15:guide id="2" pos="2880">
+          <p15:clr>
+            <a:srgbClr val="A4A3A4"/>
+          </p15:clr>
+        </p15:guide>
+      </p15:sldGuideLst>
+    </p:ext>
+  </p:extLst>
 </p:presentation>
+</file>
+
+<file path=ppt/revisionInfo.xml><?xml version="1.0" encoding="utf-8"?>
+<p1510:revInfo xmlns:a="http://schemas.openxmlformats.org/drawingml/2006/main" xmlns:r="http://schemas.openxmlformats.org/officeDocument/2006/relationships" xmlns:p1510="http://schemas.microsoft.com/office/powerpoint/2015/10/main">
+  <p1510:revLst>
+    <p1510:client id="{6013406A-751C-40BF-9A25-E3724C78A093}" v="2" dt="2026-08-18T01:33:01.343"/>
+  </p1510:revLst>
+</p1510:revInfo>
+</file>
+
+<file path=ppt/changesInfos/changesInfo1.xml><?xml version="1.0" encoding="utf-8"?>
+<pc:chgInfo xmlns:a="http://schemas.openxmlformats.org/drawingml/2006/main" xmlns:r="http://schemas.openxmlformats.org/officeDocument/2006/relationships" xmlns:ac="http://schemas.microsoft.com/office/drawing/2013/main/command" xmlns:pc="http://schemas.microsoft.com/office/powerpoint/2013/main/command">
+  <pc:docChgLst>
+    <pc:chgData name="Dean Groom" userId="c0864208-1521-4c67-aa68-e1e773d853ea" providerId="ADAL" clId="{607B0EEA-5066-49DA-B272-2BC1E1409C7D}"/>
+    <pc:docChg chg="undo custSel delSld modSld">
+      <pc:chgData name="Dean Groom" userId="c0864208-1521-4c67-aa68-e1e773d853ea" providerId="ADAL" clId="{607B0EEA-5066-49DA-B272-2BC1E1409C7D}" dt="2026-08-18T01:43:37.922" v="94" actId="20577"/>
+      <pc:docMkLst>
+        <pc:docMk/>
+      </pc:docMkLst>
+      <pc:sldChg chg="addSp delSp modSp mod">
+        <pc:chgData name="Dean Groom" userId="c0864208-1521-4c67-aa68-e1e773d853ea" providerId="ADAL" clId="{607B0EEA-5066-49DA-B272-2BC1E1409C7D}" dt="2026-08-18T01:33:05.172" v="50" actId="1076"/>
+        <pc:sldMkLst>
+          <pc:docMk/>
+          <pc:sldMk cId="0" sldId="256"/>
+        </pc:sldMkLst>
+        <pc:spChg chg="mod">
+          <ac:chgData name="Dean Groom" userId="c0864208-1521-4c67-aa68-e1e773d853ea" providerId="ADAL" clId="{607B0EEA-5066-49DA-B272-2BC1E1409C7D}" dt="2026-08-18T01:31:47.330" v="36" actId="20577"/>
+          <ac:spMkLst>
+            <pc:docMk/>
+            <pc:sldMk cId="0" sldId="256"/>
+            <ac:spMk id="5" creationId="{00000000-0000-0000-0000-000000000000}"/>
+          </ac:spMkLst>
+        </pc:spChg>
+        <pc:spChg chg="del mod">
+          <ac:chgData name="Dean Groom" userId="c0864208-1521-4c67-aa68-e1e773d853ea" providerId="ADAL" clId="{607B0EEA-5066-49DA-B272-2BC1E1409C7D}" dt="2026-08-18T01:32:02.939" v="40" actId="478"/>
+          <ac:spMkLst>
+            <pc:docMk/>
+            <pc:sldMk cId="0" sldId="256"/>
+            <ac:spMk id="6" creationId="{00000000-0000-0000-0000-000000000000}"/>
+          </ac:spMkLst>
+        </pc:spChg>
+        <pc:spChg chg="del">
+          <ac:chgData name="Dean Groom" userId="c0864208-1521-4c67-aa68-e1e773d853ea" providerId="ADAL" clId="{607B0EEA-5066-49DA-B272-2BC1E1409C7D}" dt="2026-08-18T01:32:00.245" v="39" actId="478"/>
+          <ac:spMkLst>
+            <pc:docMk/>
+            <pc:sldMk cId="0" sldId="256"/>
+            <ac:spMk id="7" creationId="{00000000-0000-0000-0000-000000000000}"/>
+          </ac:spMkLst>
+        </pc:spChg>
+        <pc:spChg chg="mod">
+          <ac:chgData name="Dean Groom" userId="c0864208-1521-4c67-aa68-e1e773d853ea" providerId="ADAL" clId="{607B0EEA-5066-49DA-B272-2BC1E1409C7D}" dt="2026-08-18T01:33:01.342" v="49" actId="164"/>
+          <ac:spMkLst>
+            <pc:docMk/>
+            <pc:sldMk cId="0" sldId="256"/>
+            <ac:spMk id="8" creationId="{00000000-0000-0000-0000-000000000000}"/>
+          </ac:spMkLst>
+        </pc:spChg>
+        <pc:spChg chg="mod">
+          <ac:chgData name="Dean Groom" userId="c0864208-1521-4c67-aa68-e1e773d853ea" providerId="ADAL" clId="{607B0EEA-5066-49DA-B272-2BC1E1409C7D}" dt="2026-08-18T01:33:01.342" v="49" actId="164"/>
+          <ac:spMkLst>
+            <pc:docMk/>
+            <pc:sldMk cId="0" sldId="256"/>
+            <ac:spMk id="9" creationId="{00000000-0000-0000-0000-000000000000}"/>
+          </ac:spMkLst>
+        </pc:spChg>
+        <pc:spChg chg="mod">
+          <ac:chgData name="Dean Groom" userId="c0864208-1521-4c67-aa68-e1e773d853ea" providerId="ADAL" clId="{607B0EEA-5066-49DA-B272-2BC1E1409C7D}" dt="2026-08-18T01:33:01.342" v="49" actId="164"/>
+          <ac:spMkLst>
+            <pc:docMk/>
+            <pc:sldMk cId="0" sldId="256"/>
+            <ac:spMk id="10" creationId="{00000000-0000-0000-0000-000000000000}"/>
+          </ac:spMkLst>
+        </pc:spChg>
+        <pc:spChg chg="mod">
+          <ac:chgData name="Dean Groom" userId="c0864208-1521-4c67-aa68-e1e773d853ea" providerId="ADAL" clId="{607B0EEA-5066-49DA-B272-2BC1E1409C7D}" dt="2026-08-18T01:32:50.697" v="47" actId="164"/>
+          <ac:spMkLst>
+            <pc:docMk/>
+            <pc:sldMk cId="0" sldId="256"/>
+            <ac:spMk id="11" creationId="{00000000-0000-0000-0000-000000000000}"/>
+          </ac:spMkLst>
+        </pc:spChg>
+        <pc:spChg chg="mod">
+          <ac:chgData name="Dean Groom" userId="c0864208-1521-4c67-aa68-e1e773d853ea" providerId="ADAL" clId="{607B0EEA-5066-49DA-B272-2BC1E1409C7D}" dt="2026-08-18T01:32:50.697" v="47" actId="164"/>
+          <ac:spMkLst>
+            <pc:docMk/>
+            <pc:sldMk cId="0" sldId="256"/>
+            <ac:spMk id="12" creationId="{00000000-0000-0000-0000-000000000000}"/>
+          </ac:spMkLst>
+        </pc:spChg>
+        <pc:spChg chg="mod">
+          <ac:chgData name="Dean Groom" userId="c0864208-1521-4c67-aa68-e1e773d853ea" providerId="ADAL" clId="{607B0EEA-5066-49DA-B272-2BC1E1409C7D}" dt="2026-08-18T01:32:50.697" v="47" actId="164"/>
+          <ac:spMkLst>
+            <pc:docMk/>
+            <pc:sldMk cId="0" sldId="256"/>
+            <ac:spMk id="13" creationId="{00000000-0000-0000-0000-000000000000}"/>
+          </ac:spMkLst>
+        </pc:spChg>
+        <pc:spChg chg="del">
+          <ac:chgData name="Dean Groom" userId="c0864208-1521-4c67-aa68-e1e773d853ea" providerId="ADAL" clId="{607B0EEA-5066-49DA-B272-2BC1E1409C7D}" dt="2026-08-18T01:32:18.611" v="44" actId="478"/>
+          <ac:spMkLst>
+            <pc:docMk/>
+            <pc:sldMk cId="0" sldId="256"/>
+            <ac:spMk id="14" creationId="{00000000-0000-0000-0000-000000000000}"/>
+          </ac:spMkLst>
+        </pc:spChg>
+        <pc:spChg chg="del">
+          <ac:chgData name="Dean Groom" userId="c0864208-1521-4c67-aa68-e1e773d853ea" providerId="ADAL" clId="{607B0EEA-5066-49DA-B272-2BC1E1409C7D}" dt="2026-08-18T01:32:20.644" v="45" actId="478"/>
+          <ac:spMkLst>
+            <pc:docMk/>
+            <pc:sldMk cId="0" sldId="256"/>
+            <ac:spMk id="15" creationId="{00000000-0000-0000-0000-000000000000}"/>
+          </ac:spMkLst>
+        </pc:spChg>
+        <pc:spChg chg="del">
+          <ac:chgData name="Dean Groom" userId="c0864208-1521-4c67-aa68-e1e773d853ea" providerId="ADAL" clId="{607B0EEA-5066-49DA-B272-2BC1E1409C7D}" dt="2026-08-18T01:32:22.083" v="46" actId="478"/>
+          <ac:spMkLst>
+            <pc:docMk/>
+            <pc:sldMk cId="0" sldId="256"/>
+            <ac:spMk id="16" creationId="{00000000-0000-0000-0000-000000000000}"/>
+          </ac:spMkLst>
+        </pc:spChg>
+        <pc:grpChg chg="add mod">
+          <ac:chgData name="Dean Groom" userId="c0864208-1521-4c67-aa68-e1e773d853ea" providerId="ADAL" clId="{607B0EEA-5066-49DA-B272-2BC1E1409C7D}" dt="2026-08-18T01:32:54.665" v="48" actId="1076"/>
+          <ac:grpSpMkLst>
+            <pc:docMk/>
+            <pc:sldMk cId="0" sldId="256"/>
+            <ac:grpSpMk id="19" creationId="{FB355E3A-5C97-6BCB-374C-EF7F81199F8D}"/>
+          </ac:grpSpMkLst>
+        </pc:grpChg>
+        <pc:grpChg chg="add mod">
+          <ac:chgData name="Dean Groom" userId="c0864208-1521-4c67-aa68-e1e773d853ea" providerId="ADAL" clId="{607B0EEA-5066-49DA-B272-2BC1E1409C7D}" dt="2026-08-18T01:33:05.172" v="50" actId="1076"/>
+          <ac:grpSpMkLst>
+            <pc:docMk/>
+            <pc:sldMk cId="0" sldId="256"/>
+            <ac:grpSpMk id="20" creationId="{22E88884-623C-C717-9118-956C3A800C6D}"/>
+          </ac:grpSpMkLst>
+        </pc:grpChg>
+      </pc:sldChg>
+      <pc:sldChg chg="delSp modSp mod">
+        <pc:chgData name="Dean Groom" userId="c0864208-1521-4c67-aa68-e1e773d853ea" providerId="ADAL" clId="{607B0EEA-5066-49DA-B272-2BC1E1409C7D}" dt="2026-08-18T01:43:37.922" v="94" actId="20577"/>
+        <pc:sldMkLst>
+          <pc:docMk/>
+          <pc:sldMk cId="0" sldId="258"/>
+        </pc:sldMkLst>
+        <pc:spChg chg="mod">
+          <ac:chgData name="Dean Groom" userId="c0864208-1521-4c67-aa68-e1e773d853ea" providerId="ADAL" clId="{607B0EEA-5066-49DA-B272-2BC1E1409C7D}" dt="2026-08-18T01:42:09.677" v="84" actId="207"/>
+          <ac:spMkLst>
+            <pc:docMk/>
+            <pc:sldMk cId="0" sldId="258"/>
+            <ac:spMk id="8" creationId="{00000000-0000-0000-0000-000000000000}"/>
+          </ac:spMkLst>
+        </pc:spChg>
+        <pc:spChg chg="del">
+          <ac:chgData name="Dean Groom" userId="c0864208-1521-4c67-aa68-e1e773d853ea" providerId="ADAL" clId="{607B0EEA-5066-49DA-B272-2BC1E1409C7D}" dt="2026-08-18T01:42:23.668" v="85" actId="478"/>
+          <ac:spMkLst>
+            <pc:docMk/>
+            <pc:sldMk cId="0" sldId="258"/>
+            <ac:spMk id="9" creationId="{00000000-0000-0000-0000-000000000000}"/>
+          </ac:spMkLst>
+        </pc:spChg>
+        <pc:spChg chg="mod">
+          <ac:chgData name="Dean Groom" userId="c0864208-1521-4c67-aa68-e1e773d853ea" providerId="ADAL" clId="{607B0EEA-5066-49DA-B272-2BC1E1409C7D}" dt="2026-08-18T01:43:37.922" v="94" actId="20577"/>
+          <ac:spMkLst>
+            <pc:docMk/>
+            <pc:sldMk cId="0" sldId="258"/>
+            <ac:spMk id="10" creationId="{00000000-0000-0000-0000-000000000000}"/>
+          </ac:spMkLst>
+        </pc:spChg>
+      </pc:sldChg>
+      <pc:sldChg chg="modSp del mod">
+        <pc:chgData name="Dean Groom" userId="c0864208-1521-4c67-aa68-e1e773d853ea" providerId="ADAL" clId="{607B0EEA-5066-49DA-B272-2BC1E1409C7D}" dt="2026-08-18T01:41:08.912" v="78" actId="2696"/>
+        <pc:sldMkLst>
+          <pc:docMk/>
+          <pc:sldMk cId="0" sldId="263"/>
+        </pc:sldMkLst>
+        <pc:spChg chg="mod">
+          <ac:chgData name="Dean Groom" userId="c0864208-1521-4c67-aa68-e1e773d853ea" providerId="ADAL" clId="{607B0EEA-5066-49DA-B272-2BC1E1409C7D}" dt="2026-08-18T01:40:42.282" v="77" actId="20577"/>
+          <ac:spMkLst>
+            <pc:docMk/>
+            <pc:sldMk cId="0" sldId="263"/>
+            <ac:spMk id="6" creationId="{00000000-0000-0000-0000-000000000000}"/>
+          </ac:spMkLst>
+        </pc:spChg>
+      </pc:sldChg>
+      <pc:sldChg chg="delSp mod">
+        <pc:chgData name="Dean Groom" userId="c0864208-1521-4c67-aa68-e1e773d853ea" providerId="ADAL" clId="{607B0EEA-5066-49DA-B272-2BC1E1409C7D}" dt="2026-08-18T01:41:30.217" v="80" actId="478"/>
+        <pc:sldMkLst>
+          <pc:docMk/>
+          <pc:sldMk cId="0" sldId="265"/>
+        </pc:sldMkLst>
+        <pc:spChg chg="del">
+          <ac:chgData name="Dean Groom" userId="c0864208-1521-4c67-aa68-e1e773d853ea" providerId="ADAL" clId="{607B0EEA-5066-49DA-B272-2BC1E1409C7D}" dt="2026-08-18T01:41:30.217" v="80" actId="478"/>
+          <ac:spMkLst>
+            <pc:docMk/>
+            <pc:sldMk cId="0" sldId="265"/>
+            <ac:spMk id="6" creationId="{00000000-0000-0000-0000-000000000000}"/>
+          </ac:spMkLst>
+        </pc:spChg>
+        <pc:spChg chg="del">
+          <ac:chgData name="Dean Groom" userId="c0864208-1521-4c67-aa68-e1e773d853ea" providerId="ADAL" clId="{607B0EEA-5066-49DA-B272-2BC1E1409C7D}" dt="2026-08-18T01:41:26.420" v="79" actId="478"/>
+          <ac:spMkLst>
+            <pc:docMk/>
+            <pc:sldMk cId="0" sldId="265"/>
+            <ac:spMk id="22" creationId="{00000000-0000-0000-0000-000000000000}"/>
+          </ac:spMkLst>
+        </pc:spChg>
+      </pc:sldChg>
+    </pc:docChg>
+  </pc:docChgLst>
+</pc:chgInfo>
 </file>
 
 <file path=ppt/slideLayouts/slideLayout1.xml><?xml version="1.0" encoding="utf-8"?>
@@ -153,10 +379,9 @@
           <a:lstStyle/>
           <a:p>
             <a:r>
-              <a:rPr lang="en-US" smtClean="0"/>
+              <a:rPr lang="en-US"/>
               <a:t>Click to edit Master title style</a:t>
             </a:r>
-            <a:endParaRPr lang="en-US"/>
           </a:p>
         </p:txBody>
       </p:sp>
@@ -272,10 +497,9 @@
           </a:lstStyle>
           <a:p>
             <a:r>
-              <a:rPr lang="en-US" smtClean="0"/>
+              <a:rPr lang="en-US"/>
               <a:t>Click to edit Master subtitle style</a:t>
             </a:r>
-            <a:endParaRPr lang="en-US"/>
           </a:p>
         </p:txBody>
       </p:sp>
@@ -296,7 +520,7 @@
           <a:p>
             <a:fld id="{5BCAD085-E8A6-8845-BD4E-CB4CCA059FC4}" type="datetimeFigureOut">
               <a:rPr lang="en-US" smtClean="0"/>
-              <a:t>1/27/13</a:t>
+              <a:t>8/18/2026</a:t>
             </a:fld>
             <a:endParaRPr lang="en-US"/>
           </a:p>
@@ -390,10 +614,9 @@
           <a:lstStyle/>
           <a:p>
             <a:r>
-              <a:rPr lang="en-US" smtClean="0"/>
+              <a:rPr lang="en-US"/>
               <a:t>Click to edit Master title style</a:t>
             </a:r>
-            <a:endParaRPr lang="en-US"/>
           </a:p>
         </p:txBody>
       </p:sp>
@@ -414,38 +637,37 @@
           <a:p>
             <a:pPr lvl="0"/>
             <a:r>
-              <a:rPr lang="en-US" smtClean="0"/>
+              <a:rPr lang="en-US"/>
               <a:t>Click to edit Master text styles</a:t>
             </a:r>
           </a:p>
           <a:p>
             <a:pPr lvl="1"/>
             <a:r>
-              <a:rPr lang="en-US" smtClean="0"/>
+              <a:rPr lang="en-US"/>
               <a:t>Second level</a:t>
             </a:r>
           </a:p>
           <a:p>
             <a:pPr lvl="2"/>
             <a:r>
-              <a:rPr lang="en-US" smtClean="0"/>
+              <a:rPr lang="en-US"/>
               <a:t>Third level</a:t>
             </a:r>
           </a:p>
           <a:p>
             <a:pPr lvl="3"/>
             <a:r>
-              <a:rPr lang="en-US" smtClean="0"/>
+              <a:rPr lang="en-US"/>
               <a:t>Fourth level</a:t>
             </a:r>
           </a:p>
           <a:p>
             <a:pPr lvl="4"/>
             <a:r>
-              <a:rPr lang="en-US" smtClean="0"/>
+              <a:rPr lang="en-US"/>
               <a:t>Fifth level</a:t>
             </a:r>
-            <a:endParaRPr lang="en-US"/>
           </a:p>
         </p:txBody>
       </p:sp>
@@ -466,7 +688,7 @@
           <a:p>
             <a:fld id="{5BCAD085-E8A6-8845-BD4E-CB4CCA059FC4}" type="datetimeFigureOut">
               <a:rPr lang="en-US" smtClean="0"/>
-              <a:t>1/27/13</a:t>
+              <a:t>8/18/2026</a:t>
             </a:fld>
             <a:endParaRPr lang="en-US"/>
           </a:p>
@@ -565,10 +787,9 @@
           <a:lstStyle/>
           <a:p>
             <a:r>
-              <a:rPr lang="en-US" smtClean="0"/>
+              <a:rPr lang="en-US"/>
               <a:t>Click to edit Master title style</a:t>
             </a:r>
-            <a:endParaRPr lang="en-US"/>
           </a:p>
         </p:txBody>
       </p:sp>
@@ -594,38 +815,37 @@
           <a:p>
             <a:pPr lvl="0"/>
             <a:r>
-              <a:rPr lang="en-US" smtClean="0"/>
+              <a:rPr lang="en-US"/>
               <a:t>Click to edit Master text styles</a:t>
             </a:r>
           </a:p>
           <a:p>
             <a:pPr lvl="1"/>
             <a:r>
-              <a:rPr lang="en-US" smtClean="0"/>
+              <a:rPr lang="en-US"/>
               <a:t>Second level</a:t>
             </a:r>
           </a:p>
           <a:p>
             <a:pPr lvl="2"/>
             <a:r>
-              <a:rPr lang="en-US" smtClean="0"/>
+              <a:rPr lang="en-US"/>
               <a:t>Third level</a:t>
             </a:r>
           </a:p>
           <a:p>
             <a:pPr lvl="3"/>
             <a:r>
-              <a:rPr lang="en-US" smtClean="0"/>
+              <a:rPr lang="en-US"/>
               <a:t>Fourth level</a:t>
             </a:r>
           </a:p>
           <a:p>
             <a:pPr lvl="4"/>
             <a:r>
-              <a:rPr lang="en-US" smtClean="0"/>
+              <a:rPr lang="en-US"/>
               <a:t>Fifth level</a:t>
             </a:r>
-            <a:endParaRPr lang="en-US"/>
           </a:p>
         </p:txBody>
       </p:sp>
@@ -646,7 +866,7 @@
           <a:p>
             <a:fld id="{5BCAD085-E8A6-8845-BD4E-CB4CCA059FC4}" type="datetimeFigureOut">
               <a:rPr lang="en-US" smtClean="0"/>
-              <a:t>1/27/13</a:t>
+              <a:t>8/18/2026</a:t>
             </a:fld>
             <a:endParaRPr lang="en-US"/>
           </a:p>
@@ -740,10 +960,9 @@
           <a:lstStyle/>
           <a:p>
             <a:r>
-              <a:rPr lang="en-US" smtClean="0"/>
+              <a:rPr lang="en-US"/>
               <a:t>Click to edit Master title style</a:t>
             </a:r>
-            <a:endParaRPr lang="en-US"/>
           </a:p>
         </p:txBody>
       </p:sp>
@@ -764,38 +983,37 @@
           <a:p>
             <a:pPr lvl="0"/>
             <a:r>
-              <a:rPr lang="en-US" smtClean="0"/>
+              <a:rPr lang="en-US"/>
               <a:t>Click to edit Master text styles</a:t>
             </a:r>
           </a:p>
           <a:p>
             <a:pPr lvl="1"/>
             <a:r>
-              <a:rPr lang="en-US" smtClean="0"/>
+              <a:rPr lang="en-US"/>
               <a:t>Second level</a:t>
             </a:r>
           </a:p>
           <a:p>
             <a:pPr lvl="2"/>
             <a:r>
-              <a:rPr lang="en-US" smtClean="0"/>
+              <a:rPr lang="en-US"/>
               <a:t>Third level</a:t>
             </a:r>
           </a:p>
           <a:p>
             <a:pPr lvl="3"/>
             <a:r>
-              <a:rPr lang="en-US" smtClean="0"/>
+              <a:rPr lang="en-US"/>
               <a:t>Fourth level</a:t>
             </a:r>
           </a:p>
           <a:p>
             <a:pPr lvl="4"/>
             <a:r>
-              <a:rPr lang="en-US" smtClean="0"/>
+              <a:rPr lang="en-US"/>
               <a:t>Fifth level</a:t>
             </a:r>
-            <a:endParaRPr lang="en-US"/>
           </a:p>
         </p:txBody>
       </p:sp>
@@ -816,7 +1034,7 @@
           <a:p>
             <a:fld id="{5BCAD085-E8A6-8845-BD4E-CB4CCA059FC4}" type="datetimeFigureOut">
               <a:rPr lang="en-US" smtClean="0"/>
-              <a:t>1/27/13</a:t>
+              <a:t>8/18/2026</a:t>
             </a:fld>
             <a:endParaRPr lang="en-US"/>
           </a:p>
@@ -919,10 +1137,9 @@
           </a:lstStyle>
           <a:p>
             <a:r>
-              <a:rPr lang="en-US" smtClean="0"/>
+              <a:rPr lang="en-US"/>
               <a:t>Click to edit Master title style</a:t>
             </a:r>
-            <a:endParaRPr lang="en-US"/>
           </a:p>
         </p:txBody>
       </p:sp>
@@ -1039,7 +1256,7 @@
           <a:p>
             <a:pPr lvl="0"/>
             <a:r>
-              <a:rPr lang="en-US" smtClean="0"/>
+              <a:rPr lang="en-US"/>
               <a:t>Click to edit Master text styles</a:t>
             </a:r>
           </a:p>
@@ -1062,7 +1279,7 @@
           <a:p>
             <a:fld id="{5BCAD085-E8A6-8845-BD4E-CB4CCA059FC4}" type="datetimeFigureOut">
               <a:rPr lang="en-US" smtClean="0"/>
-              <a:t>1/27/13</a:t>
+              <a:t>8/18/2026</a:t>
             </a:fld>
             <a:endParaRPr lang="en-US"/>
           </a:p>
@@ -1156,10 +1373,9 @@
           <a:lstStyle/>
           <a:p>
             <a:r>
-              <a:rPr lang="en-US" smtClean="0"/>
+              <a:rPr lang="en-US"/>
               <a:t>Click to edit Master title style</a:t>
             </a:r>
-            <a:endParaRPr lang="en-US"/>
           </a:p>
         </p:txBody>
       </p:sp>
@@ -1213,38 +1429,37 @@
           <a:p>
             <a:pPr lvl="0"/>
             <a:r>
-              <a:rPr lang="en-US" smtClean="0"/>
+              <a:rPr lang="en-US"/>
               <a:t>Click to edit Master text styles</a:t>
             </a:r>
           </a:p>
           <a:p>
             <a:pPr lvl="1"/>
             <a:r>
-              <a:rPr lang="en-US" smtClean="0"/>
+              <a:rPr lang="en-US"/>
               <a:t>Second level</a:t>
             </a:r>
           </a:p>
           <a:p>
             <a:pPr lvl="2"/>
             <a:r>
-              <a:rPr lang="en-US" smtClean="0"/>
+              <a:rPr lang="en-US"/>
               <a:t>Third level</a:t>
             </a:r>
           </a:p>
           <a:p>
             <a:pPr lvl="3"/>
             <a:r>
-              <a:rPr lang="en-US" smtClean="0"/>
+              <a:rPr lang="en-US"/>
               <a:t>Fourth level</a:t>
             </a:r>
           </a:p>
           <a:p>
             <a:pPr lvl="4"/>
             <a:r>
-              <a:rPr lang="en-US" smtClean="0"/>
+              <a:rPr lang="en-US"/>
               <a:t>Fifth level</a:t>
             </a:r>
-            <a:endParaRPr lang="en-US"/>
           </a:p>
         </p:txBody>
       </p:sp>
@@ -1298,38 +1513,37 @@
           <a:p>
             <a:pPr lvl="0"/>
             <a:r>
-              <a:rPr lang="en-US" smtClean="0"/>
+              <a:rPr lang="en-US"/>
               <a:t>Click to edit Master text styles</a:t>
             </a:r>
           </a:p>
           <a:p>
             <a:pPr lvl="1"/>
             <a:r>
-              <a:rPr lang="en-US" smtClean="0"/>
+              <a:rPr lang="en-US"/>
               <a:t>Second level</a:t>
             </a:r>
           </a:p>
           <a:p>
             <a:pPr lvl="2"/>
             <a:r>
-              <a:rPr lang="en-US" smtClean="0"/>
+              <a:rPr lang="en-US"/>
               <a:t>Third level</a:t>
             </a:r>
           </a:p>
           <a:p>
             <a:pPr lvl="3"/>
             <a:r>
-              <a:rPr lang="en-US" smtClean="0"/>
+              <a:rPr lang="en-US"/>
               <a:t>Fourth level</a:t>
             </a:r>
           </a:p>
           <a:p>
             <a:pPr lvl="4"/>
             <a:r>
-              <a:rPr lang="en-US" smtClean="0"/>
+              <a:rPr lang="en-US"/>
               <a:t>Fifth level</a:t>
             </a:r>
-            <a:endParaRPr lang="en-US"/>
           </a:p>
         </p:txBody>
       </p:sp>
@@ -1350,7 +1564,7 @@
           <a:p>
             <a:fld id="{5BCAD085-E8A6-8845-BD4E-CB4CCA059FC4}" type="datetimeFigureOut">
               <a:rPr lang="en-US" smtClean="0"/>
-              <a:t>1/27/13</a:t>
+              <a:t>8/18/2026</a:t>
             </a:fld>
             <a:endParaRPr lang="en-US"/>
           </a:p>
@@ -1448,10 +1662,9 @@
           </a:lstStyle>
           <a:p>
             <a:r>
-              <a:rPr lang="en-US" smtClean="0"/>
+              <a:rPr lang="en-US"/>
               <a:t>Click to edit Master title style</a:t>
             </a:r>
-            <a:endParaRPr lang="en-US"/>
           </a:p>
         </p:txBody>
       </p:sp>
@@ -1514,7 +1727,7 @@
           <a:p>
             <a:pPr lvl="0"/>
             <a:r>
-              <a:rPr lang="en-US" smtClean="0"/>
+              <a:rPr lang="en-US"/>
               <a:t>Click to edit Master text styles</a:t>
             </a:r>
           </a:p>
@@ -1570,38 +1783,37 @@
           <a:p>
             <a:pPr lvl="0"/>
             <a:r>
-              <a:rPr lang="en-US" smtClean="0"/>
+              <a:rPr lang="en-US"/>
               <a:t>Click to edit Master text styles</a:t>
             </a:r>
           </a:p>
           <a:p>
             <a:pPr lvl="1"/>
             <a:r>
-              <a:rPr lang="en-US" smtClean="0"/>
+              <a:rPr lang="en-US"/>
               <a:t>Second level</a:t>
             </a:r>
           </a:p>
           <a:p>
             <a:pPr lvl="2"/>
             <a:r>
-              <a:rPr lang="en-US" smtClean="0"/>
+              <a:rPr lang="en-US"/>
               <a:t>Third level</a:t>
             </a:r>
           </a:p>
           <a:p>
             <a:pPr lvl="3"/>
             <a:r>
-              <a:rPr lang="en-US" smtClean="0"/>
+              <a:rPr lang="en-US"/>
               <a:t>Fourth level</a:t>
             </a:r>
           </a:p>
           <a:p>
             <a:pPr lvl="4"/>
             <a:r>
-              <a:rPr lang="en-US" smtClean="0"/>
+              <a:rPr lang="en-US"/>
               <a:t>Fifth level</a:t>
             </a:r>
-            <a:endParaRPr lang="en-US"/>
           </a:p>
         </p:txBody>
       </p:sp>
@@ -1664,7 +1876,7 @@
           <a:p>
             <a:pPr lvl="0"/>
             <a:r>
-              <a:rPr lang="en-US" smtClean="0"/>
+              <a:rPr lang="en-US"/>
               <a:t>Click to edit Master text styles</a:t>
             </a:r>
           </a:p>
@@ -1720,38 +1932,37 @@
           <a:p>
             <a:pPr lvl="0"/>
             <a:r>
-              <a:rPr lang="en-US" smtClean="0"/>
+              <a:rPr lang="en-US"/>
               <a:t>Click to edit Master text styles</a:t>
             </a:r>
           </a:p>
           <a:p>
             <a:pPr lvl="1"/>
             <a:r>
-              <a:rPr lang="en-US" smtClean="0"/>
+              <a:rPr lang="en-US"/>
               <a:t>Second level</a:t>
             </a:r>
           </a:p>
           <a:p>
             <a:pPr lvl="2"/>
             <a:r>
-              <a:rPr lang="en-US" smtClean="0"/>
+              <a:rPr lang="en-US"/>
               <a:t>Third level</a:t>
             </a:r>
           </a:p>
           <a:p>
             <a:pPr lvl="3"/>
             <a:r>
-              <a:rPr lang="en-US" smtClean="0"/>
+              <a:rPr lang="en-US"/>
               <a:t>Fourth level</a:t>
             </a:r>
           </a:p>
           <a:p>
             <a:pPr lvl="4"/>
             <a:r>
-              <a:rPr lang="en-US" smtClean="0"/>
+              <a:rPr lang="en-US"/>
               <a:t>Fifth level</a:t>
             </a:r>
-            <a:endParaRPr lang="en-US"/>
           </a:p>
         </p:txBody>
       </p:sp>
@@ -1772,7 +1983,7 @@
           <a:p>
             <a:fld id="{5BCAD085-E8A6-8845-BD4E-CB4CCA059FC4}" type="datetimeFigureOut">
               <a:rPr lang="en-US" smtClean="0"/>
-              <a:t>1/27/13</a:t>
+              <a:t>8/18/2026</a:t>
             </a:fld>
             <a:endParaRPr lang="en-US"/>
           </a:p>
@@ -1866,10 +2077,9 @@
           <a:lstStyle/>
           <a:p>
             <a:r>
-              <a:rPr lang="en-US" smtClean="0"/>
+              <a:rPr lang="en-US"/>
               <a:t>Click to edit Master title style</a:t>
             </a:r>
-            <a:endParaRPr lang="en-US"/>
           </a:p>
         </p:txBody>
       </p:sp>
@@ -1890,7 +2100,7 @@
           <a:p>
             <a:fld id="{5BCAD085-E8A6-8845-BD4E-CB4CCA059FC4}" type="datetimeFigureOut">
               <a:rPr lang="en-US" smtClean="0"/>
-              <a:t>1/27/13</a:t>
+              <a:t>8/18/2026</a:t>
             </a:fld>
             <a:endParaRPr lang="en-US"/>
           </a:p>
@@ -1985,7 +2195,7 @@
           <a:p>
             <a:fld id="{5BCAD085-E8A6-8845-BD4E-CB4CCA059FC4}" type="datetimeFigureOut">
               <a:rPr lang="en-US" smtClean="0"/>
-              <a:t>1/27/13</a:t>
+              <a:t>8/18/2026</a:t>
             </a:fld>
             <a:endParaRPr lang="en-US"/>
           </a:p>
@@ -2088,10 +2298,9 @@
           </a:lstStyle>
           <a:p>
             <a:r>
-              <a:rPr lang="en-US" smtClean="0"/>
+              <a:rPr lang="en-US"/>
               <a:t>Click to edit Master title style</a:t>
             </a:r>
-            <a:endParaRPr lang="en-US"/>
           </a:p>
         </p:txBody>
       </p:sp>
@@ -2145,38 +2354,37 @@
           <a:p>
             <a:pPr lvl="0"/>
             <a:r>
-              <a:rPr lang="en-US" smtClean="0"/>
+              <a:rPr lang="en-US"/>
               <a:t>Click to edit Master text styles</a:t>
             </a:r>
           </a:p>
           <a:p>
             <a:pPr lvl="1"/>
             <a:r>
-              <a:rPr lang="en-US" smtClean="0"/>
+              <a:rPr lang="en-US"/>
               <a:t>Second level</a:t>
             </a:r>
           </a:p>
           <a:p>
             <a:pPr lvl="2"/>
             <a:r>
-              <a:rPr lang="en-US" smtClean="0"/>
+              <a:rPr lang="en-US"/>
               <a:t>Third level</a:t>
             </a:r>
           </a:p>
           <a:p>
             <a:pPr lvl="3"/>
             <a:r>
-              <a:rPr lang="en-US" smtClean="0"/>
+              <a:rPr lang="en-US"/>
               <a:t>Fourth level</a:t>
             </a:r>
           </a:p>
           <a:p>
             <a:pPr lvl="4"/>
             <a:r>
-              <a:rPr lang="en-US" smtClean="0"/>
+              <a:rPr lang="en-US"/>
               <a:t>Fifth level</a:t>
             </a:r>
-            <a:endParaRPr lang="en-US"/>
           </a:p>
         </p:txBody>
       </p:sp>
@@ -2239,7 +2447,7 @@
           <a:p>
             <a:pPr lvl="0"/>
             <a:r>
-              <a:rPr lang="en-US" smtClean="0"/>
+              <a:rPr lang="en-US"/>
               <a:t>Click to edit Master text styles</a:t>
             </a:r>
           </a:p>
@@ -2262,7 +2470,7 @@
           <a:p>
             <a:fld id="{5BCAD085-E8A6-8845-BD4E-CB4CCA059FC4}" type="datetimeFigureOut">
               <a:rPr lang="en-US" smtClean="0"/>
-              <a:t>1/27/13</a:t>
+              <a:t>8/18/2026</a:t>
             </a:fld>
             <a:endParaRPr lang="en-US"/>
           </a:p>
@@ -2365,10 +2573,9 @@
           </a:lstStyle>
           <a:p>
             <a:r>
-              <a:rPr lang="en-US" smtClean="0"/>
+              <a:rPr lang="en-US"/>
               <a:t>Click to edit Master title style</a:t>
             </a:r>
-            <a:endParaRPr lang="en-US"/>
           </a:p>
         </p:txBody>
       </p:sp>
@@ -2492,7 +2699,7 @@
           <a:p>
             <a:pPr lvl="0"/>
             <a:r>
-              <a:rPr lang="en-US" smtClean="0"/>
+              <a:rPr lang="en-US"/>
               <a:t>Click to edit Master text styles</a:t>
             </a:r>
           </a:p>
@@ -2515,7 +2722,7 @@
           <a:p>
             <a:fld id="{5BCAD085-E8A6-8845-BD4E-CB4CCA059FC4}" type="datetimeFigureOut">
               <a:rPr lang="en-US" smtClean="0"/>
-              <a:t>1/27/13</a:t>
+              <a:t>8/18/2026</a:t>
             </a:fld>
             <a:endParaRPr lang="en-US"/>
           </a:p>
@@ -2624,10 +2831,9 @@
           <a:lstStyle/>
           <a:p>
             <a:r>
-              <a:rPr lang="en-US" smtClean="0"/>
+              <a:rPr lang="en-US"/>
               <a:t>Click to edit Master title style</a:t>
             </a:r>
-            <a:endParaRPr lang="en-US"/>
           </a:p>
         </p:txBody>
       </p:sp>
@@ -2658,38 +2864,37 @@
           <a:p>
             <a:pPr lvl="0"/>
             <a:r>
-              <a:rPr lang="en-US" smtClean="0"/>
+              <a:rPr lang="en-US"/>
               <a:t>Click to edit Master text styles</a:t>
             </a:r>
           </a:p>
           <a:p>
             <a:pPr lvl="1"/>
             <a:r>
-              <a:rPr lang="en-US" smtClean="0"/>
+              <a:rPr lang="en-US"/>
               <a:t>Second level</a:t>
             </a:r>
           </a:p>
           <a:p>
             <a:pPr lvl="2"/>
             <a:r>
-              <a:rPr lang="en-US" smtClean="0"/>
+              <a:rPr lang="en-US"/>
               <a:t>Third level</a:t>
             </a:r>
           </a:p>
           <a:p>
             <a:pPr lvl="3"/>
             <a:r>
-              <a:rPr lang="en-US" smtClean="0"/>
+              <a:rPr lang="en-US"/>
               <a:t>Fourth level</a:t>
             </a:r>
           </a:p>
           <a:p>
             <a:pPr lvl="4"/>
             <a:r>
-              <a:rPr lang="en-US" smtClean="0"/>
+              <a:rPr lang="en-US"/>
               <a:t>Fifth level</a:t>
             </a:r>
-            <a:endParaRPr lang="en-US"/>
           </a:p>
         </p:txBody>
       </p:sp>
@@ -2728,7 +2933,7 @@
           <a:p>
             <a:fld id="{5BCAD085-E8A6-8845-BD4E-CB4CCA059FC4}" type="datetimeFigureOut">
               <a:rPr lang="en-US" smtClean="0"/>
-              <a:t>1/27/13</a:t>
+              <a:t>8/18/2026</a:t>
             </a:fld>
             <a:endParaRPr lang="en-US"/>
           </a:p>
@@ -3087,7 +3292,7 @@
 </file>
 
 <file path=ppt/slides/slide1.xml><?xml version="1.0" encoding="utf-8"?>
-<p:sld xmlns:a="http://schemas.openxmlformats.org/drawingml/2006/main" xmlns:p="http://schemas.openxmlformats.org/presentationml/2006/main" xmlns:r="http://schemas.openxmlformats.org/officeDocument/2006/relationships">
+<p:sld xmlns:a="http://schemas.openxmlformats.org/drawingml/2006/main" xmlns:r="http://schemas.openxmlformats.org/officeDocument/2006/relationships" xmlns:p="http://schemas.openxmlformats.org/presentationml/2006/main">
   <p:cSld>
     <p:bg>
       <p:bgPr>
@@ -3103,7 +3308,14 @@
         <p:cNvGrpSpPr/>
         <p:nvPr/>
       </p:nvGrpSpPr>
-      <p:grpSpPr/>
+      <p:grpSpPr>
+        <a:xfrm>
+          <a:off x="0" y="0"/>
+          <a:ext cx="0" cy="0"/>
+          <a:chOff x="0" y="0"/>
+          <a:chExt cx="0" cy="0"/>
+        </a:xfrm>
+      </p:grpSpPr>
       <p:sp>
         <p:nvSpPr>
           <p:cNvPr id="2" name="Rectangle 1"/>
@@ -3145,6 +3357,7 @@
           <a:lstStyle/>
           <a:p>
             <a:pPr algn="ctr"/>
+            <a:endParaRPr/>
           </a:p>
         </p:txBody>
       </p:sp>
@@ -3189,6 +3402,7 @@
           <a:lstStyle/>
           <a:p>
             <a:pPr algn="ctr"/>
+            <a:endParaRPr/>
           </a:p>
         </p:txBody>
       </p:sp>
@@ -3209,7 +3423,7 @@
           <a:noFill/>
         </p:spPr>
         <p:txBody>
-          <a:bodyPr wrap="square" lIns="0" rIns="0" tIns="0" bIns="0">
+          <a:bodyPr wrap="square" lIns="0" tIns="0" rIns="0" bIns="0">
             <a:spAutoFit/>
           </a:bodyPr>
           <a:lstStyle/>
@@ -3240,7 +3454,7 @@
         <p:spPr>
           <a:xfrm>
             <a:off x="548640" y="1371600"/>
-            <a:ext cx="10972800" cy="1463040"/>
+            <a:ext cx="10972800" cy="737189"/>
           </a:xfrm>
           <a:prstGeom prst="rect">
             <a:avLst/>
@@ -3248,7 +3462,7 @@
           <a:noFill/>
         </p:spPr>
         <p:txBody>
-          <a:bodyPr wrap="square" lIns="0" rIns="0" tIns="0" bIns="0">
+          <a:bodyPr wrap="square" lIns="0" tIns="0" rIns="0" bIns="0">
             <a:spAutoFit/>
           </a:bodyPr>
           <a:lstStyle/>
@@ -3259,27 +3473,329 @@
               </a:lnSpc>
             </a:pPr>
             <a:r>
-              <a:rPr sz="4400" b="1">
+              <a:rPr lang="en-AU" sz="4400" b="1" dirty="0">
                 <a:solidFill>
                   <a:srgbClr val="E7EEF4"/>
                 </a:solidFill>
                 <a:latin typeface="Segoe UI"/>
               </a:rPr>
-              <a:t>EduCPU-8</a:t>
-            </a:r>
-          </a:p>
-        </p:txBody>
-      </p:sp>
-      <p:sp>
-        <p:nvSpPr>
-          <p:cNvPr id="6" name="TextBox 5"/>
+              <a:t>Assembly – Talking to CPUs</a:t>
+            </a:r>
+            <a:endParaRPr sz="4400" b="1" dirty="0">
+              <a:solidFill>
+                <a:srgbClr val="E7EEF4"/>
+              </a:solidFill>
+              <a:latin typeface="Segoe UI"/>
+            </a:endParaRPr>
+          </a:p>
+        </p:txBody>
+      </p:sp>
+      <p:grpSp>
+        <p:nvGrpSpPr>
+          <p:cNvPr id="20" name="Group 19">
+            <a:extLst>
+              <a:ext uri="{FF2B5EF4-FFF2-40B4-BE49-F238E27FC236}">
+                <a16:creationId xmlns:a16="http://schemas.microsoft.com/office/drawing/2014/main" id="{22E88884-623C-C717-9118-956C3A800C6D}"/>
+              </a:ext>
+            </a:extLst>
+          </p:cNvPr>
+          <p:cNvGrpSpPr/>
+          <p:nvPr/>
+        </p:nvGrpSpPr>
+        <p:grpSpPr>
+          <a:xfrm>
+            <a:off x="1490472" y="2770632"/>
+            <a:ext cx="5212080" cy="1188720"/>
+            <a:chOff x="548640" y="2944368"/>
+            <a:chExt cx="5212080" cy="1188720"/>
+          </a:xfrm>
+        </p:grpSpPr>
+        <p:sp>
+          <p:nvSpPr>
+            <p:cNvPr id="8" name="Rounded Rectangle 7"/>
+            <p:cNvSpPr/>
+            <p:nvPr/>
+          </p:nvSpPr>
+          <p:spPr>
+            <a:xfrm>
+              <a:off x="548640" y="2944368"/>
+              <a:ext cx="5212080" cy="1188720"/>
+            </a:xfrm>
+            <a:prstGeom prst="roundRect">
+              <a:avLst>
+                <a:gd name="adj" fmla="val 6000"/>
+              </a:avLst>
+            </a:prstGeom>
+            <a:solidFill>
+              <a:srgbClr val="121821"/>
+            </a:solidFill>
+            <a:ln w="12700">
+              <a:solidFill>
+                <a:srgbClr val="4FD1C5"/>
+              </a:solidFill>
+            </a:ln>
+            <a:effectLst/>
+          </p:spPr>
+          <p:style>
+            <a:lnRef idx="1">
+              <a:schemeClr val="accent1"/>
+            </a:lnRef>
+            <a:fillRef idx="3">
+              <a:schemeClr val="accent1"/>
+            </a:fillRef>
+            <a:effectRef idx="2">
+              <a:schemeClr val="accent1"/>
+            </a:effectRef>
+            <a:fontRef idx="minor">
+              <a:schemeClr val="lt1"/>
+            </a:fontRef>
+          </p:style>
+          <p:txBody>
+            <a:bodyPr rtlCol="0" anchor="ctr"/>
+            <a:lstStyle/>
+            <a:p>
+              <a:pPr algn="ctr"/>
+              <a:endParaRPr/>
+            </a:p>
+          </p:txBody>
+        </p:sp>
+        <p:sp>
+          <p:nvSpPr>
+            <p:cNvPr id="9" name="TextBox 8"/>
+            <p:cNvSpPr txBox="1"/>
+            <p:nvPr/>
+          </p:nvSpPr>
+          <p:spPr>
+            <a:xfrm>
+              <a:off x="822960" y="3090672"/>
+              <a:ext cx="4663440" cy="274320"/>
+            </a:xfrm>
+            <a:prstGeom prst="rect">
+              <a:avLst/>
+            </a:prstGeom>
+            <a:noFill/>
+          </p:spPr>
+          <p:txBody>
+            <a:bodyPr wrap="square" lIns="0" tIns="0" rIns="0" bIns="0">
+              <a:spAutoFit/>
+            </a:bodyPr>
+            <a:lstStyle/>
+            <a:p>
+              <a:pPr algn="l">
+                <a:lnSpc>
+                  <a:spcPct val="120000"/>
+                </a:lnSpc>
+              </a:pPr>
+              <a:r>
+                <a:rPr sz="1300" b="1">
+                  <a:solidFill>
+                    <a:srgbClr val="4FD1C5"/>
+                  </a:solidFill>
+                  <a:latin typeface="Segoe UI Semibold"/>
+                </a:rPr>
+                <a:t>THE BIG IDEA</a:t>
+              </a:r>
+            </a:p>
+          </p:txBody>
+        </p:sp>
+        <p:sp>
+          <p:nvSpPr>
+            <p:cNvPr id="10" name="TextBox 9"/>
+            <p:cNvSpPr txBox="1"/>
+            <p:nvPr/>
+          </p:nvSpPr>
+          <p:spPr>
+            <a:xfrm>
+              <a:off x="822960" y="3456432"/>
+              <a:ext cx="4663440" cy="548640"/>
+            </a:xfrm>
+            <a:prstGeom prst="rect">
+              <a:avLst/>
+            </a:prstGeom>
+            <a:noFill/>
+          </p:spPr>
+          <p:txBody>
+            <a:bodyPr wrap="square" lIns="0" tIns="0" rIns="0" bIns="0">
+              <a:spAutoFit/>
+            </a:bodyPr>
+            <a:lstStyle/>
+            <a:p>
+              <a:pPr algn="l">
+                <a:lnSpc>
+                  <a:spcPct val="130000"/>
+                </a:lnSpc>
+              </a:pPr>
+              <a:r>
+                <a:rPr sz="1050" b="0" dirty="0">
+                  <a:solidFill>
+                    <a:srgbClr val="8496A6"/>
+                  </a:solidFill>
+                  <a:latin typeface="Consolas"/>
+                </a:rPr>
+                <a:t>Every computer, from a calculator to a phone, repeats the same Input → Process → Output cycle. This deck and tool make that cycle visible and clickable.</a:t>
+              </a:r>
+            </a:p>
+          </p:txBody>
+        </p:sp>
+      </p:grpSp>
+      <p:grpSp>
+        <p:nvGrpSpPr>
+          <p:cNvPr id="19" name="Group 18">
+            <a:extLst>
+              <a:ext uri="{FF2B5EF4-FFF2-40B4-BE49-F238E27FC236}">
+                <a16:creationId xmlns:a16="http://schemas.microsoft.com/office/drawing/2014/main" id="{FB355E3A-5C97-6BCB-374C-EF7F81199F8D}"/>
+              </a:ext>
+            </a:extLst>
+          </p:cNvPr>
+          <p:cNvGrpSpPr/>
+          <p:nvPr/>
+        </p:nvGrpSpPr>
+        <p:grpSpPr>
+          <a:xfrm>
+            <a:off x="4992624" y="4374307"/>
+            <a:ext cx="5623560" cy="1188720"/>
+            <a:chOff x="5989320" y="2944368"/>
+            <a:chExt cx="5623560" cy="1188720"/>
+          </a:xfrm>
+        </p:grpSpPr>
+        <p:sp>
+          <p:nvSpPr>
+            <p:cNvPr id="11" name="Rounded Rectangle 10"/>
+            <p:cNvSpPr/>
+            <p:nvPr/>
+          </p:nvSpPr>
+          <p:spPr>
+            <a:xfrm>
+              <a:off x="5989320" y="2944368"/>
+              <a:ext cx="5623560" cy="1188720"/>
+            </a:xfrm>
+            <a:prstGeom prst="roundRect">
+              <a:avLst>
+                <a:gd name="adj" fmla="val 6000"/>
+              </a:avLst>
+            </a:prstGeom>
+            <a:solidFill>
+              <a:srgbClr val="121821"/>
+            </a:solidFill>
+            <a:ln w="12700">
+              <a:solidFill>
+                <a:srgbClr val="F2A65A"/>
+              </a:solidFill>
+            </a:ln>
+            <a:effectLst/>
+          </p:spPr>
+          <p:style>
+            <a:lnRef idx="1">
+              <a:schemeClr val="accent1"/>
+            </a:lnRef>
+            <a:fillRef idx="3">
+              <a:schemeClr val="accent1"/>
+            </a:fillRef>
+            <a:effectRef idx="2">
+              <a:schemeClr val="accent1"/>
+            </a:effectRef>
+            <a:fontRef idx="minor">
+              <a:schemeClr val="lt1"/>
+            </a:fontRef>
+          </p:style>
+          <p:txBody>
+            <a:bodyPr rtlCol="0" anchor="ctr"/>
+            <a:lstStyle/>
+            <a:p>
+              <a:pPr algn="ctr"/>
+              <a:endParaRPr/>
+            </a:p>
+          </p:txBody>
+        </p:sp>
+        <p:sp>
+          <p:nvSpPr>
+            <p:cNvPr id="12" name="TextBox 11"/>
+            <p:cNvSpPr txBox="1"/>
+            <p:nvPr/>
+          </p:nvSpPr>
+          <p:spPr>
+            <a:xfrm>
+              <a:off x="6263640" y="3090672"/>
+              <a:ext cx="5120640" cy="274320"/>
+            </a:xfrm>
+            <a:prstGeom prst="rect">
+              <a:avLst/>
+            </a:prstGeom>
+            <a:noFill/>
+          </p:spPr>
+          <p:txBody>
+            <a:bodyPr wrap="square" lIns="0" tIns="0" rIns="0" bIns="0">
+              <a:spAutoFit/>
+            </a:bodyPr>
+            <a:lstStyle/>
+            <a:p>
+              <a:pPr algn="l">
+                <a:lnSpc>
+                  <a:spcPct val="120000"/>
+                </a:lnSpc>
+              </a:pPr>
+              <a:r>
+                <a:rPr sz="1300" b="1">
+                  <a:solidFill>
+                    <a:srgbClr val="F2A65A"/>
+                  </a:solidFill>
+                  <a:latin typeface="Segoe UI Semibold"/>
+                </a:rPr>
+                <a:t>THE TOOL</a:t>
+              </a:r>
+            </a:p>
+          </p:txBody>
+        </p:sp>
+        <p:sp>
+          <p:nvSpPr>
+            <p:cNvPr id="13" name="TextBox 12"/>
+            <p:cNvSpPr txBox="1"/>
+            <p:nvPr/>
+          </p:nvSpPr>
+          <p:spPr>
+            <a:xfrm>
+              <a:off x="6263640" y="3456432"/>
+              <a:ext cx="5120640" cy="548640"/>
+            </a:xfrm>
+            <a:prstGeom prst="rect">
+              <a:avLst/>
+            </a:prstGeom>
+            <a:noFill/>
+          </p:spPr>
+          <p:txBody>
+            <a:bodyPr wrap="square" lIns="0" tIns="0" rIns="0" bIns="0">
+              <a:spAutoFit/>
+            </a:bodyPr>
+            <a:lstStyle/>
+            <a:p>
+              <a:pPr algn="l">
+                <a:lnSpc>
+                  <a:spcPct val="130000"/>
+                </a:lnSpc>
+              </a:pPr>
+              <a:r>
+                <a:rPr sz="1050" b="0" dirty="0">
+                  <a:solidFill>
+                    <a:srgbClr val="8496A6"/>
+                  </a:solidFill>
+                  <a:latin typeface="Consolas"/>
+                </a:rPr>
+                <a:t>A 9-instruction fake chip with 16 memory cells — small enough to fit on one screen, built to be watched rather than just written.</a:t>
+              </a:r>
+            </a:p>
+          </p:txBody>
+        </p:sp>
+      </p:grpSp>
+      <p:sp>
+        <p:nvSpPr>
+          <p:cNvPr id="17" name="TextBox 16"/>
           <p:cNvSpPr txBox="1"/>
           <p:nvPr/>
         </p:nvSpPr>
         <p:spPr>
           <a:xfrm>
-            <a:off x="548640" y="2148840"/>
-            <a:ext cx="10972800" cy="731520"/>
+            <a:off x="502920" y="6528816"/>
+            <a:ext cx="6400800" cy="274320"/>
           </a:xfrm>
           <a:prstGeom prst="rect">
             <a:avLst/>
@@ -3287,7 +3803,7 @@
           <a:noFill/>
         </p:spPr>
         <p:txBody>
-          <a:bodyPr wrap="square" lIns="0" rIns="0" tIns="0" bIns="0">
+          <a:bodyPr wrap="square" lIns="0" tIns="0" rIns="0" bIns="0">
             <a:spAutoFit/>
           </a:bodyPr>
           <a:lstStyle/>
@@ -3298,27 +3814,27 @@
               </a:lnSpc>
             </a:pPr>
             <a:r>
-              <a:rPr sz="2600" b="1">
-                <a:solidFill>
-                  <a:srgbClr val="4FD1C5"/>
-                </a:solidFill>
-                <a:latin typeface="Segoe UI"/>
-              </a:rPr>
-              <a:t>A Visual Model of How a Computer Thinks</a:t>
-            </a:r>
-          </a:p>
-        </p:txBody>
-      </p:sp>
-      <p:sp>
-        <p:nvSpPr>
-          <p:cNvPr id="7" name="TextBox 6"/>
+              <a:rPr sz="900" b="0">
+                <a:solidFill>
+                  <a:srgbClr val="54636F"/>
+                </a:solidFill>
+                <a:latin typeface="Consolas"/>
+              </a:rPr>
+              <a:t>DIGITAL TECHNOLOGIES · EDUCPU-8 — VISUAL ASSEMBLY SIMULATOR</a:t>
+            </a:r>
+          </a:p>
+        </p:txBody>
+      </p:sp>
+      <p:sp>
+        <p:nvSpPr>
+          <p:cNvPr id="18" name="TextBox 17"/>
           <p:cNvSpPr txBox="1"/>
           <p:nvPr/>
         </p:nvSpPr>
         <p:spPr>
           <a:xfrm>
-            <a:off x="548640" y="2880360"/>
-            <a:ext cx="9875520" cy="822960"/>
+            <a:off x="10271455" y="6528816"/>
+            <a:ext cx="1417320" cy="274320"/>
           </a:xfrm>
           <a:prstGeom prst="rect">
             <a:avLst/>
@@ -3326,463 +3842,7 @@
           <a:noFill/>
         </p:spPr>
         <p:txBody>
-          <a:bodyPr wrap="square" lIns="0" rIns="0" tIns="0" bIns="0">
-            <a:spAutoFit/>
-          </a:bodyPr>
-          <a:lstStyle/>
-          <a:p>
-            <a:pPr algn="l">
-              <a:lnSpc>
-                <a:spcPct val="130000"/>
-              </a:lnSpc>
-            </a:pPr>
-            <a:r>
-              <a:rPr sz="1500" b="0">
-                <a:solidFill>
-                  <a:srgbClr val="8496A6"/>
-                </a:solidFill>
-                <a:latin typeface="Consolas"/>
-              </a:rPr>
-              <a:t>A made-up teaching chip that runs entirely in the browser. Students click Step and watch Input become Process become Output, one instruction at a time.</a:t>
-            </a:r>
-          </a:p>
-        </p:txBody>
-      </p:sp>
-      <p:sp>
-        <p:nvSpPr>
-          <p:cNvPr id="8" name="Rounded Rectangle 7"/>
-          <p:cNvSpPr/>
-          <p:nvPr/>
-        </p:nvSpPr>
-        <p:spPr>
-          <a:xfrm>
-            <a:off x="548640" y="3657600"/>
-            <a:ext cx="5212080" cy="1188720"/>
-          </a:xfrm>
-          <a:prstGeom prst="roundRect">
-            <a:avLst>
-              <a:gd name="adj" fmla="val 6000"/>
-            </a:avLst>
-          </a:prstGeom>
-          <a:solidFill>
-            <a:srgbClr val="121821"/>
-          </a:solidFill>
-          <a:ln w="12700">
-            <a:solidFill>
-              <a:srgbClr val="4FD1C5"/>
-            </a:solidFill>
-          </a:ln>
-          <a:effectLst/>
-        </p:spPr>
-        <p:style>
-          <a:lnRef idx="1">
-            <a:schemeClr val="accent1"/>
-          </a:lnRef>
-          <a:fillRef idx="3">
-            <a:schemeClr val="accent1"/>
-          </a:fillRef>
-          <a:effectRef idx="2">
-            <a:schemeClr val="accent1"/>
-          </a:effectRef>
-          <a:fontRef idx="minor">
-            <a:schemeClr val="lt1"/>
-          </a:fontRef>
-        </p:style>
-        <p:txBody>
-          <a:bodyPr rtlCol="0" anchor="ctr"/>
-          <a:lstStyle/>
-          <a:p>
-            <a:pPr algn="ctr"/>
-          </a:p>
-        </p:txBody>
-      </p:sp>
-      <p:sp>
-        <p:nvSpPr>
-          <p:cNvPr id="9" name="TextBox 8"/>
-          <p:cNvSpPr txBox="1"/>
-          <p:nvPr/>
-        </p:nvSpPr>
-        <p:spPr>
-          <a:xfrm>
-            <a:off x="822960" y="3803904"/>
-            <a:ext cx="4663440" cy="274320"/>
-          </a:xfrm>
-          <a:prstGeom prst="rect">
-            <a:avLst/>
-          </a:prstGeom>
-          <a:noFill/>
-        </p:spPr>
-        <p:txBody>
-          <a:bodyPr wrap="square" lIns="0" rIns="0" tIns="0" bIns="0">
-            <a:spAutoFit/>
-          </a:bodyPr>
-          <a:lstStyle/>
-          <a:p>
-            <a:pPr algn="l">
-              <a:lnSpc>
-                <a:spcPct val="120000"/>
-              </a:lnSpc>
-            </a:pPr>
-            <a:r>
-              <a:rPr sz="1300" b="1">
-                <a:solidFill>
-                  <a:srgbClr val="4FD1C5"/>
-                </a:solidFill>
-                <a:latin typeface="Segoe UI Semibold"/>
-              </a:rPr>
-              <a:t>THE BIG IDEA</a:t>
-            </a:r>
-          </a:p>
-        </p:txBody>
-      </p:sp>
-      <p:sp>
-        <p:nvSpPr>
-          <p:cNvPr id="10" name="TextBox 9"/>
-          <p:cNvSpPr txBox="1"/>
-          <p:nvPr/>
-        </p:nvSpPr>
-        <p:spPr>
-          <a:xfrm>
-            <a:off x="822960" y="4169664"/>
-            <a:ext cx="4663440" cy="548640"/>
-          </a:xfrm>
-          <a:prstGeom prst="rect">
-            <a:avLst/>
-          </a:prstGeom>
-          <a:noFill/>
-        </p:spPr>
-        <p:txBody>
-          <a:bodyPr wrap="square" lIns="0" rIns="0" tIns="0" bIns="0">
-            <a:spAutoFit/>
-          </a:bodyPr>
-          <a:lstStyle/>
-          <a:p>
-            <a:pPr algn="l">
-              <a:lnSpc>
-                <a:spcPct val="130000"/>
-              </a:lnSpc>
-            </a:pPr>
-            <a:r>
-              <a:rPr sz="1050" b="0">
-                <a:solidFill>
-                  <a:srgbClr val="8496A6"/>
-                </a:solidFill>
-                <a:latin typeface="Consolas"/>
-              </a:rPr>
-              <a:t>Every computer, from a calculator to a phone, repeats the same Input → Process → Output cycle. This deck and tool make that cycle visible and clickable.</a:t>
-            </a:r>
-          </a:p>
-        </p:txBody>
-      </p:sp>
-      <p:sp>
-        <p:nvSpPr>
-          <p:cNvPr id="11" name="Rounded Rectangle 10"/>
-          <p:cNvSpPr/>
-          <p:nvPr/>
-        </p:nvSpPr>
-        <p:spPr>
-          <a:xfrm>
-            <a:off x="5989320" y="3657600"/>
-            <a:ext cx="5623560" cy="1188720"/>
-          </a:xfrm>
-          <a:prstGeom prst="roundRect">
-            <a:avLst>
-              <a:gd name="adj" fmla="val 6000"/>
-            </a:avLst>
-          </a:prstGeom>
-          <a:solidFill>
-            <a:srgbClr val="121821"/>
-          </a:solidFill>
-          <a:ln w="12700">
-            <a:solidFill>
-              <a:srgbClr val="F2A65A"/>
-            </a:solidFill>
-          </a:ln>
-          <a:effectLst/>
-        </p:spPr>
-        <p:style>
-          <a:lnRef idx="1">
-            <a:schemeClr val="accent1"/>
-          </a:lnRef>
-          <a:fillRef idx="3">
-            <a:schemeClr val="accent1"/>
-          </a:fillRef>
-          <a:effectRef idx="2">
-            <a:schemeClr val="accent1"/>
-          </a:effectRef>
-          <a:fontRef idx="minor">
-            <a:schemeClr val="lt1"/>
-          </a:fontRef>
-        </p:style>
-        <p:txBody>
-          <a:bodyPr rtlCol="0" anchor="ctr"/>
-          <a:lstStyle/>
-          <a:p>
-            <a:pPr algn="ctr"/>
-          </a:p>
-        </p:txBody>
-      </p:sp>
-      <p:sp>
-        <p:nvSpPr>
-          <p:cNvPr id="12" name="TextBox 11"/>
-          <p:cNvSpPr txBox="1"/>
-          <p:nvPr/>
-        </p:nvSpPr>
-        <p:spPr>
-          <a:xfrm>
-            <a:off x="6263640" y="3803904"/>
-            <a:ext cx="5120640" cy="274320"/>
-          </a:xfrm>
-          <a:prstGeom prst="rect">
-            <a:avLst/>
-          </a:prstGeom>
-          <a:noFill/>
-        </p:spPr>
-        <p:txBody>
-          <a:bodyPr wrap="square" lIns="0" rIns="0" tIns="0" bIns="0">
-            <a:spAutoFit/>
-          </a:bodyPr>
-          <a:lstStyle/>
-          <a:p>
-            <a:pPr algn="l">
-              <a:lnSpc>
-                <a:spcPct val="120000"/>
-              </a:lnSpc>
-            </a:pPr>
-            <a:r>
-              <a:rPr sz="1300" b="1">
-                <a:solidFill>
-                  <a:srgbClr val="F2A65A"/>
-                </a:solidFill>
-                <a:latin typeface="Segoe UI Semibold"/>
-              </a:rPr>
-              <a:t>THE TOOL</a:t>
-            </a:r>
-          </a:p>
-        </p:txBody>
-      </p:sp>
-      <p:sp>
-        <p:nvSpPr>
-          <p:cNvPr id="13" name="TextBox 12"/>
-          <p:cNvSpPr txBox="1"/>
-          <p:nvPr/>
-        </p:nvSpPr>
-        <p:spPr>
-          <a:xfrm>
-            <a:off x="6263640" y="4169664"/>
-            <a:ext cx="5120640" cy="548640"/>
-          </a:xfrm>
-          <a:prstGeom prst="rect">
-            <a:avLst/>
-          </a:prstGeom>
-          <a:noFill/>
-        </p:spPr>
-        <p:txBody>
-          <a:bodyPr wrap="square" lIns="0" rIns="0" tIns="0" bIns="0">
-            <a:spAutoFit/>
-          </a:bodyPr>
-          <a:lstStyle/>
-          <a:p>
-            <a:pPr algn="l">
-              <a:lnSpc>
-                <a:spcPct val="130000"/>
-              </a:lnSpc>
-            </a:pPr>
-            <a:r>
-              <a:rPr sz="1050" b="0">
-                <a:solidFill>
-                  <a:srgbClr val="8496A6"/>
-                </a:solidFill>
-                <a:latin typeface="Consolas"/>
-              </a:rPr>
-              <a:t>A 9-instruction fake chip with 16 memory cells — small enough to fit on one screen, built to be watched rather than just written.</a:t>
-            </a:r>
-          </a:p>
-        </p:txBody>
-      </p:sp>
-      <p:sp>
-        <p:nvSpPr>
-          <p:cNvPr id="14" name="Rounded Rectangle 13"/>
-          <p:cNvSpPr/>
-          <p:nvPr/>
-        </p:nvSpPr>
-        <p:spPr>
-          <a:xfrm>
-            <a:off x="548640" y="5074920"/>
-            <a:ext cx="11064240" cy="1051560"/>
-          </a:xfrm>
-          <a:prstGeom prst="roundRect">
-            <a:avLst>
-              <a:gd name="adj" fmla="val 6000"/>
-            </a:avLst>
-          </a:prstGeom>
-          <a:solidFill>
-            <a:srgbClr val="1A222C"/>
-          </a:solidFill>
-          <a:ln w="12700">
-            <a:solidFill>
-              <a:srgbClr val="26323D"/>
-            </a:solidFill>
-          </a:ln>
-          <a:effectLst/>
-        </p:spPr>
-        <p:style>
-          <a:lnRef idx="1">
-            <a:schemeClr val="accent1"/>
-          </a:lnRef>
-          <a:fillRef idx="3">
-            <a:schemeClr val="accent1"/>
-          </a:fillRef>
-          <a:effectRef idx="2">
-            <a:schemeClr val="accent1"/>
-          </a:effectRef>
-          <a:fontRef idx="minor">
-            <a:schemeClr val="lt1"/>
-          </a:fontRef>
-        </p:style>
-        <p:txBody>
-          <a:bodyPr rtlCol="0" anchor="ctr"/>
-          <a:lstStyle/>
-          <a:p>
-            <a:pPr algn="ctr"/>
-          </a:p>
-        </p:txBody>
-      </p:sp>
-      <p:sp>
-        <p:nvSpPr>
-          <p:cNvPr id="15" name="TextBox 14"/>
-          <p:cNvSpPr txBox="1"/>
-          <p:nvPr/>
-        </p:nvSpPr>
-        <p:spPr>
-          <a:xfrm>
-            <a:off x="822960" y="5239512"/>
-            <a:ext cx="10515600" cy="274320"/>
-          </a:xfrm>
-          <a:prstGeom prst="rect">
-            <a:avLst/>
-          </a:prstGeom>
-          <a:noFill/>
-        </p:spPr>
-        <p:txBody>
-          <a:bodyPr wrap="square" lIns="0" rIns="0" tIns="0" bIns="0">
-            <a:spAutoFit/>
-          </a:bodyPr>
-          <a:lstStyle/>
-          <a:p>
-            <a:pPr algn="l">
-              <a:lnSpc>
-                <a:spcPct val="120000"/>
-              </a:lnSpc>
-            </a:pPr>
-            <a:r>
-              <a:rPr sz="1050" b="1">
-                <a:solidFill>
-                  <a:srgbClr val="54636F"/>
-                </a:solidFill>
-                <a:latin typeface="Segoe UI Semibold"/>
-              </a:rPr>
-              <a:t>RUNS ENTIRELY IN THE BROWSER — NO INSTALL, NO ACCOUNTS</a:t>
-            </a:r>
-          </a:p>
-        </p:txBody>
-      </p:sp>
-      <p:sp>
-        <p:nvSpPr>
-          <p:cNvPr id="16" name="TextBox 15"/>
-          <p:cNvSpPr txBox="1"/>
-          <p:nvPr/>
-        </p:nvSpPr>
-        <p:spPr>
-          <a:xfrm>
-            <a:off x="822960" y="5532120"/>
-            <a:ext cx="10515600" cy="457200"/>
-          </a:xfrm>
-          <a:prstGeom prst="rect">
-            <a:avLst/>
-          </a:prstGeom>
-          <a:noFill/>
-        </p:spPr>
-        <p:txBody>
-          <a:bodyPr wrap="square" lIns="0" rIns="0" tIns="0" bIns="0">
-            <a:spAutoFit/>
-          </a:bodyPr>
-          <a:lstStyle/>
-          <a:p>
-            <a:pPr algn="l">
-              <a:lnSpc>
-                <a:spcPct val="130000"/>
-              </a:lnSpc>
-            </a:pPr>
-            <a:r>
-              <a:rPr sz="1200" b="0">
-                <a:solidFill>
-                  <a:srgbClr val="8496A6"/>
-                </a:solidFill>
-                <a:latin typeface="Consolas"/>
-              </a:rPr>
-              <a:t>Open index.html and go. Three ready-made example programs are one click away; the Theory &amp; Help panel (top right of the tool) carries this same reference.</a:t>
-            </a:r>
-          </a:p>
-        </p:txBody>
-      </p:sp>
-      <p:sp>
-        <p:nvSpPr>
-          <p:cNvPr id="17" name="TextBox 16"/>
-          <p:cNvSpPr txBox="1"/>
-          <p:nvPr/>
-        </p:nvSpPr>
-        <p:spPr>
-          <a:xfrm>
-            <a:off x="502920" y="6528816"/>
-            <a:ext cx="6400800" cy="274320"/>
-          </a:xfrm>
-          <a:prstGeom prst="rect">
-            <a:avLst/>
-          </a:prstGeom>
-          <a:noFill/>
-        </p:spPr>
-        <p:txBody>
-          <a:bodyPr wrap="square" lIns="0" rIns="0" tIns="0" bIns="0">
-            <a:spAutoFit/>
-          </a:bodyPr>
-          <a:lstStyle/>
-          <a:p>
-            <a:pPr algn="l">
-              <a:lnSpc>
-                <a:spcPct val="120000"/>
-              </a:lnSpc>
-            </a:pPr>
-            <a:r>
-              <a:rPr sz="900" b="0">
-                <a:solidFill>
-                  <a:srgbClr val="54636F"/>
-                </a:solidFill>
-                <a:latin typeface="Consolas"/>
-              </a:rPr>
-              <a:t>DIGITAL TECHNOLOGIES · EDUCPU-8 — VISUAL ASSEMBLY SIMULATOR</a:t>
-            </a:r>
-          </a:p>
-        </p:txBody>
-      </p:sp>
-      <p:sp>
-        <p:nvSpPr>
-          <p:cNvPr id="18" name="TextBox 17"/>
-          <p:cNvSpPr txBox="1"/>
-          <p:nvPr/>
-        </p:nvSpPr>
-        <p:spPr>
-          <a:xfrm>
-            <a:off x="10271455" y="6528816"/>
-            <a:ext cx="1417320" cy="274320"/>
-          </a:xfrm>
-          <a:prstGeom prst="rect">
-            <a:avLst/>
-          </a:prstGeom>
-          <a:noFill/>
-        </p:spPr>
-        <p:txBody>
-          <a:bodyPr wrap="square" lIns="0" rIns="0" tIns="0" bIns="0">
+          <a:bodyPr wrap="square" lIns="0" tIns="0" rIns="0" bIns="0">
             <a:spAutoFit/>
           </a:bodyPr>
           <a:lstStyle/>
@@ -3813,7 +3873,7 @@
 </file>
 
 <file path=ppt/slides/slide2.xml><?xml version="1.0" encoding="utf-8"?>
-<p:sld xmlns:a="http://schemas.openxmlformats.org/drawingml/2006/main" xmlns:p="http://schemas.openxmlformats.org/presentationml/2006/main" xmlns:r="http://schemas.openxmlformats.org/officeDocument/2006/relationships">
+<p:sld xmlns:a="http://schemas.openxmlformats.org/drawingml/2006/main" xmlns:r="http://schemas.openxmlformats.org/officeDocument/2006/relationships" xmlns:p="http://schemas.openxmlformats.org/presentationml/2006/main">
   <p:cSld>
     <p:bg>
       <p:bgPr>
@@ -3829,7 +3889,14 @@
         <p:cNvGrpSpPr/>
         <p:nvPr/>
       </p:nvGrpSpPr>
-      <p:grpSpPr/>
+      <p:grpSpPr>
+        <a:xfrm>
+          <a:off x="0" y="0"/>
+          <a:ext cx="0" cy="0"/>
+          <a:chOff x="0" y="0"/>
+          <a:chExt cx="0" cy="0"/>
+        </a:xfrm>
+      </p:grpSpPr>
       <p:sp>
         <p:nvSpPr>
           <p:cNvPr id="2" name="Rectangle 1"/>
@@ -3871,6 +3938,7 @@
           <a:lstStyle/>
           <a:p>
             <a:pPr algn="ctr"/>
+            <a:endParaRPr/>
           </a:p>
         </p:txBody>
       </p:sp>
@@ -3915,6 +3983,7 @@
           <a:lstStyle/>
           <a:p>
             <a:pPr algn="ctr"/>
+            <a:endParaRPr/>
           </a:p>
         </p:txBody>
       </p:sp>
@@ -3935,7 +4004,7 @@
           <a:noFill/>
         </p:spPr>
         <p:txBody>
-          <a:bodyPr wrap="square" lIns="0" rIns="0" tIns="0" bIns="0">
+          <a:bodyPr wrap="square" lIns="0" tIns="0" rIns="0" bIns="0">
             <a:spAutoFit/>
           </a:bodyPr>
           <a:lstStyle/>
@@ -3974,7 +4043,7 @@
           <a:noFill/>
         </p:spPr>
         <p:txBody>
-          <a:bodyPr wrap="square" lIns="0" rIns="0" tIns="0" bIns="0">
+          <a:bodyPr wrap="square" lIns="0" tIns="0" rIns="0" bIns="0">
             <a:spAutoFit/>
           </a:bodyPr>
           <a:lstStyle/>
@@ -4013,7 +4082,7 @@
           <a:noFill/>
         </p:spPr>
         <p:txBody>
-          <a:bodyPr wrap="square" lIns="0" rIns="0" tIns="0" bIns="0">
+          <a:bodyPr wrap="square" lIns="0" tIns="0" rIns="0" bIns="0">
             <a:spAutoFit/>
           </a:bodyPr>
           <a:lstStyle/>
@@ -4052,7 +4121,7 @@
           <a:noFill/>
         </p:spPr>
         <p:txBody>
-          <a:bodyPr wrap="square" lIns="0" rIns="0" tIns="0" bIns="0">
+          <a:bodyPr wrap="square" lIns="0" tIns="0" rIns="0" bIns="0">
             <a:spAutoFit/>
           </a:bodyPr>
           <a:lstStyle/>
@@ -4091,7 +4160,7 @@
           <a:noFill/>
         </p:spPr>
         <p:txBody>
-          <a:bodyPr wrap="square" lIns="0" rIns="0" tIns="0" bIns="0">
+          <a:bodyPr wrap="square" lIns="0" tIns="0" rIns="0" bIns="0">
             <a:spAutoFit/>
           </a:bodyPr>
           <a:lstStyle/>
@@ -4198,7 +4267,7 @@
           <a:noFill/>
         </p:spPr>
         <p:txBody>
-          <a:bodyPr wrap="square" lIns="0" rIns="0" tIns="0" bIns="0">
+          <a:bodyPr wrap="square" lIns="0" tIns="0" rIns="0" bIns="0">
             <a:spAutoFit/>
           </a:bodyPr>
           <a:lstStyle/>
@@ -4237,7 +4306,7 @@
           <a:noFill/>
         </p:spPr>
         <p:txBody>
-          <a:bodyPr wrap="square" lIns="0" rIns="0" tIns="0" bIns="0">
+          <a:bodyPr wrap="square" lIns="0" tIns="0" rIns="0" bIns="0">
             <a:spAutoFit/>
           </a:bodyPr>
           <a:lstStyle/>
@@ -4304,6 +4373,7 @@
           <a:lstStyle/>
           <a:p>
             <a:pPr algn="ctr"/>
+            <a:endParaRPr/>
           </a:p>
         </p:txBody>
       </p:sp>
@@ -4324,7 +4394,7 @@
           <a:noFill/>
         </p:spPr>
         <p:txBody>
-          <a:bodyPr wrap="square" lIns="0" rIns="0" tIns="0" bIns="0">
+          <a:bodyPr wrap="square" lIns="0" tIns="0" rIns="0" bIns="0">
             <a:spAutoFit/>
           </a:bodyPr>
           <a:lstStyle/>
@@ -4363,7 +4433,7 @@
           <a:noFill/>
         </p:spPr>
         <p:txBody>
-          <a:bodyPr wrap="square" lIns="0" rIns="0" tIns="0" bIns="0">
+          <a:bodyPr wrap="square" lIns="0" tIns="0" rIns="0" bIns="0">
             <a:spAutoFit/>
           </a:bodyPr>
           <a:lstStyle/>
@@ -4430,6 +4500,7 @@
           <a:lstStyle/>
           <a:p>
             <a:pPr algn="ctr"/>
+            <a:endParaRPr/>
           </a:p>
         </p:txBody>
       </p:sp>
@@ -4450,7 +4521,7 @@
           <a:noFill/>
         </p:spPr>
         <p:txBody>
-          <a:bodyPr wrap="square" lIns="0" rIns="0" tIns="0" bIns="0">
+          <a:bodyPr wrap="square" lIns="0" tIns="0" rIns="0" bIns="0">
             <a:spAutoFit/>
           </a:bodyPr>
           <a:lstStyle/>
@@ -4489,7 +4560,7 @@
           <a:noFill/>
         </p:spPr>
         <p:txBody>
-          <a:bodyPr wrap="square" lIns="0" rIns="0" tIns="0" bIns="0">
+          <a:bodyPr wrap="square" lIns="0" tIns="0" rIns="0" bIns="0">
             <a:spAutoFit/>
           </a:bodyPr>
           <a:lstStyle/>
@@ -4528,7 +4599,7 @@
           <a:noFill/>
         </p:spPr>
         <p:txBody>
-          <a:bodyPr wrap="square" lIns="0" rIns="0" tIns="0" bIns="0">
+          <a:bodyPr wrap="square" lIns="0" tIns="0" rIns="0" bIns="0">
             <a:spAutoFit/>
           </a:bodyPr>
           <a:lstStyle/>
@@ -4567,7 +4638,7 @@
           <a:noFill/>
         </p:spPr>
         <p:txBody>
-          <a:bodyPr wrap="square" lIns="0" rIns="0" tIns="0" bIns="0">
+          <a:bodyPr wrap="square" lIns="0" tIns="0" rIns="0" bIns="0">
             <a:spAutoFit/>
           </a:bodyPr>
           <a:lstStyle/>
@@ -4598,7 +4669,7 @@
 </file>
 
 <file path=ppt/slides/slide3.xml><?xml version="1.0" encoding="utf-8"?>
-<p:sld xmlns:a="http://schemas.openxmlformats.org/drawingml/2006/main" xmlns:p="http://schemas.openxmlformats.org/presentationml/2006/main" xmlns:r="http://schemas.openxmlformats.org/officeDocument/2006/relationships">
+<p:sld xmlns:a="http://schemas.openxmlformats.org/drawingml/2006/main" xmlns:r="http://schemas.openxmlformats.org/officeDocument/2006/relationships" xmlns:p="http://schemas.openxmlformats.org/presentationml/2006/main">
   <p:cSld>
     <p:bg>
       <p:bgPr>
@@ -4614,7 +4685,14 @@
         <p:cNvGrpSpPr/>
         <p:nvPr/>
       </p:nvGrpSpPr>
-      <p:grpSpPr/>
+      <p:grpSpPr>
+        <a:xfrm>
+          <a:off x="0" y="0"/>
+          <a:ext cx="0" cy="0"/>
+          <a:chOff x="0" y="0"/>
+          <a:chExt cx="0" cy="0"/>
+        </a:xfrm>
+      </p:grpSpPr>
       <p:sp>
         <p:nvSpPr>
           <p:cNvPr id="2" name="Rectangle 1"/>
@@ -4656,6 +4734,7 @@
           <a:lstStyle/>
           <a:p>
             <a:pPr algn="ctr"/>
+            <a:endParaRPr/>
           </a:p>
         </p:txBody>
       </p:sp>
@@ -4700,6 +4779,7 @@
           <a:lstStyle/>
           <a:p>
             <a:pPr algn="ctr"/>
+            <a:endParaRPr/>
           </a:p>
         </p:txBody>
       </p:sp>
@@ -4720,7 +4800,7 @@
           <a:noFill/>
         </p:spPr>
         <p:txBody>
-          <a:bodyPr wrap="square" lIns="0" rIns="0" tIns="0" bIns="0">
+          <a:bodyPr wrap="square" lIns="0" tIns="0" rIns="0" bIns="0">
             <a:spAutoFit/>
           </a:bodyPr>
           <a:lstStyle/>
@@ -4759,7 +4839,7 @@
           <a:noFill/>
         </p:spPr>
         <p:txBody>
-          <a:bodyPr wrap="square" lIns="0" rIns="0" tIns="0" bIns="0">
+          <a:bodyPr wrap="square" lIns="0" tIns="0" rIns="0" bIns="0">
             <a:spAutoFit/>
           </a:bodyPr>
           <a:lstStyle/>
@@ -4798,7 +4878,7 @@
           <a:noFill/>
         </p:spPr>
         <p:txBody>
-          <a:bodyPr wrap="square" lIns="0" rIns="0" tIns="0" bIns="0">
+          <a:bodyPr wrap="square" lIns="0" tIns="0" rIns="0" bIns="0">
             <a:spAutoFit/>
           </a:bodyPr>
           <a:lstStyle/>
@@ -4837,7 +4917,7 @@
           <a:noFill/>
         </p:spPr>
         <p:txBody>
-          <a:bodyPr wrap="square" lIns="0" rIns="0" tIns="0" bIns="0">
+          <a:bodyPr wrap="square" lIns="0" tIns="0" rIns="0" bIns="0">
             <a:spAutoFit/>
           </a:bodyPr>
           <a:lstStyle/>
@@ -4868,7 +4948,7 @@
         <p:spPr>
           <a:xfrm>
             <a:off x="502920" y="1965960"/>
-            <a:ext cx="6400800" cy="2377440"/>
+            <a:ext cx="6400800" cy="2124043"/>
           </a:xfrm>
           <a:prstGeom prst="rect">
             <a:avLst/>
@@ -4876,7 +4956,7 @@
           <a:noFill/>
         </p:spPr>
         <p:txBody>
-          <a:bodyPr wrap="square" lIns="0" rIns="0" tIns="0" bIns="0">
+          <a:bodyPr wrap="square" lIns="0" tIns="0" rIns="0" bIns="0">
             <a:spAutoFit/>
           </a:bodyPr>
           <a:lstStyle/>
@@ -4890,7 +4970,7 @@
               </a:spcAft>
             </a:pPr>
             <a:r>
-              <a:rPr sz="1350" b="1">
+              <a:rPr sz="1350" b="1" dirty="0">
                 <a:solidFill>
                   <a:srgbClr val="B98CF2"/>
                 </a:solidFill>
@@ -4899,13 +4979,22 @@
               <a:t>•  </a:t>
             </a:r>
             <a:r>
-              <a:rPr sz="1350" b="0">
+              <a:rPr sz="1350" b="1" dirty="0">
+                <a:solidFill>
+                  <a:srgbClr val="FF0000"/>
+                </a:solidFill>
+                <a:latin typeface="Consolas"/>
+              </a:rPr>
+              <a:t>ACC</a:t>
+            </a:r>
+            <a:r>
+              <a:rPr sz="1350" b="0" dirty="0">
                 <a:solidFill>
                   <a:srgbClr val="8496A6"/>
                 </a:solidFill>
                 <a:latin typeface="Consolas"/>
               </a:rPr>
-              <a:t>ACC is the only general register — every value passes through it, so "processing" is always visible in one place.</a:t>
+              <a:t> is the only general register — every value passes through it, so "processing" is always visible in one place.</a:t>
             </a:r>
           </a:p>
           <a:p>
@@ -4918,7 +5007,7 @@
               </a:spcAft>
             </a:pPr>
             <a:r>
-              <a:rPr sz="1350" b="1">
+              <a:rPr sz="1350" b="1" dirty="0">
                 <a:solidFill>
                   <a:srgbClr val="B98CF2"/>
                 </a:solidFill>
@@ -4927,13 +5016,22 @@
               <a:t>•  </a:t>
             </a:r>
             <a:r>
-              <a:rPr sz="1350" b="0">
+              <a:rPr sz="1350" b="0" dirty="0">
+                <a:solidFill>
+                  <a:srgbClr val="FF0000"/>
+                </a:solidFill>
+                <a:latin typeface="Consolas"/>
+              </a:rPr>
+              <a:t>16 memory cells </a:t>
+            </a:r>
+            <a:r>
+              <a:rPr sz="1350" b="0" dirty="0">
                 <a:solidFill>
                   <a:srgbClr val="8496A6"/>
                 </a:solidFill>
                 <a:latin typeface="Consolas"/>
               </a:rPr>
-              <a:t>16 memory cells (addresses 0–15) hold data; the program is a separate list of instructions, so there’s no self-modifying code to explain.</a:t>
+              <a:t>(addresses 0–15) hold data; the program is a separate list of instructions, so there’s no self-modifying code to explain.</a:t>
             </a:r>
           </a:p>
           <a:p>
@@ -4946,7 +5044,7 @@
               </a:spcAft>
             </a:pPr>
             <a:r>
-              <a:rPr sz="1350" b="1">
+              <a:rPr sz="1350" b="1" dirty="0">
                 <a:solidFill>
                   <a:srgbClr val="B98CF2"/>
                 </a:solidFill>
@@ -4955,27 +5053,36 @@
               <a:t>•  </a:t>
             </a:r>
             <a:r>
-              <a:rPr sz="1350" b="0">
+              <a:rPr sz="1350" b="0" dirty="0">
+                <a:solidFill>
+                  <a:srgbClr val="FF0000"/>
+                </a:solidFill>
+                <a:latin typeface="Consolas"/>
+              </a:rPr>
+              <a:t>PC</a:t>
+            </a:r>
+            <a:r>
+              <a:rPr sz="1350" b="0" dirty="0">
                 <a:solidFill>
                   <a:srgbClr val="8496A6"/>
                 </a:solidFill>
                 <a:latin typeface="Consolas"/>
               </a:rPr>
-              <a:t>PC always shows which line runs next; the Zero flag records whether the last LOAD/ADD/SUB produced 0.</a:t>
-            </a:r>
-          </a:p>
-        </p:txBody>
-      </p:sp>
-      <p:sp>
-        <p:nvSpPr>
-          <p:cNvPr id="9" name="TextBox 8"/>
+              <a:t> always shows which line runs next; the Zero flag records whether the last LOAD/ADD/SUB produced 0.</a:t>
+            </a:r>
+          </a:p>
+        </p:txBody>
+      </p:sp>
+      <p:sp>
+        <p:nvSpPr>
+          <p:cNvPr id="10" name="TextBox 9"/>
           <p:cNvSpPr txBox="1"/>
           <p:nvPr/>
         </p:nvSpPr>
         <p:spPr>
           <a:xfrm>
-            <a:off x="502920" y="3977639"/>
-            <a:ext cx="6400800" cy="274320"/>
+            <a:off x="502920" y="4325112"/>
+            <a:ext cx="6400800" cy="781817"/>
           </a:xfrm>
           <a:prstGeom prst="rect">
             <a:avLst/>
@@ -4983,46 +5090,7 @@
           <a:noFill/>
         </p:spPr>
         <p:txBody>
-          <a:bodyPr wrap="square" lIns="0" rIns="0" tIns="0" bIns="0">
-            <a:spAutoFit/>
-          </a:bodyPr>
-          <a:lstStyle/>
-          <a:p>
-            <a:pPr algn="l">
-              <a:lnSpc>
-                <a:spcPct val="120000"/>
-              </a:lnSpc>
-            </a:pPr>
-            <a:r>
-              <a:rPr sz="1100" b="1">
-                <a:solidFill>
-                  <a:srgbClr val="8496A6"/>
-                </a:solidFill>
-                <a:latin typeface="Segoe UI Semibold"/>
-              </a:rPr>
-              <a:t>THE BUILD</a:t>
-            </a:r>
-          </a:p>
-        </p:txBody>
-      </p:sp>
-      <p:sp>
-        <p:nvSpPr>
-          <p:cNvPr id="10" name="TextBox 9"/>
-          <p:cNvSpPr txBox="1"/>
-          <p:nvPr/>
-        </p:nvSpPr>
-        <p:spPr>
-          <a:xfrm>
-            <a:off x="502920" y="4315968"/>
-            <a:ext cx="6400800" cy="1280160"/>
-          </a:xfrm>
-          <a:prstGeom prst="rect">
-            <a:avLst/>
-          </a:prstGeom>
-          <a:noFill/>
-        </p:spPr>
-        <p:txBody>
-          <a:bodyPr wrap="square" lIns="0" rIns="0" tIns="0" bIns="0">
+          <a:bodyPr wrap="square" lIns="0" tIns="0" rIns="0" bIns="0">
             <a:spAutoFit/>
           </a:bodyPr>
           <a:lstStyle/>
@@ -5033,13 +5101,135 @@
               </a:lnSpc>
             </a:pPr>
             <a:r>
-              <a:rPr sz="1250" b="0">
+              <a:rPr sz="1250" b="0" dirty="0">
                 <a:solidFill>
                   <a:srgbClr val="8496A6"/>
                 </a:solidFill>
                 <a:latin typeface="Consolas"/>
               </a:rPr>
-              <a:t>Nine instructions cover everything: moving data (LOAD/STORE), arithmetic (ADD/SUB), control flow (JMP/JZ), output (OUT/OUTC), and stopping (HALT). The full reference is one click away in the Theory &amp; Help panel — and on the next slide.</a:t>
+              <a:t>Nine instructions cover everything: </a:t>
+            </a:r>
+            <a:endParaRPr lang="en-AU" sz="1250" b="0" dirty="0">
+              <a:solidFill>
+                <a:srgbClr val="8496A6"/>
+              </a:solidFill>
+              <a:latin typeface="Consolas"/>
+            </a:endParaRPr>
+          </a:p>
+          <a:p>
+            <a:pPr algn="l">
+              <a:lnSpc>
+                <a:spcPct val="140000"/>
+              </a:lnSpc>
+            </a:pPr>
+            <a:r>
+              <a:rPr sz="1250" b="0" dirty="0">
+                <a:solidFill>
+                  <a:srgbClr val="8496A6"/>
+                </a:solidFill>
+                <a:latin typeface="Consolas"/>
+              </a:rPr>
+              <a:t>moving data </a:t>
+            </a:r>
+            <a:r>
+              <a:rPr sz="1250" b="0" dirty="0">
+                <a:solidFill>
+                  <a:schemeClr val="accent6">
+                    <a:lumMod val="75000"/>
+                  </a:schemeClr>
+                </a:solidFill>
+                <a:latin typeface="Consolas"/>
+              </a:rPr>
+              <a:t>(LOAD/STORE), </a:t>
+            </a:r>
+            <a:r>
+              <a:rPr sz="1250" b="0" dirty="0">
+                <a:solidFill>
+                  <a:srgbClr val="8496A6"/>
+                </a:solidFill>
+                <a:latin typeface="Consolas"/>
+              </a:rPr>
+              <a:t>arithmetic </a:t>
+            </a:r>
+            <a:r>
+              <a:rPr sz="1250" b="0" dirty="0">
+                <a:solidFill>
+                  <a:schemeClr val="accent6">
+                    <a:lumMod val="75000"/>
+                  </a:schemeClr>
+                </a:solidFill>
+                <a:latin typeface="Consolas"/>
+              </a:rPr>
+              <a:t>(ADD/SUB), </a:t>
+            </a:r>
+            <a:r>
+              <a:rPr sz="1250" b="0" dirty="0">
+                <a:solidFill>
+                  <a:srgbClr val="8496A6"/>
+                </a:solidFill>
+                <a:latin typeface="Consolas"/>
+              </a:rPr>
+              <a:t>control flow </a:t>
+            </a:r>
+            <a:r>
+              <a:rPr sz="1250" b="0" dirty="0">
+                <a:solidFill>
+                  <a:schemeClr val="accent6">
+                    <a:lumMod val="75000"/>
+                  </a:schemeClr>
+                </a:solidFill>
+                <a:latin typeface="Consolas"/>
+              </a:rPr>
+              <a:t>(JMP/JZ), </a:t>
+            </a:r>
+            <a:r>
+              <a:rPr sz="1250" b="0" dirty="0">
+                <a:solidFill>
+                  <a:srgbClr val="8496A6"/>
+                </a:solidFill>
+                <a:latin typeface="Consolas"/>
+              </a:rPr>
+              <a:t>output </a:t>
+            </a:r>
+            <a:r>
+              <a:rPr sz="1250" b="0" dirty="0">
+                <a:solidFill>
+                  <a:schemeClr val="accent6">
+                    <a:lumMod val="75000"/>
+                  </a:schemeClr>
+                </a:solidFill>
+                <a:latin typeface="Consolas"/>
+              </a:rPr>
+              <a:t>(OUT/OUTC), </a:t>
+            </a:r>
+            <a:r>
+              <a:rPr sz="1250" b="0" dirty="0">
+                <a:solidFill>
+                  <a:srgbClr val="8496A6"/>
+                </a:solidFill>
+                <a:latin typeface="Consolas"/>
+              </a:rPr>
+              <a:t>and stopping (</a:t>
+            </a:r>
+            <a:r>
+              <a:rPr sz="1250" b="0" dirty="0">
+                <a:solidFill>
+                  <a:schemeClr val="accent6">
+                    <a:lumMod val="75000"/>
+                  </a:schemeClr>
+                </a:solidFill>
+                <a:latin typeface="Consolas"/>
+              </a:rPr>
+              <a:t>HALT</a:t>
+            </a:r>
+            <a:r>
+              <a:rPr sz="1250" b="0" dirty="0">
+                <a:solidFill>
+                  <a:srgbClr val="8496A6"/>
+                </a:solidFill>
+                <a:latin typeface="Consolas"/>
+              </a:rPr>
+              <a:t>).</a:t>
             </a:r>
           </a:p>
         </p:txBody>
@@ -5089,6 +5279,7 @@
           <a:lstStyle/>
           <a:p>
             <a:pPr algn="ctr"/>
+            <a:endParaRPr/>
           </a:p>
         </p:txBody>
       </p:sp>
@@ -5109,7 +5300,7 @@
           <a:noFill/>
         </p:spPr>
         <p:txBody>
-          <a:bodyPr wrap="square" lIns="0" rIns="0" tIns="0" bIns="0">
+          <a:bodyPr wrap="square" lIns="0" tIns="0" rIns="0" bIns="0">
             <a:spAutoFit/>
           </a:bodyPr>
           <a:lstStyle/>
@@ -5148,7 +5339,7 @@
           <a:noFill/>
         </p:spPr>
         <p:txBody>
-          <a:bodyPr wrap="square" lIns="0" rIns="0" tIns="0" bIns="0">
+          <a:bodyPr wrap="square" lIns="0" tIns="0" rIns="0" bIns="0">
             <a:spAutoFit/>
           </a:bodyPr>
           <a:lstStyle/>
@@ -5215,6 +5406,7 @@
           <a:lstStyle/>
           <a:p>
             <a:pPr algn="ctr"/>
+            <a:endParaRPr/>
           </a:p>
         </p:txBody>
       </p:sp>
@@ -5235,7 +5427,7 @@
           <a:noFill/>
         </p:spPr>
         <p:txBody>
-          <a:bodyPr wrap="square" lIns="0" rIns="0" tIns="0" bIns="0">
+          <a:bodyPr wrap="square" lIns="0" tIns="0" rIns="0" bIns="0">
             <a:spAutoFit/>
           </a:bodyPr>
           <a:lstStyle/>
@@ -5274,7 +5466,7 @@
           <a:noFill/>
         </p:spPr>
         <p:txBody>
-          <a:bodyPr wrap="square" lIns="0" rIns="0" tIns="0" bIns="0">
+          <a:bodyPr wrap="square" lIns="0" tIns="0" rIns="0" bIns="0">
             <a:spAutoFit/>
           </a:bodyPr>
           <a:lstStyle/>
@@ -5313,7 +5505,7 @@
           <a:noFill/>
         </p:spPr>
         <p:txBody>
-          <a:bodyPr wrap="square" lIns="0" rIns="0" tIns="0" bIns="0">
+          <a:bodyPr wrap="square" lIns="0" tIns="0" rIns="0" bIns="0">
             <a:spAutoFit/>
           </a:bodyPr>
           <a:lstStyle/>
@@ -5352,7 +5544,7 @@
           <a:noFill/>
         </p:spPr>
         <p:txBody>
-          <a:bodyPr wrap="square" lIns="0" rIns="0" tIns="0" bIns="0">
+          <a:bodyPr wrap="square" lIns="0" tIns="0" rIns="0" bIns="0">
             <a:spAutoFit/>
           </a:bodyPr>
           <a:lstStyle/>
@@ -5383,7 +5575,7 @@
 </file>
 
 <file path=ppt/slides/slide4.xml><?xml version="1.0" encoding="utf-8"?>
-<p:sld xmlns:a="http://schemas.openxmlformats.org/drawingml/2006/main" xmlns:p="http://schemas.openxmlformats.org/presentationml/2006/main" xmlns:r="http://schemas.openxmlformats.org/officeDocument/2006/relationships">
+<p:sld xmlns:a="http://schemas.openxmlformats.org/drawingml/2006/main" xmlns:r="http://schemas.openxmlformats.org/officeDocument/2006/relationships" xmlns:p="http://schemas.openxmlformats.org/presentationml/2006/main">
   <p:cSld>
     <p:bg>
       <p:bgPr>
@@ -5399,7 +5591,14 @@
         <p:cNvGrpSpPr/>
         <p:nvPr/>
       </p:nvGrpSpPr>
-      <p:grpSpPr/>
+      <p:grpSpPr>
+        <a:xfrm>
+          <a:off x="0" y="0"/>
+          <a:ext cx="0" cy="0"/>
+          <a:chOff x="0" y="0"/>
+          <a:chExt cx="0" cy="0"/>
+        </a:xfrm>
+      </p:grpSpPr>
       <p:sp>
         <p:nvSpPr>
           <p:cNvPr id="2" name="Rectangle 1"/>
@@ -5441,6 +5640,7 @@
           <a:lstStyle/>
           <a:p>
             <a:pPr algn="ctr"/>
+            <a:endParaRPr/>
           </a:p>
         </p:txBody>
       </p:sp>
@@ -5485,6 +5685,7 @@
           <a:lstStyle/>
           <a:p>
             <a:pPr algn="ctr"/>
+            <a:endParaRPr/>
           </a:p>
         </p:txBody>
       </p:sp>
@@ -5505,7 +5706,7 @@
           <a:noFill/>
         </p:spPr>
         <p:txBody>
-          <a:bodyPr wrap="square" lIns="0" rIns="0" tIns="0" bIns="0">
+          <a:bodyPr wrap="square" lIns="0" tIns="0" rIns="0" bIns="0">
             <a:spAutoFit/>
           </a:bodyPr>
           <a:lstStyle/>
@@ -5544,7 +5745,7 @@
           <a:noFill/>
         </p:spPr>
         <p:txBody>
-          <a:bodyPr wrap="square" lIns="0" rIns="0" tIns="0" bIns="0">
+          <a:bodyPr wrap="square" lIns="0" tIns="0" rIns="0" bIns="0">
             <a:spAutoFit/>
           </a:bodyPr>
           <a:lstStyle/>
@@ -5583,7 +5784,7 @@
           <a:noFill/>
         </p:spPr>
         <p:txBody>
-          <a:bodyPr wrap="square" lIns="0" rIns="0" tIns="0" bIns="0">
+          <a:bodyPr wrap="square" lIns="0" tIns="0" rIns="0" bIns="0">
             <a:spAutoFit/>
           </a:bodyPr>
           <a:lstStyle/>
@@ -5622,7 +5823,7 @@
           <a:noFill/>
         </p:spPr>
         <p:txBody>
-          <a:bodyPr wrap="square" lIns="0" rIns="0" tIns="0" bIns="0">
+          <a:bodyPr wrap="square" lIns="0" tIns="0" rIns="0" bIns="0">
             <a:spAutoFit/>
           </a:bodyPr>
           <a:lstStyle/>
@@ -5654,7 +5855,7 @@
         </p:nvGraphicFramePr>
         <p:xfrm>
           <a:off x="502920" y="2011680"/>
-          <a:ext cx="11155680" cy="4297680"/>
+          <a:ext cx="11155680" cy="4337304"/>
         </p:xfrm>
         <a:graphic>
           <a:graphicData uri="http://schemas.openxmlformats.org/drawingml/2006/table">
@@ -5663,14 +5864,32 @@
                 <a:tableStyleId>{5C22544A-7EE6-4342-B048-85BDC9FD1C3A}</a:tableStyleId>
               </a:tblPr>
               <a:tblGrid>
-                <a:gridCol w="3718560"/>
-                <a:gridCol w="3718560"/>
-                <a:gridCol w="3718560"/>
+                <a:gridCol w="3718560">
+                  <a:extLst>
+                    <a:ext uri="{9D8B030D-6E8A-4147-A177-3AD203B41FA5}">
+                      <a16:colId xmlns:a16="http://schemas.microsoft.com/office/drawing/2014/main" val="20000"/>
+                    </a:ext>
+                  </a:extLst>
+                </a:gridCol>
+                <a:gridCol w="3718560">
+                  <a:extLst>
+                    <a:ext uri="{9D8B030D-6E8A-4147-A177-3AD203B41FA5}">
+                      <a16:colId xmlns:a16="http://schemas.microsoft.com/office/drawing/2014/main" val="20001"/>
+                    </a:ext>
+                  </a:extLst>
+                </a:gridCol>
+                <a:gridCol w="3718560">
+                  <a:extLst>
+                    <a:ext uri="{9D8B030D-6E8A-4147-A177-3AD203B41FA5}">
+                      <a16:colId xmlns:a16="http://schemas.microsoft.com/office/drawing/2014/main" val="20002"/>
+                    </a:ext>
+                  </a:extLst>
+                </a:gridCol>
               </a:tblGrid>
               <a:tr h="429768">
                 <a:tc>
                   <a:txBody>
-                    <a:bodyPr wrap="square"/>
+                    <a:bodyPr/>
                     <a:lstStyle/>
                     <a:p>
                       <a:r>
@@ -5684,7 +5903,7 @@
                       </a:r>
                     </a:p>
                   </a:txBody>
-                  <a:tcPr marL="91440" marR="91440" marT="45720" marB="45720" anchor="ctr">
+                  <a:tcPr anchor="ctr">
                     <a:solidFill>
                       <a:srgbClr val="1A222C"/>
                     </a:solidFill>
@@ -5692,7 +5911,7 @@
                 </a:tc>
                 <a:tc>
                   <a:txBody>
-                    <a:bodyPr wrap="square"/>
+                    <a:bodyPr/>
                     <a:lstStyle/>
                     <a:p>
                       <a:r>
@@ -5706,7 +5925,7 @@
                       </a:r>
                     </a:p>
                   </a:txBody>
-                  <a:tcPr marL="91440" marR="91440" marT="45720" marB="45720" anchor="ctr">
+                  <a:tcPr anchor="ctr">
                     <a:solidFill>
                       <a:srgbClr val="1A222C"/>
                     </a:solidFill>
@@ -5714,7 +5933,7 @@
                 </a:tc>
                 <a:tc>
                   <a:txBody>
-                    <a:bodyPr wrap="square"/>
+                    <a:bodyPr/>
                     <a:lstStyle/>
                     <a:p>
                       <a:r>
@@ -5728,17 +5947,22 @@
                       </a:r>
                     </a:p>
                   </a:txBody>
-                  <a:tcPr marL="91440" marR="91440" marT="45720" marB="45720" anchor="ctr">
+                  <a:tcPr anchor="ctr">
                     <a:solidFill>
                       <a:srgbClr val="1A222C"/>
                     </a:solidFill>
                   </a:tcPr>
                 </a:tc>
+                <a:extLst>
+                  <a:ext uri="{0D108BD9-81ED-4DB2-BD59-A6C34878D82A}">
+                    <a16:rowId xmlns:a16="http://schemas.microsoft.com/office/drawing/2014/main" val="10000"/>
+                  </a:ext>
+                </a:extLst>
               </a:tr>
               <a:tr h="429768">
                 <a:tc>
                   <a:txBody>
-                    <a:bodyPr wrap="square"/>
+                    <a:bodyPr/>
                     <a:lstStyle/>
                     <a:p>
                       <a:r>
@@ -5752,7 +5976,7 @@
                       </a:r>
                     </a:p>
                   </a:txBody>
-                  <a:tcPr marL="91440" marR="91440" marT="36576" marB="36576" anchor="ctr">
+                  <a:tcPr marT="36576" marB="36576" anchor="ctr">
                     <a:solidFill>
                       <a:srgbClr val="121821"/>
                     </a:solidFill>
@@ -5760,7 +5984,7 @@
                 </a:tc>
                 <a:tc>
                   <a:txBody>
-                    <a:bodyPr wrap="square"/>
+                    <a:bodyPr/>
                     <a:lstStyle/>
                     <a:p>
                       <a:r>
@@ -5774,7 +5998,7 @@
                       </a:r>
                     </a:p>
                   </a:txBody>
-                  <a:tcPr marL="91440" marR="91440" marT="36576" marB="36576" anchor="ctr">
+                  <a:tcPr marT="36576" marB="36576" anchor="ctr">
                     <a:solidFill>
                       <a:srgbClr val="121821"/>
                     </a:solidFill>
@@ -5782,7 +6006,7 @@
                 </a:tc>
                 <a:tc>
                   <a:txBody>
-                    <a:bodyPr wrap="square"/>
+                    <a:bodyPr/>
                     <a:lstStyle/>
                     <a:p>
                       <a:r>
@@ -5796,17 +6020,22 @@
                       </a:r>
                     </a:p>
                   </a:txBody>
-                  <a:tcPr marL="91440" marR="91440" marT="36576" marB="36576" anchor="ctr">
+                  <a:tcPr marT="36576" marB="36576" anchor="ctr">
                     <a:solidFill>
                       <a:srgbClr val="121821"/>
                     </a:solidFill>
                   </a:tcPr>
                 </a:tc>
+                <a:extLst>
+                  <a:ext uri="{0D108BD9-81ED-4DB2-BD59-A6C34878D82A}">
+                    <a16:rowId xmlns:a16="http://schemas.microsoft.com/office/drawing/2014/main" val="10001"/>
+                  </a:ext>
+                </a:extLst>
               </a:tr>
               <a:tr h="429768">
                 <a:tc>
                   <a:txBody>
-                    <a:bodyPr wrap="square"/>
+                    <a:bodyPr/>
                     <a:lstStyle/>
                     <a:p>
                       <a:r>
@@ -5820,7 +6049,7 @@
                       </a:r>
                     </a:p>
                   </a:txBody>
-                  <a:tcPr marL="91440" marR="91440" marT="36576" marB="36576" anchor="ctr">
+                  <a:tcPr marT="36576" marB="36576" anchor="ctr">
                     <a:solidFill>
                       <a:srgbClr val="121821"/>
                     </a:solidFill>
@@ -5828,7 +6057,7 @@
                 </a:tc>
                 <a:tc>
                   <a:txBody>
-                    <a:bodyPr wrap="square"/>
+                    <a:bodyPr/>
                     <a:lstStyle/>
                     <a:p>
                       <a:r>
@@ -5842,7 +6071,7 @@
                       </a:r>
                     </a:p>
                   </a:txBody>
-                  <a:tcPr marL="91440" marR="91440" marT="36576" marB="36576" anchor="ctr">
+                  <a:tcPr marT="36576" marB="36576" anchor="ctr">
                     <a:solidFill>
                       <a:srgbClr val="121821"/>
                     </a:solidFill>
@@ -5850,7 +6079,7 @@
                 </a:tc>
                 <a:tc>
                   <a:txBody>
-                    <a:bodyPr wrap="square"/>
+                    <a:bodyPr/>
                     <a:lstStyle/>
                     <a:p>
                       <a:r>
@@ -5864,17 +6093,22 @@
                       </a:r>
                     </a:p>
                   </a:txBody>
-                  <a:tcPr marL="91440" marR="91440" marT="36576" marB="36576" anchor="ctr">
+                  <a:tcPr marT="36576" marB="36576" anchor="ctr">
                     <a:solidFill>
                       <a:srgbClr val="121821"/>
                     </a:solidFill>
                   </a:tcPr>
                 </a:tc>
+                <a:extLst>
+                  <a:ext uri="{0D108BD9-81ED-4DB2-BD59-A6C34878D82A}">
+                    <a16:rowId xmlns:a16="http://schemas.microsoft.com/office/drawing/2014/main" val="10002"/>
+                  </a:ext>
+                </a:extLst>
               </a:tr>
               <a:tr h="429768">
                 <a:tc>
                   <a:txBody>
-                    <a:bodyPr wrap="square"/>
+                    <a:bodyPr/>
                     <a:lstStyle/>
                     <a:p>
                       <a:r>
@@ -5888,7 +6122,7 @@
                       </a:r>
                     </a:p>
                   </a:txBody>
-                  <a:tcPr marL="91440" marR="91440" marT="36576" marB="36576" anchor="ctr">
+                  <a:tcPr marT="36576" marB="36576" anchor="ctr">
                     <a:solidFill>
                       <a:srgbClr val="121821"/>
                     </a:solidFill>
@@ -5896,7 +6130,7 @@
                 </a:tc>
                 <a:tc>
                   <a:txBody>
-                    <a:bodyPr wrap="square"/>
+                    <a:bodyPr/>
                     <a:lstStyle/>
                     <a:p>
                       <a:r>
@@ -5910,7 +6144,7 @@
                       </a:r>
                     </a:p>
                   </a:txBody>
-                  <a:tcPr marL="91440" marR="91440" marT="36576" marB="36576" anchor="ctr">
+                  <a:tcPr marT="36576" marB="36576" anchor="ctr">
                     <a:solidFill>
                       <a:srgbClr val="121821"/>
                     </a:solidFill>
@@ -5918,7 +6152,7 @@
                 </a:tc>
                 <a:tc>
                   <a:txBody>
-                    <a:bodyPr wrap="square"/>
+                    <a:bodyPr/>
                     <a:lstStyle/>
                     <a:p>
                       <a:r>
@@ -5932,17 +6166,22 @@
                       </a:r>
                     </a:p>
                   </a:txBody>
-                  <a:tcPr marL="91440" marR="91440" marT="36576" marB="36576" anchor="ctr">
+                  <a:tcPr marT="36576" marB="36576" anchor="ctr">
                     <a:solidFill>
                       <a:srgbClr val="121821"/>
                     </a:solidFill>
                   </a:tcPr>
                 </a:tc>
+                <a:extLst>
+                  <a:ext uri="{0D108BD9-81ED-4DB2-BD59-A6C34878D82A}">
+                    <a16:rowId xmlns:a16="http://schemas.microsoft.com/office/drawing/2014/main" val="10003"/>
+                  </a:ext>
+                </a:extLst>
               </a:tr>
               <a:tr h="429768">
                 <a:tc>
                   <a:txBody>
-                    <a:bodyPr wrap="square"/>
+                    <a:bodyPr/>
                     <a:lstStyle/>
                     <a:p>
                       <a:r>
@@ -5956,7 +6195,7 @@
                       </a:r>
                     </a:p>
                   </a:txBody>
-                  <a:tcPr marL="91440" marR="91440" marT="36576" marB="36576" anchor="ctr">
+                  <a:tcPr marT="36576" marB="36576" anchor="ctr">
                     <a:solidFill>
                       <a:srgbClr val="121821"/>
                     </a:solidFill>
@@ -5964,7 +6203,7 @@
                 </a:tc>
                 <a:tc>
                   <a:txBody>
-                    <a:bodyPr wrap="square"/>
+                    <a:bodyPr/>
                     <a:lstStyle/>
                     <a:p>
                       <a:r>
@@ -5978,7 +6217,7 @@
                       </a:r>
                     </a:p>
                   </a:txBody>
-                  <a:tcPr marL="91440" marR="91440" marT="36576" marB="36576" anchor="ctr">
+                  <a:tcPr marT="36576" marB="36576" anchor="ctr">
                     <a:solidFill>
                       <a:srgbClr val="121821"/>
                     </a:solidFill>
@@ -5986,7 +6225,7 @@
                 </a:tc>
                 <a:tc>
                   <a:txBody>
-                    <a:bodyPr wrap="square"/>
+                    <a:bodyPr/>
                     <a:lstStyle/>
                     <a:p>
                       <a:r>
@@ -6000,17 +6239,22 @@
                       </a:r>
                     </a:p>
                   </a:txBody>
-                  <a:tcPr marL="91440" marR="91440" marT="36576" marB="36576" anchor="ctr">
+                  <a:tcPr marT="36576" marB="36576" anchor="ctr">
                     <a:solidFill>
                       <a:srgbClr val="121821"/>
                     </a:solidFill>
                   </a:tcPr>
                 </a:tc>
+                <a:extLst>
+                  <a:ext uri="{0D108BD9-81ED-4DB2-BD59-A6C34878D82A}">
+                    <a16:rowId xmlns:a16="http://schemas.microsoft.com/office/drawing/2014/main" val="10004"/>
+                  </a:ext>
+                </a:extLst>
               </a:tr>
               <a:tr h="429768">
                 <a:tc>
                   <a:txBody>
-                    <a:bodyPr wrap="square"/>
+                    <a:bodyPr/>
                     <a:lstStyle/>
                     <a:p>
                       <a:r>
@@ -6024,7 +6268,7 @@
                       </a:r>
                     </a:p>
                   </a:txBody>
-                  <a:tcPr marL="91440" marR="91440" marT="36576" marB="36576" anchor="ctr">
+                  <a:tcPr marT="36576" marB="36576" anchor="ctr">
                     <a:solidFill>
                       <a:srgbClr val="121821"/>
                     </a:solidFill>
@@ -6032,7 +6276,7 @@
                 </a:tc>
                 <a:tc>
                   <a:txBody>
-                    <a:bodyPr wrap="square"/>
+                    <a:bodyPr/>
                     <a:lstStyle/>
                     <a:p>
                       <a:r>
@@ -6046,7 +6290,7 @@
                       </a:r>
                     </a:p>
                   </a:txBody>
-                  <a:tcPr marL="91440" marR="91440" marT="36576" marB="36576" anchor="ctr">
+                  <a:tcPr marT="36576" marB="36576" anchor="ctr">
                     <a:solidFill>
                       <a:srgbClr val="121821"/>
                     </a:solidFill>
@@ -6054,7 +6298,7 @@
                 </a:tc>
                 <a:tc>
                   <a:txBody>
-                    <a:bodyPr wrap="square"/>
+                    <a:bodyPr/>
                     <a:lstStyle/>
                     <a:p>
                       <a:r>
@@ -6068,17 +6312,22 @@
                       </a:r>
                     </a:p>
                   </a:txBody>
-                  <a:tcPr marL="91440" marR="91440" marT="36576" marB="36576" anchor="ctr">
+                  <a:tcPr marT="36576" marB="36576" anchor="ctr">
                     <a:solidFill>
                       <a:srgbClr val="121821"/>
                     </a:solidFill>
                   </a:tcPr>
                 </a:tc>
+                <a:extLst>
+                  <a:ext uri="{0D108BD9-81ED-4DB2-BD59-A6C34878D82A}">
+                    <a16:rowId xmlns:a16="http://schemas.microsoft.com/office/drawing/2014/main" val="10005"/>
+                  </a:ext>
+                </a:extLst>
               </a:tr>
               <a:tr h="429768">
                 <a:tc>
                   <a:txBody>
-                    <a:bodyPr wrap="square"/>
+                    <a:bodyPr/>
                     <a:lstStyle/>
                     <a:p>
                       <a:r>
@@ -6092,7 +6341,7 @@
                       </a:r>
                     </a:p>
                   </a:txBody>
-                  <a:tcPr marL="91440" marR="91440" marT="36576" marB="36576" anchor="ctr">
+                  <a:tcPr marT="36576" marB="36576" anchor="ctr">
                     <a:solidFill>
                       <a:srgbClr val="121821"/>
                     </a:solidFill>
@@ -6100,7 +6349,7 @@
                 </a:tc>
                 <a:tc>
                   <a:txBody>
-                    <a:bodyPr wrap="square"/>
+                    <a:bodyPr/>
                     <a:lstStyle/>
                     <a:p>
                       <a:r>
@@ -6114,7 +6363,7 @@
                       </a:r>
                     </a:p>
                   </a:txBody>
-                  <a:tcPr marL="91440" marR="91440" marT="36576" marB="36576" anchor="ctr">
+                  <a:tcPr marT="36576" marB="36576" anchor="ctr">
                     <a:solidFill>
                       <a:srgbClr val="121821"/>
                     </a:solidFill>
@@ -6122,7 +6371,7 @@
                 </a:tc>
                 <a:tc>
                   <a:txBody>
-                    <a:bodyPr wrap="square"/>
+                    <a:bodyPr/>
                     <a:lstStyle/>
                     <a:p>
                       <a:r>
@@ -6136,17 +6385,22 @@
                       </a:r>
                     </a:p>
                   </a:txBody>
-                  <a:tcPr marL="91440" marR="91440" marT="36576" marB="36576" anchor="ctr">
+                  <a:tcPr marT="36576" marB="36576" anchor="ctr">
                     <a:solidFill>
                       <a:srgbClr val="121821"/>
                     </a:solidFill>
                   </a:tcPr>
                 </a:tc>
+                <a:extLst>
+                  <a:ext uri="{0D108BD9-81ED-4DB2-BD59-A6C34878D82A}">
+                    <a16:rowId xmlns:a16="http://schemas.microsoft.com/office/drawing/2014/main" val="10006"/>
+                  </a:ext>
+                </a:extLst>
               </a:tr>
               <a:tr h="429768">
                 <a:tc>
                   <a:txBody>
-                    <a:bodyPr wrap="square"/>
+                    <a:bodyPr/>
                     <a:lstStyle/>
                     <a:p>
                       <a:r>
@@ -6160,7 +6414,7 @@
                       </a:r>
                     </a:p>
                   </a:txBody>
-                  <a:tcPr marL="91440" marR="91440" marT="36576" marB="36576" anchor="ctr">
+                  <a:tcPr marT="36576" marB="36576" anchor="ctr">
                     <a:solidFill>
                       <a:srgbClr val="121821"/>
                     </a:solidFill>
@@ -6168,7 +6422,7 @@
                 </a:tc>
                 <a:tc>
                   <a:txBody>
-                    <a:bodyPr wrap="square"/>
+                    <a:bodyPr/>
                     <a:lstStyle/>
                     <a:p>
                       <a:r>
@@ -6182,7 +6436,7 @@
                       </a:r>
                     </a:p>
                   </a:txBody>
-                  <a:tcPr marL="91440" marR="91440" marT="36576" marB="36576" anchor="ctr">
+                  <a:tcPr marT="36576" marB="36576" anchor="ctr">
                     <a:solidFill>
                       <a:srgbClr val="121821"/>
                     </a:solidFill>
@@ -6190,7 +6444,7 @@
                 </a:tc>
                 <a:tc>
                   <a:txBody>
-                    <a:bodyPr wrap="square"/>
+                    <a:bodyPr/>
                     <a:lstStyle/>
                     <a:p>
                       <a:r>
@@ -6204,17 +6458,22 @@
                       </a:r>
                     </a:p>
                   </a:txBody>
-                  <a:tcPr marL="91440" marR="91440" marT="36576" marB="36576" anchor="ctr">
+                  <a:tcPr marT="36576" marB="36576" anchor="ctr">
                     <a:solidFill>
                       <a:srgbClr val="121821"/>
                     </a:solidFill>
                   </a:tcPr>
                 </a:tc>
+                <a:extLst>
+                  <a:ext uri="{0D108BD9-81ED-4DB2-BD59-A6C34878D82A}">
+                    <a16:rowId xmlns:a16="http://schemas.microsoft.com/office/drawing/2014/main" val="10007"/>
+                  </a:ext>
+                </a:extLst>
               </a:tr>
               <a:tr h="429768">
                 <a:tc>
                   <a:txBody>
-                    <a:bodyPr wrap="square"/>
+                    <a:bodyPr/>
                     <a:lstStyle/>
                     <a:p>
                       <a:r>
@@ -6228,7 +6487,7 @@
                       </a:r>
                     </a:p>
                   </a:txBody>
-                  <a:tcPr marL="91440" marR="91440" marT="36576" marB="36576" anchor="ctr">
+                  <a:tcPr marT="36576" marB="36576" anchor="ctr">
                     <a:solidFill>
                       <a:srgbClr val="121821"/>
                     </a:solidFill>
@@ -6236,7 +6495,7 @@
                 </a:tc>
                 <a:tc>
                   <a:txBody>
-                    <a:bodyPr wrap="square"/>
+                    <a:bodyPr/>
                     <a:lstStyle/>
                     <a:p>
                       <a:r>
@@ -6250,7 +6509,7 @@
                       </a:r>
                     </a:p>
                   </a:txBody>
-                  <a:tcPr marL="91440" marR="91440" marT="36576" marB="36576" anchor="ctr">
+                  <a:tcPr marT="36576" marB="36576" anchor="ctr">
                     <a:solidFill>
                       <a:srgbClr val="121821"/>
                     </a:solidFill>
@@ -6258,7 +6517,7 @@
                 </a:tc>
                 <a:tc>
                   <a:txBody>
-                    <a:bodyPr wrap="square"/>
+                    <a:bodyPr/>
                     <a:lstStyle/>
                     <a:p>
                       <a:r>
@@ -6272,17 +6531,22 @@
                       </a:r>
                     </a:p>
                   </a:txBody>
-                  <a:tcPr marL="91440" marR="91440" marT="36576" marB="36576" anchor="ctr">
+                  <a:tcPr marT="36576" marB="36576" anchor="ctr">
                     <a:solidFill>
                       <a:srgbClr val="121821"/>
                     </a:solidFill>
                   </a:tcPr>
                 </a:tc>
+                <a:extLst>
+                  <a:ext uri="{0D108BD9-81ED-4DB2-BD59-A6C34878D82A}">
+                    <a16:rowId xmlns:a16="http://schemas.microsoft.com/office/drawing/2014/main" val="10008"/>
+                  </a:ext>
+                </a:extLst>
               </a:tr>
               <a:tr h="429768">
                 <a:tc>
                   <a:txBody>
-                    <a:bodyPr wrap="square"/>
+                    <a:bodyPr/>
                     <a:lstStyle/>
                     <a:p>
                       <a:r>
@@ -6296,7 +6560,7 @@
                       </a:r>
                     </a:p>
                   </a:txBody>
-                  <a:tcPr marL="91440" marR="91440" marT="36576" marB="36576" anchor="ctr">
+                  <a:tcPr marT="36576" marB="36576" anchor="ctr">
                     <a:solidFill>
                       <a:srgbClr val="121821"/>
                     </a:solidFill>
@@ -6304,7 +6568,7 @@
                 </a:tc>
                 <a:tc>
                   <a:txBody>
-                    <a:bodyPr wrap="square"/>
+                    <a:bodyPr/>
                     <a:lstStyle/>
                     <a:p>
                       <a:r>
@@ -6318,7 +6582,7 @@
                       </a:r>
                     </a:p>
                   </a:txBody>
-                  <a:tcPr marL="91440" marR="91440" marT="36576" marB="36576" anchor="ctr">
+                  <a:tcPr marT="36576" marB="36576" anchor="ctr">
                     <a:solidFill>
                       <a:srgbClr val="121821"/>
                     </a:solidFill>
@@ -6326,7 +6590,7 @@
                 </a:tc>
                 <a:tc>
                   <a:txBody>
-                    <a:bodyPr wrap="square"/>
+                    <a:bodyPr/>
                     <a:lstStyle/>
                     <a:p>
                       <a:r>
@@ -6340,12 +6604,17 @@
                       </a:r>
                     </a:p>
                   </a:txBody>
-                  <a:tcPr marL="91440" marR="91440" marT="36576" marB="36576" anchor="ctr">
+                  <a:tcPr marT="36576" marB="36576" anchor="ctr">
                     <a:solidFill>
                       <a:srgbClr val="121821"/>
                     </a:solidFill>
                   </a:tcPr>
                 </a:tc>
+                <a:extLst>
+                  <a:ext uri="{0D108BD9-81ED-4DB2-BD59-A6C34878D82A}">
+                    <a16:rowId xmlns:a16="http://schemas.microsoft.com/office/drawing/2014/main" val="10009"/>
+                  </a:ext>
+                </a:extLst>
               </a:tr>
             </a:tbl>
           </a:graphicData>
@@ -6368,7 +6637,7 @@
           <a:noFill/>
         </p:spPr>
         <p:txBody>
-          <a:bodyPr wrap="square" lIns="0" rIns="0" tIns="0" bIns="0">
+          <a:bodyPr wrap="square" lIns="0" tIns="0" rIns="0" bIns="0">
             <a:spAutoFit/>
           </a:bodyPr>
           <a:lstStyle/>
@@ -6407,7 +6676,7 @@
           <a:noFill/>
         </p:spPr>
         <p:txBody>
-          <a:bodyPr wrap="square" lIns="0" rIns="0" tIns="0" bIns="0">
+          <a:bodyPr wrap="square" lIns="0" tIns="0" rIns="0" bIns="0">
             <a:spAutoFit/>
           </a:bodyPr>
           <a:lstStyle/>
@@ -6438,7 +6707,7 @@
 </file>
 
 <file path=ppt/slides/slide5.xml><?xml version="1.0" encoding="utf-8"?>
-<p:sld xmlns:a="http://schemas.openxmlformats.org/drawingml/2006/main" xmlns:p="http://schemas.openxmlformats.org/presentationml/2006/main" xmlns:r="http://schemas.openxmlformats.org/officeDocument/2006/relationships">
+<p:sld xmlns:a="http://schemas.openxmlformats.org/drawingml/2006/main" xmlns:r="http://schemas.openxmlformats.org/officeDocument/2006/relationships" xmlns:p="http://schemas.openxmlformats.org/presentationml/2006/main">
   <p:cSld>
     <p:bg>
       <p:bgPr>
@@ -6454,7 +6723,14 @@
         <p:cNvGrpSpPr/>
         <p:nvPr/>
       </p:nvGrpSpPr>
-      <p:grpSpPr/>
+      <p:grpSpPr>
+        <a:xfrm>
+          <a:off x="0" y="0"/>
+          <a:ext cx="0" cy="0"/>
+          <a:chOff x="0" y="0"/>
+          <a:chExt cx="0" cy="0"/>
+        </a:xfrm>
+      </p:grpSpPr>
       <p:sp>
         <p:nvSpPr>
           <p:cNvPr id="2" name="Rectangle 1"/>
@@ -6496,6 +6772,7 @@
           <a:lstStyle/>
           <a:p>
             <a:pPr algn="ctr"/>
+            <a:endParaRPr/>
           </a:p>
         </p:txBody>
       </p:sp>
@@ -6540,6 +6817,7 @@
           <a:lstStyle/>
           <a:p>
             <a:pPr algn="ctr"/>
+            <a:endParaRPr/>
           </a:p>
         </p:txBody>
       </p:sp>
@@ -6560,7 +6838,7 @@
           <a:noFill/>
         </p:spPr>
         <p:txBody>
-          <a:bodyPr wrap="square" lIns="0" rIns="0" tIns="0" bIns="0">
+          <a:bodyPr wrap="square" lIns="0" tIns="0" rIns="0" bIns="0">
             <a:spAutoFit/>
           </a:bodyPr>
           <a:lstStyle/>
@@ -6599,7 +6877,7 @@
           <a:noFill/>
         </p:spPr>
         <p:txBody>
-          <a:bodyPr wrap="square" lIns="0" rIns="0" tIns="0" bIns="0">
+          <a:bodyPr wrap="square" lIns="0" tIns="0" rIns="0" bIns="0">
             <a:spAutoFit/>
           </a:bodyPr>
           <a:lstStyle/>
@@ -6638,7 +6916,7 @@
           <a:noFill/>
         </p:spPr>
         <p:txBody>
-          <a:bodyPr wrap="square" lIns="0" rIns="0" tIns="0" bIns="0">
+          <a:bodyPr wrap="square" lIns="0" tIns="0" rIns="0" bIns="0">
             <a:spAutoFit/>
           </a:bodyPr>
           <a:lstStyle/>
@@ -6677,7 +6955,7 @@
           <a:noFill/>
         </p:spPr>
         <p:txBody>
-          <a:bodyPr wrap="square" lIns="0" rIns="0" tIns="0" bIns="0">
+          <a:bodyPr wrap="square" lIns="0" tIns="0" rIns="0" bIns="0">
             <a:spAutoFit/>
           </a:bodyPr>
           <a:lstStyle/>
@@ -6716,7 +6994,7 @@
           <a:noFill/>
         </p:spPr>
         <p:txBody>
-          <a:bodyPr wrap="square" lIns="0" rIns="0" tIns="0" bIns="0">
+          <a:bodyPr wrap="square" lIns="0" tIns="0" rIns="0" bIns="0">
             <a:spAutoFit/>
           </a:bodyPr>
           <a:lstStyle/>
@@ -6823,7 +7101,7 @@
           <a:noFill/>
         </p:spPr>
         <p:txBody>
-          <a:bodyPr wrap="square" lIns="0" rIns="0" tIns="0" bIns="0">
+          <a:bodyPr wrap="square" lIns="0" tIns="0" rIns="0" bIns="0">
             <a:spAutoFit/>
           </a:bodyPr>
           <a:lstStyle/>
@@ -6862,7 +7140,7 @@
           <a:noFill/>
         </p:spPr>
         <p:txBody>
-          <a:bodyPr wrap="square" lIns="0" rIns="0" tIns="0" bIns="0">
+          <a:bodyPr wrap="square" lIns="0" tIns="0" rIns="0" bIns="0">
             <a:spAutoFit/>
           </a:bodyPr>
           <a:lstStyle/>
@@ -6929,6 +7207,7 @@
           <a:lstStyle/>
           <a:p>
             <a:pPr algn="ctr"/>
+            <a:endParaRPr/>
           </a:p>
         </p:txBody>
       </p:sp>
@@ -6949,7 +7228,7 @@
           <a:noFill/>
         </p:spPr>
         <p:txBody>
-          <a:bodyPr wrap="square" lIns="0" rIns="0" tIns="0" bIns="0">
+          <a:bodyPr wrap="square" lIns="0" tIns="0" rIns="0" bIns="0">
             <a:spAutoFit/>
           </a:bodyPr>
           <a:lstStyle/>
@@ -6988,7 +7267,7 @@
           <a:noFill/>
         </p:spPr>
         <p:txBody>
-          <a:bodyPr wrap="square" lIns="0" rIns="0" tIns="0" bIns="0">
+          <a:bodyPr wrap="square" lIns="0" tIns="0" rIns="0" bIns="0">
             <a:spAutoFit/>
           </a:bodyPr>
           <a:lstStyle/>
@@ -7055,6 +7334,7 @@
           <a:lstStyle/>
           <a:p>
             <a:pPr algn="ctr"/>
+            <a:endParaRPr/>
           </a:p>
         </p:txBody>
       </p:sp>
@@ -7075,7 +7355,7 @@
           <a:noFill/>
         </p:spPr>
         <p:txBody>
-          <a:bodyPr wrap="square" lIns="0" rIns="0" tIns="0" bIns="0">
+          <a:bodyPr wrap="square" lIns="0" tIns="0" rIns="0" bIns="0">
             <a:spAutoFit/>
           </a:bodyPr>
           <a:lstStyle/>
@@ -7114,7 +7394,7 @@
           <a:noFill/>
         </p:spPr>
         <p:txBody>
-          <a:bodyPr wrap="square" lIns="0" rIns="0" tIns="0" bIns="0">
+          <a:bodyPr wrap="square" lIns="0" tIns="0" rIns="0" bIns="0">
             <a:spAutoFit/>
           </a:bodyPr>
           <a:lstStyle/>
@@ -7153,7 +7433,7 @@
           <a:noFill/>
         </p:spPr>
         <p:txBody>
-          <a:bodyPr wrap="square" lIns="0" rIns="0" tIns="0" bIns="0">
+          <a:bodyPr wrap="square" lIns="0" tIns="0" rIns="0" bIns="0">
             <a:spAutoFit/>
           </a:bodyPr>
           <a:lstStyle/>
@@ -7192,7 +7472,7 @@
           <a:noFill/>
         </p:spPr>
         <p:txBody>
-          <a:bodyPr wrap="square" lIns="0" rIns="0" tIns="0" bIns="0">
+          <a:bodyPr wrap="square" lIns="0" tIns="0" rIns="0" bIns="0">
             <a:spAutoFit/>
           </a:bodyPr>
           <a:lstStyle/>
@@ -7223,7 +7503,7 @@
 </file>
 
 <file path=ppt/slides/slide6.xml><?xml version="1.0" encoding="utf-8"?>
-<p:sld xmlns:a="http://schemas.openxmlformats.org/drawingml/2006/main" xmlns:p="http://schemas.openxmlformats.org/presentationml/2006/main" xmlns:r="http://schemas.openxmlformats.org/officeDocument/2006/relationships">
+<p:sld xmlns:a="http://schemas.openxmlformats.org/drawingml/2006/main" xmlns:r="http://schemas.openxmlformats.org/officeDocument/2006/relationships" xmlns:p="http://schemas.openxmlformats.org/presentationml/2006/main">
   <p:cSld>
     <p:bg>
       <p:bgPr>
@@ -7239,7 +7519,14 @@
         <p:cNvGrpSpPr/>
         <p:nvPr/>
       </p:nvGrpSpPr>
-      <p:grpSpPr/>
+      <p:grpSpPr>
+        <a:xfrm>
+          <a:off x="0" y="0"/>
+          <a:ext cx="0" cy="0"/>
+          <a:chOff x="0" y="0"/>
+          <a:chExt cx="0" cy="0"/>
+        </a:xfrm>
+      </p:grpSpPr>
       <p:sp>
         <p:nvSpPr>
           <p:cNvPr id="2" name="Rectangle 1"/>
@@ -7281,6 +7568,7 @@
           <a:lstStyle/>
           <a:p>
             <a:pPr algn="ctr"/>
+            <a:endParaRPr/>
           </a:p>
         </p:txBody>
       </p:sp>
@@ -7325,6 +7613,7 @@
           <a:lstStyle/>
           <a:p>
             <a:pPr algn="ctr"/>
+            <a:endParaRPr/>
           </a:p>
         </p:txBody>
       </p:sp>
@@ -7345,7 +7634,7 @@
           <a:noFill/>
         </p:spPr>
         <p:txBody>
-          <a:bodyPr wrap="square" lIns="0" rIns="0" tIns="0" bIns="0">
+          <a:bodyPr wrap="square" lIns="0" tIns="0" rIns="0" bIns="0">
             <a:spAutoFit/>
           </a:bodyPr>
           <a:lstStyle/>
@@ -7384,7 +7673,7 @@
           <a:noFill/>
         </p:spPr>
         <p:txBody>
-          <a:bodyPr wrap="square" lIns="0" rIns="0" tIns="0" bIns="0">
+          <a:bodyPr wrap="square" lIns="0" tIns="0" rIns="0" bIns="0">
             <a:spAutoFit/>
           </a:bodyPr>
           <a:lstStyle/>
@@ -7423,7 +7712,7 @@
           <a:noFill/>
         </p:spPr>
         <p:txBody>
-          <a:bodyPr wrap="square" lIns="0" rIns="0" tIns="0" bIns="0">
+          <a:bodyPr wrap="square" lIns="0" tIns="0" rIns="0" bIns="0">
             <a:spAutoFit/>
           </a:bodyPr>
           <a:lstStyle/>
@@ -7462,7 +7751,7 @@
           <a:noFill/>
         </p:spPr>
         <p:txBody>
-          <a:bodyPr wrap="square" lIns="0" rIns="0" tIns="0" bIns="0">
+          <a:bodyPr wrap="square" lIns="0" tIns="0" rIns="0" bIns="0">
             <a:spAutoFit/>
           </a:bodyPr>
           <a:lstStyle/>
@@ -7501,7 +7790,7 @@
           <a:noFill/>
         </p:spPr>
         <p:txBody>
-          <a:bodyPr wrap="square" lIns="0" rIns="0" tIns="0" bIns="0">
+          <a:bodyPr wrap="square" lIns="0" tIns="0" rIns="0" bIns="0">
             <a:spAutoFit/>
           </a:bodyPr>
           <a:lstStyle/>
@@ -7608,7 +7897,7 @@
           <a:noFill/>
         </p:spPr>
         <p:txBody>
-          <a:bodyPr wrap="square" lIns="0" rIns="0" tIns="0" bIns="0">
+          <a:bodyPr wrap="square" lIns="0" tIns="0" rIns="0" bIns="0">
             <a:spAutoFit/>
           </a:bodyPr>
           <a:lstStyle/>
@@ -7647,7 +7936,7 @@
           <a:noFill/>
         </p:spPr>
         <p:txBody>
-          <a:bodyPr wrap="square" lIns="0" rIns="0" tIns="0" bIns="0">
+          <a:bodyPr wrap="square" lIns="0" tIns="0" rIns="0" bIns="0">
             <a:spAutoFit/>
           </a:bodyPr>
           <a:lstStyle/>
@@ -7714,6 +8003,7 @@
           <a:lstStyle/>
           <a:p>
             <a:pPr algn="ctr"/>
+            <a:endParaRPr/>
           </a:p>
         </p:txBody>
       </p:sp>
@@ -7734,7 +8024,7 @@
           <a:noFill/>
         </p:spPr>
         <p:txBody>
-          <a:bodyPr wrap="square" lIns="0" rIns="0" tIns="0" bIns="0">
+          <a:bodyPr wrap="square" lIns="0" tIns="0" rIns="0" bIns="0">
             <a:spAutoFit/>
           </a:bodyPr>
           <a:lstStyle/>
@@ -7773,7 +8063,7 @@
           <a:noFill/>
         </p:spPr>
         <p:txBody>
-          <a:bodyPr wrap="square" lIns="0" rIns="0" tIns="0" bIns="0">
+          <a:bodyPr wrap="square" lIns="0" tIns="0" rIns="0" bIns="0">
             <a:spAutoFit/>
           </a:bodyPr>
           <a:lstStyle/>
@@ -7840,6 +8130,7 @@
           <a:lstStyle/>
           <a:p>
             <a:pPr algn="ctr"/>
+            <a:endParaRPr/>
           </a:p>
         </p:txBody>
       </p:sp>
@@ -7860,7 +8151,7 @@
           <a:noFill/>
         </p:spPr>
         <p:txBody>
-          <a:bodyPr wrap="square" lIns="0" rIns="0" tIns="0" bIns="0">
+          <a:bodyPr wrap="square" lIns="0" tIns="0" rIns="0" bIns="0">
             <a:spAutoFit/>
           </a:bodyPr>
           <a:lstStyle/>
@@ -7899,7 +8190,7 @@
           <a:noFill/>
         </p:spPr>
         <p:txBody>
-          <a:bodyPr wrap="square" lIns="0" rIns="0" tIns="0" bIns="0">
+          <a:bodyPr wrap="square" lIns="0" tIns="0" rIns="0" bIns="0">
             <a:spAutoFit/>
           </a:bodyPr>
           <a:lstStyle/>
@@ -7938,7 +8229,7 @@
           <a:noFill/>
         </p:spPr>
         <p:txBody>
-          <a:bodyPr wrap="square" lIns="0" rIns="0" tIns="0" bIns="0">
+          <a:bodyPr wrap="square" lIns="0" tIns="0" rIns="0" bIns="0">
             <a:spAutoFit/>
           </a:bodyPr>
           <a:lstStyle/>
@@ -7977,7 +8268,7 @@
           <a:noFill/>
         </p:spPr>
         <p:txBody>
-          <a:bodyPr wrap="square" lIns="0" rIns="0" tIns="0" bIns="0">
+          <a:bodyPr wrap="square" lIns="0" tIns="0" rIns="0" bIns="0">
             <a:spAutoFit/>
           </a:bodyPr>
           <a:lstStyle/>
@@ -8008,7 +8299,7 @@
 </file>
 
 <file path=ppt/slides/slide7.xml><?xml version="1.0" encoding="utf-8"?>
-<p:sld xmlns:a="http://schemas.openxmlformats.org/drawingml/2006/main" xmlns:p="http://schemas.openxmlformats.org/presentationml/2006/main" xmlns:r="http://schemas.openxmlformats.org/officeDocument/2006/relationships">
+<p:sld xmlns:a="http://schemas.openxmlformats.org/drawingml/2006/main" xmlns:r="http://schemas.openxmlformats.org/officeDocument/2006/relationships" xmlns:p="http://schemas.openxmlformats.org/presentationml/2006/main">
   <p:cSld>
     <p:bg>
       <p:bgPr>
@@ -8024,7 +8315,14 @@
         <p:cNvGrpSpPr/>
         <p:nvPr/>
       </p:nvGrpSpPr>
-      <p:grpSpPr/>
+      <p:grpSpPr>
+        <a:xfrm>
+          <a:off x="0" y="0"/>
+          <a:ext cx="0" cy="0"/>
+          <a:chOff x="0" y="0"/>
+          <a:chExt cx="0" cy="0"/>
+        </a:xfrm>
+      </p:grpSpPr>
       <p:sp>
         <p:nvSpPr>
           <p:cNvPr id="2" name="Rectangle 1"/>
@@ -8066,6 +8364,7 @@
           <a:lstStyle/>
           <a:p>
             <a:pPr algn="ctr"/>
+            <a:endParaRPr/>
           </a:p>
         </p:txBody>
       </p:sp>
@@ -8110,6 +8409,7 @@
           <a:lstStyle/>
           <a:p>
             <a:pPr algn="ctr"/>
+            <a:endParaRPr/>
           </a:p>
         </p:txBody>
       </p:sp>
@@ -8130,7 +8430,7 @@
           <a:noFill/>
         </p:spPr>
         <p:txBody>
-          <a:bodyPr wrap="square" lIns="0" rIns="0" tIns="0" bIns="0">
+          <a:bodyPr wrap="square" lIns="0" tIns="0" rIns="0" bIns="0">
             <a:spAutoFit/>
           </a:bodyPr>
           <a:lstStyle/>
@@ -8169,7 +8469,7 @@
           <a:noFill/>
         </p:spPr>
         <p:txBody>
-          <a:bodyPr wrap="square" lIns="0" rIns="0" tIns="0" bIns="0">
+          <a:bodyPr wrap="square" lIns="0" tIns="0" rIns="0" bIns="0">
             <a:spAutoFit/>
           </a:bodyPr>
           <a:lstStyle/>
@@ -8208,7 +8508,7 @@
           <a:noFill/>
         </p:spPr>
         <p:txBody>
-          <a:bodyPr wrap="square" lIns="0" rIns="0" tIns="0" bIns="0">
+          <a:bodyPr wrap="square" lIns="0" tIns="0" rIns="0" bIns="0">
             <a:spAutoFit/>
           </a:bodyPr>
           <a:lstStyle/>
@@ -8247,7 +8547,7 @@
           <a:noFill/>
         </p:spPr>
         <p:txBody>
-          <a:bodyPr wrap="square" lIns="0" rIns="0" tIns="0" bIns="0">
+          <a:bodyPr wrap="square" lIns="0" tIns="0" rIns="0" bIns="0">
             <a:spAutoFit/>
           </a:bodyPr>
           <a:lstStyle/>
@@ -8286,7 +8586,7 @@
           <a:noFill/>
         </p:spPr>
         <p:txBody>
-          <a:bodyPr wrap="square" lIns="0" rIns="0" tIns="0" bIns="0">
+          <a:bodyPr wrap="square" lIns="0" tIns="0" rIns="0" bIns="0">
             <a:spAutoFit/>
           </a:bodyPr>
           <a:lstStyle/>
@@ -8393,7 +8693,7 @@
           <a:noFill/>
         </p:spPr>
         <p:txBody>
-          <a:bodyPr wrap="square" lIns="0" rIns="0" tIns="0" bIns="0">
+          <a:bodyPr wrap="square" lIns="0" tIns="0" rIns="0" bIns="0">
             <a:spAutoFit/>
           </a:bodyPr>
           <a:lstStyle/>
@@ -8432,7 +8732,7 @@
           <a:noFill/>
         </p:spPr>
         <p:txBody>
-          <a:bodyPr wrap="square" lIns="0" rIns="0" tIns="0" bIns="0">
+          <a:bodyPr wrap="square" lIns="0" tIns="0" rIns="0" bIns="0">
             <a:spAutoFit/>
           </a:bodyPr>
           <a:lstStyle/>
@@ -8499,6 +8799,7 @@
           <a:lstStyle/>
           <a:p>
             <a:pPr algn="ctr"/>
+            <a:endParaRPr/>
           </a:p>
         </p:txBody>
       </p:sp>
@@ -8519,7 +8820,7 @@
           <a:noFill/>
         </p:spPr>
         <p:txBody>
-          <a:bodyPr wrap="square" lIns="0" rIns="0" tIns="0" bIns="0">
+          <a:bodyPr wrap="square" lIns="0" tIns="0" rIns="0" bIns="0">
             <a:spAutoFit/>
           </a:bodyPr>
           <a:lstStyle/>
@@ -8558,7 +8859,7 @@
           <a:noFill/>
         </p:spPr>
         <p:txBody>
-          <a:bodyPr wrap="square" lIns="0" rIns="0" tIns="0" bIns="0">
+          <a:bodyPr wrap="square" lIns="0" tIns="0" rIns="0" bIns="0">
             <a:spAutoFit/>
           </a:bodyPr>
           <a:lstStyle/>
@@ -8625,6 +8926,7 @@
           <a:lstStyle/>
           <a:p>
             <a:pPr algn="ctr"/>
+            <a:endParaRPr/>
           </a:p>
         </p:txBody>
       </p:sp>
@@ -8645,7 +8947,7 @@
           <a:noFill/>
         </p:spPr>
         <p:txBody>
-          <a:bodyPr wrap="square" lIns="0" rIns="0" tIns="0" bIns="0">
+          <a:bodyPr wrap="square" lIns="0" tIns="0" rIns="0" bIns="0">
             <a:spAutoFit/>
           </a:bodyPr>
           <a:lstStyle/>
@@ -8684,7 +8986,7 @@
           <a:noFill/>
         </p:spPr>
         <p:txBody>
-          <a:bodyPr wrap="square" lIns="0" rIns="0" tIns="0" bIns="0">
+          <a:bodyPr wrap="square" lIns="0" tIns="0" rIns="0" bIns="0">
             <a:spAutoFit/>
           </a:bodyPr>
           <a:lstStyle/>
@@ -8723,7 +9025,7 @@
           <a:noFill/>
         </p:spPr>
         <p:txBody>
-          <a:bodyPr wrap="square" lIns="0" rIns="0" tIns="0" bIns="0">
+          <a:bodyPr wrap="square" lIns="0" tIns="0" rIns="0" bIns="0">
             <a:spAutoFit/>
           </a:bodyPr>
           <a:lstStyle/>
@@ -8762,7 +9064,7 @@
           <a:noFill/>
         </p:spPr>
         <p:txBody>
-          <a:bodyPr wrap="square" lIns="0" rIns="0" tIns="0" bIns="0">
+          <a:bodyPr wrap="square" lIns="0" tIns="0" rIns="0" bIns="0">
             <a:spAutoFit/>
           </a:bodyPr>
           <a:lstStyle/>
@@ -8793,7 +9095,7 @@
 </file>
 
 <file path=ppt/slides/slide8.xml><?xml version="1.0" encoding="utf-8"?>
-<p:sld xmlns:a="http://schemas.openxmlformats.org/drawingml/2006/main" xmlns:p="http://schemas.openxmlformats.org/presentationml/2006/main" xmlns:r="http://schemas.openxmlformats.org/officeDocument/2006/relationships">
+<p:sld xmlns:a="http://schemas.openxmlformats.org/drawingml/2006/main" xmlns:r="http://schemas.openxmlformats.org/officeDocument/2006/relationships" xmlns:p="http://schemas.openxmlformats.org/presentationml/2006/main">
   <p:cSld>
     <p:bg>
       <p:bgPr>
@@ -8809,7 +9111,14 @@
         <p:cNvGrpSpPr/>
         <p:nvPr/>
       </p:nvGrpSpPr>
-      <p:grpSpPr/>
+      <p:grpSpPr>
+        <a:xfrm>
+          <a:off x="0" y="0"/>
+          <a:ext cx="0" cy="0"/>
+          <a:chOff x="0" y="0"/>
+          <a:chExt cx="0" cy="0"/>
+        </a:xfrm>
+      </p:grpSpPr>
       <p:sp>
         <p:nvSpPr>
           <p:cNvPr id="2" name="Rectangle 1"/>
@@ -8825,7 +9134,7 @@
             <a:avLst/>
           </a:prstGeom>
           <a:solidFill>
-            <a:srgbClr val="F2A65A"/>
+            <a:srgbClr val="B98CF2"/>
           </a:solidFill>
           <a:ln>
             <a:noFill/>
@@ -8851,6 +9160,7 @@
           <a:lstStyle/>
           <a:p>
             <a:pPr algn="ctr"/>
+            <a:endParaRPr/>
           </a:p>
         </p:txBody>
       </p:sp>
@@ -8869,7 +9179,7 @@
             <a:avLst/>
           </a:prstGeom>
           <a:solidFill>
-            <a:srgbClr val="F2A65A"/>
+            <a:srgbClr val="B98CF2"/>
           </a:solidFill>
           <a:ln>
             <a:noFill/>
@@ -8895,6 +9205,7 @@
           <a:lstStyle/>
           <a:p>
             <a:pPr algn="ctr"/>
+            <a:endParaRPr/>
           </a:p>
         </p:txBody>
       </p:sp>
@@ -8915,7 +9226,7 @@
           <a:noFill/>
         </p:spPr>
         <p:txBody>
-          <a:bodyPr wrap="square" lIns="0" rIns="0" tIns="0" bIns="0">
+          <a:bodyPr wrap="square" lIns="0" tIns="0" rIns="0" bIns="0">
             <a:spAutoFit/>
           </a:bodyPr>
           <a:lstStyle/>
@@ -8928,11 +9239,11 @@
             <a:r>
               <a:rPr sz="1100" b="1">
                 <a:solidFill>
-                  <a:srgbClr val="F2A65A"/>
+                  <a:srgbClr val="B98CF2"/>
                 </a:solidFill>
                 <a:latin typeface="Segoe UI Semibold"/>
               </a:rPr>
-              <a:t>IN THE CLASSROOM</a:t>
+              <a:t>ON YOUR OWN</a:t>
             </a:r>
           </a:p>
         </p:txBody>
@@ -8954,7 +9265,7 @@
           <a:noFill/>
         </p:spPr>
         <p:txBody>
-          <a:bodyPr wrap="square" lIns="0" rIns="0" tIns="0" bIns="0">
+          <a:bodyPr wrap="square" lIns="0" tIns="0" rIns="0" bIns="0">
             <a:spAutoFit/>
           </a:bodyPr>
           <a:lstStyle/>
@@ -8967,11 +9278,11 @@
             <a:r>
               <a:rPr sz="2600" b="1">
                 <a:solidFill>
-                  <a:srgbClr val="F2A65A"/>
+                  <a:srgbClr val="B98CF2"/>
                 </a:solidFill>
                 <a:latin typeface="Segoe UI"/>
               </a:rPr>
-              <a:t>08</a:t>
+              <a:t>09</a:t>
             </a:r>
           </a:p>
         </p:txBody>
@@ -8993,7 +9304,7 @@
           <a:noFill/>
         </p:spPr>
         <p:txBody>
-          <a:bodyPr wrap="square" lIns="0" rIns="0" tIns="0" bIns="0">
+          <a:bodyPr wrap="square" lIns="0" tIns="0" rIns="0" bIns="0">
             <a:spAutoFit/>
           </a:bodyPr>
           <a:lstStyle/>
@@ -9010,103 +9321,1147 @@
                 </a:solidFill>
                 <a:latin typeface="Segoe UI"/>
               </a:rPr>
-              <a:t>A Suggested 45-Minute Lesson Flow</a:t>
-            </a:r>
-          </a:p>
-        </p:txBody>
-      </p:sp>
-      <p:sp>
-        <p:nvSpPr>
-          <p:cNvPr id="7" name="Rounded Rectangle 6"/>
-          <p:cNvSpPr/>
-          <p:nvPr/>
-        </p:nvSpPr>
-        <p:spPr>
-          <a:xfrm>
-            <a:off x="502920" y="1600200"/>
-            <a:ext cx="11155680" cy="658368"/>
-          </a:xfrm>
-          <a:prstGeom prst="roundRect">
-            <a:avLst>
-              <a:gd name="adj" fmla="val 6000"/>
-            </a:avLst>
-          </a:prstGeom>
-          <a:solidFill>
-            <a:srgbClr val="121821"/>
-          </a:solidFill>
-          <a:ln w="12700">
-            <a:solidFill>
-              <a:srgbClr val="26323D"/>
-            </a:solidFill>
-          </a:ln>
-          <a:effectLst/>
-        </p:spPr>
-        <p:style>
-          <a:lnRef idx="1">
-            <a:schemeClr val="accent1"/>
-          </a:lnRef>
-          <a:fillRef idx="3">
-            <a:schemeClr val="accent1"/>
-          </a:fillRef>
-          <a:effectRef idx="2">
-            <a:schemeClr val="accent1"/>
-          </a:effectRef>
-          <a:fontRef idx="minor">
-            <a:schemeClr val="lt1"/>
-          </a:fontRef>
-        </p:style>
-        <p:txBody>
-          <a:bodyPr rtlCol="0" anchor="ctr"/>
-          <a:lstStyle/>
-          <a:p>
-            <a:pPr algn="ctr"/>
-          </a:p>
-        </p:txBody>
-      </p:sp>
-      <p:sp>
-        <p:nvSpPr>
-          <p:cNvPr id="8" name="Rectangle 7"/>
-          <p:cNvSpPr/>
-          <p:nvPr/>
-        </p:nvSpPr>
-        <p:spPr>
-          <a:xfrm>
-            <a:off x="502920" y="1600200"/>
-            <a:ext cx="54864" cy="658368"/>
+              <a:t>10 Challenges for Students</a:t>
+            </a:r>
+          </a:p>
+        </p:txBody>
+      </p:sp>
+      <p:sp>
+        <p:nvSpPr>
+          <p:cNvPr id="7" name="TextBox 6"/>
+          <p:cNvSpPr txBox="1"/>
+          <p:nvPr/>
+        </p:nvSpPr>
+        <p:spPr>
+          <a:xfrm>
+            <a:off x="502920" y="1554480"/>
+            <a:ext cx="11155680" cy="365760"/>
           </a:xfrm>
           <a:prstGeom prst="rect">
             <a:avLst/>
           </a:prstGeom>
-          <a:solidFill>
-            <a:srgbClr val="4FD1C5"/>
-          </a:solidFill>
-          <a:ln>
-            <a:noFill/>
-          </a:ln>
-          <a:effectLst/>
-        </p:spPr>
-        <p:style>
-          <a:lnRef idx="1">
-            <a:schemeClr val="accent1"/>
-          </a:lnRef>
-          <a:fillRef idx="3">
-            <a:schemeClr val="accent1"/>
-          </a:fillRef>
-          <a:effectRef idx="2">
-            <a:schemeClr val="accent1"/>
-          </a:effectRef>
-          <a:fontRef idx="minor">
-            <a:schemeClr val="lt1"/>
-          </a:fontRef>
-        </p:style>
-        <p:txBody>
-          <a:bodyPr rtlCol="0" anchor="ctr"/>
-          <a:lstStyle/>
-          <a:p>
-            <a:pPr algn="ctr"/>
-          </a:p>
-        </p:txBody>
-      </p:sp>
+          <a:noFill/>
+        </p:spPr>
+        <p:txBody>
+          <a:bodyPr wrap="square" lIns="0" tIns="0" rIns="0" bIns="0">
+            <a:spAutoFit/>
+          </a:bodyPr>
+          <a:lstStyle/>
+          <a:p>
+            <a:pPr algn="l">
+              <a:lnSpc>
+                <a:spcPct val="130000"/>
+              </a:lnSpc>
+            </a:pPr>
+            <a:r>
+              <a:rPr sz="1250" b="0">
+                <a:solidFill>
+                  <a:srgbClr val="8496A6"/>
+                </a:solidFill>
+                <a:latin typeface="Consolas"/>
+              </a:rPr>
+              <a:t>Each one builds on a worked example from this deck — same nine instructions, new problem.</a:t>
+            </a:r>
+          </a:p>
+        </p:txBody>
+      </p:sp>
+      <p:graphicFrame>
+        <p:nvGraphicFramePr>
+          <p:cNvPr id="8" name="Table 7"/>
+          <p:cNvGraphicFramePr>
+            <a:graphicFrameLocks noGrp="1"/>
+          </p:cNvGraphicFramePr>
+          <p:nvPr/>
+        </p:nvGraphicFramePr>
+        <p:xfrm>
+          <a:off x="502920" y="2011680"/>
+          <a:ext cx="11155680" cy="4350000"/>
+        </p:xfrm>
+        <a:graphic>
+          <a:graphicData uri="http://schemas.openxmlformats.org/drawingml/2006/table">
+            <a:tbl>
+              <a:tblPr firstRow="1" bandRow="1">
+                <a:tableStyleId>{5C22544A-7EE6-4342-B048-85BDC9FD1C3A}</a:tableStyleId>
+              </a:tblPr>
+              <a:tblGrid>
+                <a:gridCol w="548640">
+                  <a:extLst>
+                    <a:ext uri="{9D8B030D-6E8A-4147-A177-3AD203B41FA5}">
+                      <a16:colId xmlns:a16="http://schemas.microsoft.com/office/drawing/2014/main" val="20000"/>
+                    </a:ext>
+                  </a:extLst>
+                </a:gridCol>
+                <a:gridCol w="4389120">
+                  <a:extLst>
+                    <a:ext uri="{9D8B030D-6E8A-4147-A177-3AD203B41FA5}">
+                      <a16:colId xmlns:a16="http://schemas.microsoft.com/office/drawing/2014/main" val="20001"/>
+                    </a:ext>
+                  </a:extLst>
+                </a:gridCol>
+                <a:gridCol w="1554480">
+                  <a:extLst>
+                    <a:ext uri="{9D8B030D-6E8A-4147-A177-3AD203B41FA5}">
+                      <a16:colId xmlns:a16="http://schemas.microsoft.com/office/drawing/2014/main" val="20002"/>
+                    </a:ext>
+                  </a:extLst>
+                </a:gridCol>
+                <a:gridCol w="4663440">
+                  <a:extLst>
+                    <a:ext uri="{9D8B030D-6E8A-4147-A177-3AD203B41FA5}">
+                      <a16:colId xmlns:a16="http://schemas.microsoft.com/office/drawing/2014/main" val="20003"/>
+                    </a:ext>
+                  </a:extLst>
+                </a:gridCol>
+              </a:tblGrid>
+              <a:tr h="395454">
+                <a:tc>
+                  <a:txBody>
+                    <a:bodyPr/>
+                    <a:lstStyle/>
+                    <a:p>
+                      <a:r>
+                        <a:rPr sz="1200" b="1">
+                          <a:solidFill>
+                            <a:srgbClr val="B98CF2"/>
+                          </a:solidFill>
+                          <a:latin typeface="Segoe UI Semibold"/>
+                        </a:rPr>
+                        <a:t>#</a:t>
+                      </a:r>
+                    </a:p>
+                  </a:txBody>
+                  <a:tcPr anchor="ctr">
+                    <a:solidFill>
+                      <a:srgbClr val="1A222C"/>
+                    </a:solidFill>
+                  </a:tcPr>
+                </a:tc>
+                <a:tc>
+                  <a:txBody>
+                    <a:bodyPr/>
+                    <a:lstStyle/>
+                    <a:p>
+                      <a:r>
+                        <a:rPr sz="1200" b="1">
+                          <a:solidFill>
+                            <a:srgbClr val="B98CF2"/>
+                          </a:solidFill>
+                          <a:latin typeface="Segoe UI Semibold"/>
+                        </a:rPr>
+                        <a:t>CHALLENGE</a:t>
+                      </a:r>
+                    </a:p>
+                  </a:txBody>
+                  <a:tcPr anchor="ctr">
+                    <a:solidFill>
+                      <a:srgbClr val="1A222C"/>
+                    </a:solidFill>
+                  </a:tcPr>
+                </a:tc>
+                <a:tc>
+                  <a:txBody>
+                    <a:bodyPr/>
+                    <a:lstStyle/>
+                    <a:p>
+                      <a:r>
+                        <a:rPr sz="1200" b="1">
+                          <a:solidFill>
+                            <a:srgbClr val="B98CF2"/>
+                          </a:solidFill>
+                          <a:latin typeface="Segoe UI Semibold"/>
+                        </a:rPr>
+                        <a:t>LEVEL</a:t>
+                      </a:r>
+                    </a:p>
+                  </a:txBody>
+                  <a:tcPr anchor="ctr">
+                    <a:solidFill>
+                      <a:srgbClr val="1A222C"/>
+                    </a:solidFill>
+                  </a:tcPr>
+                </a:tc>
+                <a:tc>
+                  <a:txBody>
+                    <a:bodyPr/>
+                    <a:lstStyle/>
+                    <a:p>
+                      <a:r>
+                        <a:rPr sz="1200" b="1">
+                          <a:solidFill>
+                            <a:srgbClr val="B98CF2"/>
+                          </a:solidFill>
+                          <a:latin typeface="Segoe UI Semibold"/>
+                        </a:rPr>
+                        <a:t>SKILLS</a:t>
+                      </a:r>
+                    </a:p>
+                  </a:txBody>
+                  <a:tcPr anchor="ctr">
+                    <a:solidFill>
+                      <a:srgbClr val="1A222C"/>
+                    </a:solidFill>
+                  </a:tcPr>
+                </a:tc>
+                <a:extLst>
+                  <a:ext uri="{0D108BD9-81ED-4DB2-BD59-A6C34878D82A}">
+                    <a16:rowId xmlns:a16="http://schemas.microsoft.com/office/drawing/2014/main" val="10000"/>
+                  </a:ext>
+                </a:extLst>
+              </a:tr>
+              <a:tr h="395454">
+                <a:tc>
+                  <a:txBody>
+                    <a:bodyPr/>
+                    <a:lstStyle/>
+                    <a:p>
+                      <a:r>
+                        <a:rPr sz="1300" b="1">
+                          <a:solidFill>
+                            <a:srgbClr val="4FD1C5"/>
+                          </a:solidFill>
+                          <a:latin typeface="Consolas"/>
+                        </a:rPr>
+                        <a:t>1</a:t>
+                      </a:r>
+                    </a:p>
+                  </a:txBody>
+                  <a:tcPr marT="36576" marB="36576" anchor="ctr">
+                    <a:solidFill>
+                      <a:srgbClr val="121821"/>
+                    </a:solidFill>
+                  </a:tcPr>
+                </a:tc>
+                <a:tc>
+                  <a:txBody>
+                    <a:bodyPr/>
+                    <a:lstStyle/>
+                    <a:p>
+                      <a:r>
+                        <a:rPr sz="1300" b="0">
+                          <a:solidFill>
+                            <a:srgbClr val="8496A6"/>
+                          </a:solidFill>
+                          <a:latin typeface="Segoe UI"/>
+                        </a:rPr>
+                        <a:t>Print your initials</a:t>
+                      </a:r>
+                    </a:p>
+                  </a:txBody>
+                  <a:tcPr marT="36576" marB="36576" anchor="ctr">
+                    <a:solidFill>
+                      <a:srgbClr val="121821"/>
+                    </a:solidFill>
+                  </a:tcPr>
+                </a:tc>
+                <a:tc>
+                  <a:txBody>
+                    <a:bodyPr/>
+                    <a:lstStyle/>
+                    <a:p>
+                      <a:r>
+                        <a:rPr sz="1300" b="1">
+                          <a:solidFill>
+                            <a:srgbClr val="4FD1C5"/>
+                          </a:solidFill>
+                          <a:latin typeface="Segoe UI"/>
+                        </a:rPr>
+                        <a:t>Warm-up</a:t>
+                      </a:r>
+                    </a:p>
+                  </a:txBody>
+                  <a:tcPr marT="36576" marB="36576" anchor="ctr">
+                    <a:solidFill>
+                      <a:srgbClr val="121821"/>
+                    </a:solidFill>
+                  </a:tcPr>
+                </a:tc>
+                <a:tc>
+                  <a:txBody>
+                    <a:bodyPr/>
+                    <a:lstStyle/>
+                    <a:p>
+                      <a:r>
+                        <a:rPr sz="1300" b="0">
+                          <a:solidFill>
+                            <a:srgbClr val="8496A6"/>
+                          </a:solidFill>
+                          <a:latin typeface="Segoe UI"/>
+                        </a:rPr>
+                        <a:t>LOAD #'…', OUTC</a:t>
+                      </a:r>
+                    </a:p>
+                  </a:txBody>
+                  <a:tcPr marT="36576" marB="36576" anchor="ctr">
+                    <a:solidFill>
+                      <a:srgbClr val="121821"/>
+                    </a:solidFill>
+                  </a:tcPr>
+                </a:tc>
+                <a:extLst>
+                  <a:ext uri="{0D108BD9-81ED-4DB2-BD59-A6C34878D82A}">
+                    <a16:rowId xmlns:a16="http://schemas.microsoft.com/office/drawing/2014/main" val="10001"/>
+                  </a:ext>
+                </a:extLst>
+              </a:tr>
+              <a:tr h="395454">
+                <a:tc>
+                  <a:txBody>
+                    <a:bodyPr/>
+                    <a:lstStyle/>
+                    <a:p>
+                      <a:r>
+                        <a:rPr sz="1300" b="1">
+                          <a:solidFill>
+                            <a:srgbClr val="4FD1C5"/>
+                          </a:solidFill>
+                          <a:latin typeface="Consolas"/>
+                        </a:rPr>
+                        <a:t>2</a:t>
+                      </a:r>
+                    </a:p>
+                  </a:txBody>
+                  <a:tcPr marT="36576" marB="36576" anchor="ctr">
+                    <a:solidFill>
+                      <a:srgbClr val="121821"/>
+                    </a:solidFill>
+                  </a:tcPr>
+                </a:tc>
+                <a:tc>
+                  <a:txBody>
+                    <a:bodyPr/>
+                    <a:lstStyle/>
+                    <a:p>
+                      <a:r>
+                        <a:rPr sz="1300" b="0">
+                          <a:solidFill>
+                            <a:srgbClr val="8496A6"/>
+                          </a:solidFill>
+                          <a:latin typeface="Segoe UI"/>
+                        </a:rPr>
+                        <a:t>Triple a number</a:t>
+                      </a:r>
+                    </a:p>
+                  </a:txBody>
+                  <a:tcPr marT="36576" marB="36576" anchor="ctr">
+                    <a:solidFill>
+                      <a:srgbClr val="121821"/>
+                    </a:solidFill>
+                  </a:tcPr>
+                </a:tc>
+                <a:tc>
+                  <a:txBody>
+                    <a:bodyPr/>
+                    <a:lstStyle/>
+                    <a:p>
+                      <a:r>
+                        <a:rPr sz="1300" b="1">
+                          <a:solidFill>
+                            <a:srgbClr val="4FD1C5"/>
+                          </a:solidFill>
+                          <a:latin typeface="Segoe UI"/>
+                        </a:rPr>
+                        <a:t>Warm-up</a:t>
+                      </a:r>
+                    </a:p>
+                  </a:txBody>
+                  <a:tcPr marT="36576" marB="36576" anchor="ctr">
+                    <a:solidFill>
+                      <a:srgbClr val="121821"/>
+                    </a:solidFill>
+                  </a:tcPr>
+                </a:tc>
+                <a:tc>
+                  <a:txBody>
+                    <a:bodyPr/>
+                    <a:lstStyle/>
+                    <a:p>
+                      <a:r>
+                        <a:rPr sz="1300" b="0">
+                          <a:solidFill>
+                            <a:srgbClr val="8496A6"/>
+                          </a:solidFill>
+                          <a:latin typeface="Segoe UI"/>
+                        </a:rPr>
+                        <a:t>LOAD, ADD, ADD, STORE, OUT</a:t>
+                      </a:r>
+                    </a:p>
+                  </a:txBody>
+                  <a:tcPr marT="36576" marB="36576" anchor="ctr">
+                    <a:solidFill>
+                      <a:srgbClr val="121821"/>
+                    </a:solidFill>
+                  </a:tcPr>
+                </a:tc>
+                <a:extLst>
+                  <a:ext uri="{0D108BD9-81ED-4DB2-BD59-A6C34878D82A}">
+                    <a16:rowId xmlns:a16="http://schemas.microsoft.com/office/drawing/2014/main" val="10002"/>
+                  </a:ext>
+                </a:extLst>
+              </a:tr>
+              <a:tr h="395454">
+                <a:tc>
+                  <a:txBody>
+                    <a:bodyPr/>
+                    <a:lstStyle/>
+                    <a:p>
+                      <a:r>
+                        <a:rPr sz="1300" b="1">
+                          <a:solidFill>
+                            <a:srgbClr val="4FD1C5"/>
+                          </a:solidFill>
+                          <a:latin typeface="Consolas"/>
+                        </a:rPr>
+                        <a:t>3</a:t>
+                      </a:r>
+                    </a:p>
+                  </a:txBody>
+                  <a:tcPr marT="36576" marB="36576" anchor="ctr">
+                    <a:solidFill>
+                      <a:srgbClr val="121821"/>
+                    </a:solidFill>
+                  </a:tcPr>
+                </a:tc>
+                <a:tc>
+                  <a:txBody>
+                    <a:bodyPr/>
+                    <a:lstStyle/>
+                    <a:p>
+                      <a:r>
+                        <a:rPr sz="1300" b="0">
+                          <a:solidFill>
+                            <a:srgbClr val="8496A6"/>
+                          </a:solidFill>
+                          <a:latin typeface="Segoe UI"/>
+                        </a:rPr>
+                        <a:t>Is it zero?</a:t>
+                      </a:r>
+                    </a:p>
+                  </a:txBody>
+                  <a:tcPr marT="36576" marB="36576" anchor="ctr">
+                    <a:solidFill>
+                      <a:srgbClr val="121821"/>
+                    </a:solidFill>
+                  </a:tcPr>
+                </a:tc>
+                <a:tc>
+                  <a:txBody>
+                    <a:bodyPr/>
+                    <a:lstStyle/>
+                    <a:p>
+                      <a:r>
+                        <a:rPr sz="1300" b="1">
+                          <a:solidFill>
+                            <a:srgbClr val="4FD1C5"/>
+                          </a:solidFill>
+                          <a:latin typeface="Segoe UI"/>
+                        </a:rPr>
+                        <a:t>Warm-up</a:t>
+                      </a:r>
+                    </a:p>
+                  </a:txBody>
+                  <a:tcPr marT="36576" marB="36576" anchor="ctr">
+                    <a:solidFill>
+                      <a:srgbClr val="121821"/>
+                    </a:solidFill>
+                  </a:tcPr>
+                </a:tc>
+                <a:tc>
+                  <a:txBody>
+                    <a:bodyPr/>
+                    <a:lstStyle/>
+                    <a:p>
+                      <a:r>
+                        <a:rPr sz="1300" b="0">
+                          <a:solidFill>
+                            <a:srgbClr val="8496A6"/>
+                          </a:solidFill>
+                          <a:latin typeface="Segoe UI"/>
+                        </a:rPr>
+                        <a:t>LOAD, JZ, branch to YES/NO</a:t>
+                      </a:r>
+                    </a:p>
+                  </a:txBody>
+                  <a:tcPr marT="36576" marB="36576" anchor="ctr">
+                    <a:solidFill>
+                      <a:srgbClr val="121821"/>
+                    </a:solidFill>
+                  </a:tcPr>
+                </a:tc>
+                <a:extLst>
+                  <a:ext uri="{0D108BD9-81ED-4DB2-BD59-A6C34878D82A}">
+                    <a16:rowId xmlns:a16="http://schemas.microsoft.com/office/drawing/2014/main" val="10003"/>
+                  </a:ext>
+                </a:extLst>
+              </a:tr>
+              <a:tr h="395454">
+                <a:tc>
+                  <a:txBody>
+                    <a:bodyPr/>
+                    <a:lstStyle/>
+                    <a:p>
+                      <a:r>
+                        <a:rPr sz="1300" b="1">
+                          <a:solidFill>
+                            <a:srgbClr val="4FD1C5"/>
+                          </a:solidFill>
+                          <a:latin typeface="Consolas"/>
+                        </a:rPr>
+                        <a:t>4</a:t>
+                      </a:r>
+                    </a:p>
+                  </a:txBody>
+                  <a:tcPr marT="36576" marB="36576" anchor="ctr">
+                    <a:solidFill>
+                      <a:srgbClr val="121821"/>
+                    </a:solidFill>
+                  </a:tcPr>
+                </a:tc>
+                <a:tc>
+                  <a:txBody>
+                    <a:bodyPr/>
+                    <a:lstStyle/>
+                    <a:p>
+                      <a:r>
+                        <a:rPr sz="1300" b="0">
+                          <a:solidFill>
+                            <a:srgbClr val="8496A6"/>
+                          </a:solidFill>
+                          <a:latin typeface="Segoe UI"/>
+                        </a:rPr>
+                        <a:t>Count up to a target</a:t>
+                      </a:r>
+                    </a:p>
+                  </a:txBody>
+                  <a:tcPr marT="36576" marB="36576" anchor="ctr">
+                    <a:solidFill>
+                      <a:srgbClr val="121821"/>
+                    </a:solidFill>
+                  </a:tcPr>
+                </a:tc>
+                <a:tc>
+                  <a:txBody>
+                    <a:bodyPr/>
+                    <a:lstStyle/>
+                    <a:p>
+                      <a:r>
+                        <a:rPr sz="1300" b="1">
+                          <a:solidFill>
+                            <a:srgbClr val="B98CF2"/>
+                          </a:solidFill>
+                          <a:latin typeface="Segoe UI"/>
+                        </a:rPr>
+                        <a:t>Core</a:t>
+                      </a:r>
+                    </a:p>
+                  </a:txBody>
+                  <a:tcPr marT="36576" marB="36576" anchor="ctr">
+                    <a:solidFill>
+                      <a:srgbClr val="121821"/>
+                    </a:solidFill>
+                  </a:tcPr>
+                </a:tc>
+                <a:tc>
+                  <a:txBody>
+                    <a:bodyPr/>
+                    <a:lstStyle/>
+                    <a:p>
+                      <a:r>
+                        <a:rPr sz="1300" b="0">
+                          <a:solidFill>
+                            <a:srgbClr val="8496A6"/>
+                          </a:solidFill>
+                          <a:latin typeface="Segoe UI"/>
+                        </a:rPr>
+                        <a:t>loop, ADD #1, JZ to stop</a:t>
+                      </a:r>
+                    </a:p>
+                  </a:txBody>
+                  <a:tcPr marT="36576" marB="36576" anchor="ctr">
+                    <a:solidFill>
+                      <a:srgbClr val="121821"/>
+                    </a:solidFill>
+                  </a:tcPr>
+                </a:tc>
+                <a:extLst>
+                  <a:ext uri="{0D108BD9-81ED-4DB2-BD59-A6C34878D82A}">
+                    <a16:rowId xmlns:a16="http://schemas.microsoft.com/office/drawing/2014/main" val="10004"/>
+                  </a:ext>
+                </a:extLst>
+              </a:tr>
+              <a:tr h="395454">
+                <a:tc>
+                  <a:txBody>
+                    <a:bodyPr/>
+                    <a:lstStyle/>
+                    <a:p>
+                      <a:r>
+                        <a:rPr sz="1300" b="1">
+                          <a:solidFill>
+                            <a:srgbClr val="4FD1C5"/>
+                          </a:solidFill>
+                          <a:latin typeface="Consolas"/>
+                        </a:rPr>
+                        <a:t>5</a:t>
+                      </a:r>
+                    </a:p>
+                  </a:txBody>
+                  <a:tcPr marT="36576" marB="36576" anchor="ctr">
+                    <a:solidFill>
+                      <a:srgbClr val="121821"/>
+                    </a:solidFill>
+                  </a:tcPr>
+                </a:tc>
+                <a:tc>
+                  <a:txBody>
+                    <a:bodyPr/>
+                    <a:lstStyle/>
+                    <a:p>
+                      <a:r>
+                        <a:rPr sz="1300" b="0">
+                          <a:solidFill>
+                            <a:srgbClr val="8496A6"/>
+                          </a:solidFill>
+                          <a:latin typeface="Segoe UI"/>
+                        </a:rPr>
+                        <a:t>Sum from 1 to N</a:t>
+                      </a:r>
+                    </a:p>
+                  </a:txBody>
+                  <a:tcPr marT="36576" marB="36576" anchor="ctr">
+                    <a:solidFill>
+                      <a:srgbClr val="121821"/>
+                    </a:solidFill>
+                  </a:tcPr>
+                </a:tc>
+                <a:tc>
+                  <a:txBody>
+                    <a:bodyPr/>
+                    <a:lstStyle/>
+                    <a:p>
+                      <a:r>
+                        <a:rPr sz="1300" b="1">
+                          <a:solidFill>
+                            <a:srgbClr val="B98CF2"/>
+                          </a:solidFill>
+                          <a:latin typeface="Segoe UI"/>
+                        </a:rPr>
+                        <a:t>Core</a:t>
+                      </a:r>
+                    </a:p>
+                  </a:txBody>
+                  <a:tcPr marT="36576" marB="36576" anchor="ctr">
+                    <a:solidFill>
+                      <a:srgbClr val="121821"/>
+                    </a:solidFill>
+                  </a:tcPr>
+                </a:tc>
+                <a:tc>
+                  <a:txBody>
+                    <a:bodyPr/>
+                    <a:lstStyle/>
+                    <a:p>
+                      <a:r>
+                        <a:rPr sz="1300" b="0">
+                          <a:solidFill>
+                            <a:srgbClr val="8496A6"/>
+                          </a:solidFill>
+                          <a:latin typeface="Segoe UI"/>
+                        </a:rPr>
+                        <a:t>loop + a running total in memory</a:t>
+                      </a:r>
+                    </a:p>
+                  </a:txBody>
+                  <a:tcPr marT="36576" marB="36576" anchor="ctr">
+                    <a:solidFill>
+                      <a:srgbClr val="121821"/>
+                    </a:solidFill>
+                  </a:tcPr>
+                </a:tc>
+                <a:extLst>
+                  <a:ext uri="{0D108BD9-81ED-4DB2-BD59-A6C34878D82A}">
+                    <a16:rowId xmlns:a16="http://schemas.microsoft.com/office/drawing/2014/main" val="10005"/>
+                  </a:ext>
+                </a:extLst>
+              </a:tr>
+              <a:tr h="395454">
+                <a:tc>
+                  <a:txBody>
+                    <a:bodyPr/>
+                    <a:lstStyle/>
+                    <a:p>
+                      <a:r>
+                        <a:rPr sz="1300" b="1">
+                          <a:solidFill>
+                            <a:srgbClr val="4FD1C5"/>
+                          </a:solidFill>
+                          <a:latin typeface="Consolas"/>
+                        </a:rPr>
+                        <a:t>6</a:t>
+                      </a:r>
+                    </a:p>
+                  </a:txBody>
+                  <a:tcPr marT="36576" marB="36576" anchor="ctr">
+                    <a:solidFill>
+                      <a:srgbClr val="121821"/>
+                    </a:solidFill>
+                  </a:tcPr>
+                </a:tc>
+                <a:tc>
+                  <a:txBody>
+                    <a:bodyPr/>
+                    <a:lstStyle/>
+                    <a:p>
+                      <a:r>
+                        <a:rPr sz="1300" b="0">
+                          <a:solidFill>
+                            <a:srgbClr val="8496A6"/>
+                          </a:solidFill>
+                          <a:latin typeface="Segoe UI"/>
+                        </a:rPr>
+                        <a:t>Halve a number by counting</a:t>
+                      </a:r>
+                    </a:p>
+                  </a:txBody>
+                  <a:tcPr marT="36576" marB="36576" anchor="ctr">
+                    <a:solidFill>
+                      <a:srgbClr val="121821"/>
+                    </a:solidFill>
+                  </a:tcPr>
+                </a:tc>
+                <a:tc>
+                  <a:txBody>
+                    <a:bodyPr/>
+                    <a:lstStyle/>
+                    <a:p>
+                      <a:r>
+                        <a:rPr sz="1300" b="1">
+                          <a:solidFill>
+                            <a:srgbClr val="B98CF2"/>
+                          </a:solidFill>
+                          <a:latin typeface="Segoe UI"/>
+                        </a:rPr>
+                        <a:t>Core</a:t>
+                      </a:r>
+                    </a:p>
+                  </a:txBody>
+                  <a:tcPr marT="36576" marB="36576" anchor="ctr">
+                    <a:solidFill>
+                      <a:srgbClr val="121821"/>
+                    </a:solidFill>
+                  </a:tcPr>
+                </a:tc>
+                <a:tc>
+                  <a:txBody>
+                    <a:bodyPr/>
+                    <a:lstStyle/>
+                    <a:p>
+                      <a:r>
+                        <a:rPr sz="1300" b="0">
+                          <a:solidFill>
+                            <a:srgbClr val="8496A6"/>
+                          </a:solidFill>
+                          <a:latin typeface="Segoe UI"/>
+                        </a:rPr>
+                        <a:t>repeated SUB, count how many times</a:t>
+                      </a:r>
+                    </a:p>
+                  </a:txBody>
+                  <a:tcPr marT="36576" marB="36576" anchor="ctr">
+                    <a:solidFill>
+                      <a:srgbClr val="121821"/>
+                    </a:solidFill>
+                  </a:tcPr>
+                </a:tc>
+                <a:extLst>
+                  <a:ext uri="{0D108BD9-81ED-4DB2-BD59-A6C34878D82A}">
+                    <a16:rowId xmlns:a16="http://schemas.microsoft.com/office/drawing/2014/main" val="10006"/>
+                  </a:ext>
+                </a:extLst>
+              </a:tr>
+              <a:tr h="395454">
+                <a:tc>
+                  <a:txBody>
+                    <a:bodyPr/>
+                    <a:lstStyle/>
+                    <a:p>
+                      <a:r>
+                        <a:rPr sz="1300" b="1">
+                          <a:solidFill>
+                            <a:srgbClr val="4FD1C5"/>
+                          </a:solidFill>
+                          <a:latin typeface="Consolas"/>
+                        </a:rPr>
+                        <a:t>7</a:t>
+                      </a:r>
+                    </a:p>
+                  </a:txBody>
+                  <a:tcPr marT="36576" marB="36576" anchor="ctr">
+                    <a:solidFill>
+                      <a:srgbClr val="121821"/>
+                    </a:solidFill>
+                  </a:tcPr>
+                </a:tc>
+                <a:tc>
+                  <a:txBody>
+                    <a:bodyPr/>
+                    <a:lstStyle/>
+                    <a:p>
+                      <a:r>
+                        <a:rPr sz="1300" b="0">
+                          <a:solidFill>
+                            <a:srgbClr val="8496A6"/>
+                          </a:solidFill>
+                          <a:latin typeface="Segoe UI"/>
+                        </a:rPr>
+                        <a:t>Are three numbers all equal?</a:t>
+                      </a:r>
+                    </a:p>
+                  </a:txBody>
+                  <a:tcPr marT="36576" marB="36576" anchor="ctr">
+                    <a:solidFill>
+                      <a:srgbClr val="121821"/>
+                    </a:solidFill>
+                  </a:tcPr>
+                </a:tc>
+                <a:tc>
+                  <a:txBody>
+                    <a:bodyPr/>
+                    <a:lstStyle/>
+                    <a:p>
+                      <a:r>
+                        <a:rPr sz="1300" b="1">
+                          <a:solidFill>
+                            <a:srgbClr val="B98CF2"/>
+                          </a:solidFill>
+                          <a:latin typeface="Segoe UI"/>
+                        </a:rPr>
+                        <a:t>Core</a:t>
+                      </a:r>
+                    </a:p>
+                  </a:txBody>
+                  <a:tcPr marT="36576" marB="36576" anchor="ctr">
+                    <a:solidFill>
+                      <a:srgbClr val="121821"/>
+                    </a:solidFill>
+                  </a:tcPr>
+                </a:tc>
+                <a:tc>
+                  <a:txBody>
+                    <a:bodyPr/>
+                    <a:lstStyle/>
+                    <a:p>
+                      <a:r>
+                        <a:rPr sz="1300" b="0">
+                          <a:solidFill>
+                            <a:srgbClr val="8496A6"/>
+                          </a:solidFill>
+                          <a:latin typeface="Segoe UI"/>
+                        </a:rPr>
+                        <a:t>two chained comparisons</a:t>
+                      </a:r>
+                    </a:p>
+                  </a:txBody>
+                  <a:tcPr marT="36576" marB="36576" anchor="ctr">
+                    <a:solidFill>
+                      <a:srgbClr val="121821"/>
+                    </a:solidFill>
+                  </a:tcPr>
+                </a:tc>
+                <a:extLst>
+                  <a:ext uri="{0D108BD9-81ED-4DB2-BD59-A6C34878D82A}">
+                    <a16:rowId xmlns:a16="http://schemas.microsoft.com/office/drawing/2014/main" val="10007"/>
+                  </a:ext>
+                </a:extLst>
+              </a:tr>
+              <a:tr h="395454">
+                <a:tc>
+                  <a:txBody>
+                    <a:bodyPr/>
+                    <a:lstStyle/>
+                    <a:p>
+                      <a:r>
+                        <a:rPr sz="1300" b="1">
+                          <a:solidFill>
+                            <a:srgbClr val="4FD1C5"/>
+                          </a:solidFill>
+                          <a:latin typeface="Consolas"/>
+                        </a:rPr>
+                        <a:t>8</a:t>
+                      </a:r>
+                    </a:p>
+                  </a:txBody>
+                  <a:tcPr marT="36576" marB="36576" anchor="ctr">
+                    <a:solidFill>
+                      <a:srgbClr val="121821"/>
+                    </a:solidFill>
+                  </a:tcPr>
+                </a:tc>
+                <a:tc>
+                  <a:txBody>
+                    <a:bodyPr/>
+                    <a:lstStyle/>
+                    <a:p>
+                      <a:r>
+                        <a:rPr sz="1300" b="0">
+                          <a:solidFill>
+                            <a:srgbClr val="8496A6"/>
+                          </a:solidFill>
+                          <a:latin typeface="Segoe UI"/>
+                        </a:rPr>
+                        <a:t>Countdown, then shout GO!</a:t>
+                      </a:r>
+                    </a:p>
+                  </a:txBody>
+                  <a:tcPr marT="36576" marB="36576" anchor="ctr">
+                    <a:solidFill>
+                      <a:srgbClr val="121821"/>
+                    </a:solidFill>
+                  </a:tcPr>
+                </a:tc>
+                <a:tc>
+                  <a:txBody>
+                    <a:bodyPr/>
+                    <a:lstStyle/>
+                    <a:p>
+                      <a:r>
+                        <a:rPr sz="1300" b="1">
+                          <a:solidFill>
+                            <a:srgbClr val="B98CF2"/>
+                          </a:solidFill>
+                          <a:latin typeface="Segoe UI"/>
+                        </a:rPr>
+                        <a:t>Core</a:t>
+                      </a:r>
+                    </a:p>
+                  </a:txBody>
+                  <a:tcPr marT="36576" marB="36576" anchor="ctr">
+                    <a:solidFill>
+                      <a:srgbClr val="121821"/>
+                    </a:solidFill>
+                  </a:tcPr>
+                </a:tc>
+                <a:tc>
+                  <a:txBody>
+                    <a:bodyPr/>
+                    <a:lstStyle/>
+                    <a:p>
+                      <a:r>
+                        <a:rPr sz="1300" b="0">
+                          <a:solidFill>
+                            <a:srgbClr val="8496A6"/>
+                          </a:solidFill>
+                          <a:latin typeface="Segoe UI"/>
+                        </a:rPr>
+                        <a:t>a loop followed by fixed text output</a:t>
+                      </a:r>
+                    </a:p>
+                  </a:txBody>
+                  <a:tcPr marT="36576" marB="36576" anchor="ctr">
+                    <a:solidFill>
+                      <a:srgbClr val="121821"/>
+                    </a:solidFill>
+                  </a:tcPr>
+                </a:tc>
+                <a:extLst>
+                  <a:ext uri="{0D108BD9-81ED-4DB2-BD59-A6C34878D82A}">
+                    <a16:rowId xmlns:a16="http://schemas.microsoft.com/office/drawing/2014/main" val="10008"/>
+                  </a:ext>
+                </a:extLst>
+              </a:tr>
+              <a:tr h="395454">
+                <a:tc>
+                  <a:txBody>
+                    <a:bodyPr/>
+                    <a:lstStyle/>
+                    <a:p>
+                      <a:r>
+                        <a:rPr sz="1300" b="1">
+                          <a:solidFill>
+                            <a:srgbClr val="4FD1C5"/>
+                          </a:solidFill>
+                          <a:latin typeface="Consolas"/>
+                        </a:rPr>
+                        <a:t>9</a:t>
+                      </a:r>
+                    </a:p>
+                  </a:txBody>
+                  <a:tcPr marT="36576" marB="36576" anchor="ctr">
+                    <a:solidFill>
+                      <a:srgbClr val="121821"/>
+                    </a:solidFill>
+                  </a:tcPr>
+                </a:tc>
+                <a:tc>
+                  <a:txBody>
+                    <a:bodyPr/>
+                    <a:lstStyle/>
+                    <a:p>
+                      <a:r>
+                        <a:rPr sz="1300" b="0">
+                          <a:solidFill>
+                            <a:srgbClr val="8496A6"/>
+                          </a:solidFill>
+                          <a:latin typeface="Segoe UI"/>
+                        </a:rPr>
+                        <a:t>Predict the overflow</a:t>
+                      </a:r>
+                    </a:p>
+                  </a:txBody>
+                  <a:tcPr marT="36576" marB="36576" anchor="ctr">
+                    <a:solidFill>
+                      <a:srgbClr val="121821"/>
+                    </a:solidFill>
+                  </a:tcPr>
+                </a:tc>
+                <a:tc>
+                  <a:txBody>
+                    <a:bodyPr/>
+                    <a:lstStyle/>
+                    <a:p>
+                      <a:r>
+                        <a:rPr sz="1300" b="1">
+                          <a:solidFill>
+                            <a:srgbClr val="F2A65A"/>
+                          </a:solidFill>
+                          <a:latin typeface="Segoe UI"/>
+                        </a:rPr>
+                        <a:t>Stretch</a:t>
+                      </a:r>
+                    </a:p>
+                  </a:txBody>
+                  <a:tcPr marT="36576" marB="36576" anchor="ctr">
+                    <a:solidFill>
+                      <a:srgbClr val="121821"/>
+                    </a:solidFill>
+                  </a:tcPr>
+                </a:tc>
+                <a:tc>
+                  <a:txBody>
+                    <a:bodyPr/>
+                    <a:lstStyle/>
+                    <a:p>
+                      <a:r>
+                        <a:rPr sz="1300" b="0">
+                          <a:solidFill>
+                            <a:srgbClr val="8496A6"/>
+                          </a:solidFill>
+                          <a:latin typeface="Segoe UI"/>
+                        </a:rPr>
+                        <a:t>hand-calculate first, then Step to check</a:t>
+                      </a:r>
+                    </a:p>
+                  </a:txBody>
+                  <a:tcPr marT="36576" marB="36576" anchor="ctr">
+                    <a:solidFill>
+                      <a:srgbClr val="121821"/>
+                    </a:solidFill>
+                  </a:tcPr>
+                </a:tc>
+                <a:extLst>
+                  <a:ext uri="{0D108BD9-81ED-4DB2-BD59-A6C34878D82A}">
+                    <a16:rowId xmlns:a16="http://schemas.microsoft.com/office/drawing/2014/main" val="10009"/>
+                  </a:ext>
+                </a:extLst>
+              </a:tr>
+              <a:tr h="395460">
+                <a:tc>
+                  <a:txBody>
+                    <a:bodyPr/>
+                    <a:lstStyle/>
+                    <a:p>
+                      <a:r>
+                        <a:rPr sz="1300" b="1">
+                          <a:solidFill>
+                            <a:srgbClr val="4FD1C5"/>
+                          </a:solidFill>
+                          <a:latin typeface="Consolas"/>
+                        </a:rPr>
+                        <a:t>10</a:t>
+                      </a:r>
+                    </a:p>
+                  </a:txBody>
+                  <a:tcPr marT="36576" marB="36576" anchor="ctr">
+                    <a:solidFill>
+                      <a:srgbClr val="121821"/>
+                    </a:solidFill>
+                  </a:tcPr>
+                </a:tc>
+                <a:tc>
+                  <a:txBody>
+                    <a:bodyPr/>
+                    <a:lstStyle/>
+                    <a:p>
+                      <a:r>
+                        <a:rPr sz="1300" b="0">
+                          <a:solidFill>
+                            <a:srgbClr val="8496A6"/>
+                          </a:solidFill>
+                          <a:latin typeface="Segoe UI"/>
+                        </a:rPr>
+                        <a:t>Design your own</a:t>
+                      </a:r>
+                    </a:p>
+                  </a:txBody>
+                  <a:tcPr marT="36576" marB="36576" anchor="ctr">
+                    <a:solidFill>
+                      <a:srgbClr val="121821"/>
+                    </a:solidFill>
+                  </a:tcPr>
+                </a:tc>
+                <a:tc>
+                  <a:txBody>
+                    <a:bodyPr/>
+                    <a:lstStyle/>
+                    <a:p>
+                      <a:r>
+                        <a:rPr sz="1300" b="1">
+                          <a:solidFill>
+                            <a:srgbClr val="F2A65A"/>
+                          </a:solidFill>
+                          <a:latin typeface="Segoe UI"/>
+                        </a:rPr>
+                        <a:t>Stretch</a:t>
+                      </a:r>
+                    </a:p>
+                  </a:txBody>
+                  <a:tcPr marT="36576" marB="36576" anchor="ctr">
+                    <a:solidFill>
+                      <a:srgbClr val="121821"/>
+                    </a:solidFill>
+                  </a:tcPr>
+                </a:tc>
+                <a:tc>
+                  <a:txBody>
+                    <a:bodyPr/>
+                    <a:lstStyle/>
+                    <a:p>
+                      <a:r>
+                        <a:rPr sz="1300" b="0">
+                          <a:solidFill>
+                            <a:srgbClr val="8496A6"/>
+                          </a:solidFill>
+                          <a:latin typeface="Segoe UI"/>
+                        </a:rPr>
+                        <a:t>combine instructions nobody told you to combine</a:t>
+                      </a:r>
+                    </a:p>
+                  </a:txBody>
+                  <a:tcPr marT="36576" marB="36576" anchor="ctr">
+                    <a:solidFill>
+                      <a:srgbClr val="121821"/>
+                    </a:solidFill>
+                  </a:tcPr>
+                </a:tc>
+                <a:extLst>
+                  <a:ext uri="{0D108BD9-81ED-4DB2-BD59-A6C34878D82A}">
+                    <a16:rowId xmlns:a16="http://schemas.microsoft.com/office/drawing/2014/main" val="10010"/>
+                  </a:ext>
+                </a:extLst>
+              </a:tr>
+            </a:tbl>
+          </a:graphicData>
+        </a:graphic>
+      </p:graphicFrame>
       <p:sp>
         <p:nvSpPr>
           <p:cNvPr id="9" name="TextBox 8"/>
@@ -9115,8 +10470,8 @@
         </p:nvSpPr>
         <p:spPr>
           <a:xfrm>
-            <a:off x="731520" y="1691640"/>
-            <a:ext cx="1005840" cy="457200"/>
+            <a:off x="502920" y="6528816"/>
+            <a:ext cx="6400800" cy="274320"/>
           </a:xfrm>
           <a:prstGeom prst="rect">
             <a:avLst/>
@@ -9124,7 +10479,7 @@
           <a:noFill/>
         </p:spPr>
         <p:txBody>
-          <a:bodyPr wrap="square" lIns="0" rIns="0" tIns="0" bIns="0">
+          <a:bodyPr wrap="square" lIns="0" tIns="0" rIns="0" bIns="0">
             <a:spAutoFit/>
           </a:bodyPr>
           <a:lstStyle/>
@@ -9135,13 +10490,13 @@
               </a:lnSpc>
             </a:pPr>
             <a:r>
-              <a:rPr sz="1300" b="1">
-                <a:solidFill>
-                  <a:srgbClr val="4FD1C5"/>
-                </a:solidFill>
-                <a:latin typeface="Segoe UI Semibold"/>
-              </a:rPr>
-              <a:t>5 MIN</a:t>
+              <a:rPr sz="900" b="0">
+                <a:solidFill>
+                  <a:srgbClr val="54636F"/>
+                </a:solidFill>
+                <a:latin typeface="Consolas"/>
+              </a:rPr>
+              <a:t>DIGITAL TECHNOLOGIES · EDUCPU-8 — VISUAL ASSEMBLY SIMULATOR</a:t>
             </a:r>
           </a:p>
         </p:txBody>
@@ -9154,8 +10509,8 @@
         </p:nvSpPr>
         <p:spPr>
           <a:xfrm>
-            <a:off x="1783080" y="1691640"/>
-            <a:ext cx="9601200" cy="457200"/>
+            <a:off x="10271455" y="6528816"/>
+            <a:ext cx="1417320" cy="274320"/>
           </a:xfrm>
           <a:prstGeom prst="rect">
             <a:avLst/>
@@ -9163,765 +10518,7 @@
           <a:noFill/>
         </p:spPr>
         <p:txBody>
-          <a:bodyPr wrap="square" lIns="0" rIns="0" tIns="0" bIns="0">
-            <a:spAutoFit/>
-          </a:bodyPr>
-          <a:lstStyle/>
-          <a:p>
-            <a:pPr algn="l">
-              <a:lnSpc>
-                <a:spcPct val="130000"/>
-              </a:lnSpc>
-            </a:pPr>
-            <a:r>
-              <a:rPr sz="1250" b="0">
-                <a:solidFill>
-                  <a:srgbClr val="E7EEF4"/>
-                </a:solidFill>
-                <a:latin typeface="Consolas"/>
-              </a:rPr>
-              <a:t>Discuss IPO with an everyday example — a vending machine, a microwave, an ATM.</a:t>
-            </a:r>
-          </a:p>
-        </p:txBody>
-      </p:sp>
-      <p:sp>
-        <p:nvSpPr>
-          <p:cNvPr id="11" name="Rounded Rectangle 10"/>
-          <p:cNvSpPr/>
-          <p:nvPr/>
-        </p:nvSpPr>
-        <p:spPr>
-          <a:xfrm>
-            <a:off x="502920" y="2386584"/>
-            <a:ext cx="11155680" cy="658368"/>
-          </a:xfrm>
-          <a:prstGeom prst="roundRect">
-            <a:avLst>
-              <a:gd name="adj" fmla="val 6000"/>
-            </a:avLst>
-          </a:prstGeom>
-          <a:solidFill>
-            <a:srgbClr val="121821"/>
-          </a:solidFill>
-          <a:ln w="12700">
-            <a:solidFill>
-              <a:srgbClr val="26323D"/>
-            </a:solidFill>
-          </a:ln>
-          <a:effectLst/>
-        </p:spPr>
-        <p:style>
-          <a:lnRef idx="1">
-            <a:schemeClr val="accent1"/>
-          </a:lnRef>
-          <a:fillRef idx="3">
-            <a:schemeClr val="accent1"/>
-          </a:fillRef>
-          <a:effectRef idx="2">
-            <a:schemeClr val="accent1"/>
-          </a:effectRef>
-          <a:fontRef idx="minor">
-            <a:schemeClr val="lt1"/>
-          </a:fontRef>
-        </p:style>
-        <p:txBody>
-          <a:bodyPr rtlCol="0" anchor="ctr"/>
-          <a:lstStyle/>
-          <a:p>
-            <a:pPr algn="ctr"/>
-          </a:p>
-        </p:txBody>
-      </p:sp>
-      <p:sp>
-        <p:nvSpPr>
-          <p:cNvPr id="12" name="Rectangle 11"/>
-          <p:cNvSpPr/>
-          <p:nvPr/>
-        </p:nvSpPr>
-        <p:spPr>
-          <a:xfrm>
-            <a:off x="502920" y="2386584"/>
-            <a:ext cx="54864" cy="658368"/>
-          </a:xfrm>
-          <a:prstGeom prst="rect">
-            <a:avLst/>
-          </a:prstGeom>
-          <a:solidFill>
-            <a:srgbClr val="B98CF2"/>
-          </a:solidFill>
-          <a:ln>
-            <a:noFill/>
-          </a:ln>
-          <a:effectLst/>
-        </p:spPr>
-        <p:style>
-          <a:lnRef idx="1">
-            <a:schemeClr val="accent1"/>
-          </a:lnRef>
-          <a:fillRef idx="3">
-            <a:schemeClr val="accent1"/>
-          </a:fillRef>
-          <a:effectRef idx="2">
-            <a:schemeClr val="accent1"/>
-          </a:effectRef>
-          <a:fontRef idx="minor">
-            <a:schemeClr val="lt1"/>
-          </a:fontRef>
-        </p:style>
-        <p:txBody>
-          <a:bodyPr rtlCol="0" anchor="ctr"/>
-          <a:lstStyle/>
-          <a:p>
-            <a:pPr algn="ctr"/>
-          </a:p>
-        </p:txBody>
-      </p:sp>
-      <p:sp>
-        <p:nvSpPr>
-          <p:cNvPr id="13" name="TextBox 12"/>
-          <p:cNvSpPr txBox="1"/>
-          <p:nvPr/>
-        </p:nvSpPr>
-        <p:spPr>
-          <a:xfrm>
-            <a:off x="731520" y="2478024"/>
-            <a:ext cx="1005840" cy="457200"/>
-          </a:xfrm>
-          <a:prstGeom prst="rect">
-            <a:avLst/>
-          </a:prstGeom>
-          <a:noFill/>
-        </p:spPr>
-        <p:txBody>
-          <a:bodyPr wrap="square" lIns="0" rIns="0" tIns="0" bIns="0">
-            <a:spAutoFit/>
-          </a:bodyPr>
-          <a:lstStyle/>
-          <a:p>
-            <a:pPr algn="l">
-              <a:lnSpc>
-                <a:spcPct val="120000"/>
-              </a:lnSpc>
-            </a:pPr>
-            <a:r>
-              <a:rPr sz="1300" b="1">
-                <a:solidFill>
-                  <a:srgbClr val="B98CF2"/>
-                </a:solidFill>
-                <a:latin typeface="Segoe UI Semibold"/>
-              </a:rPr>
-              <a:t>10 MIN</a:t>
-            </a:r>
-          </a:p>
-        </p:txBody>
-      </p:sp>
-      <p:sp>
-        <p:nvSpPr>
-          <p:cNvPr id="14" name="TextBox 13"/>
-          <p:cNvSpPr txBox="1"/>
-          <p:nvPr/>
-        </p:nvSpPr>
-        <p:spPr>
-          <a:xfrm>
-            <a:off x="1783080" y="2478024"/>
-            <a:ext cx="9601200" cy="457200"/>
-          </a:xfrm>
-          <a:prstGeom prst="rect">
-            <a:avLst/>
-          </a:prstGeom>
-          <a:noFill/>
-        </p:spPr>
-        <p:txBody>
-          <a:bodyPr wrap="square" lIns="0" rIns="0" tIns="0" bIns="0">
-            <a:spAutoFit/>
-          </a:bodyPr>
-          <a:lstStyle/>
-          <a:p>
-            <a:pPr algn="l">
-              <a:lnSpc>
-                <a:spcPct val="130000"/>
-              </a:lnSpc>
-            </a:pPr>
-            <a:r>
-              <a:rPr sz="1250" b="0">
-                <a:solidFill>
-                  <a:srgbClr val="E7EEF4"/>
-                </a:solidFill>
-                <a:latin typeface="Consolas"/>
-              </a:rPr>
-              <a:t>Demo: load Hello Text together as a class and Step through it line by line.</a:t>
-            </a:r>
-          </a:p>
-        </p:txBody>
-      </p:sp>
-      <p:sp>
-        <p:nvSpPr>
-          <p:cNvPr id="15" name="Rounded Rectangle 14"/>
-          <p:cNvSpPr/>
-          <p:nvPr/>
-        </p:nvSpPr>
-        <p:spPr>
-          <a:xfrm>
-            <a:off x="502920" y="3172968"/>
-            <a:ext cx="11155680" cy="658368"/>
-          </a:xfrm>
-          <a:prstGeom prst="roundRect">
-            <a:avLst>
-              <a:gd name="adj" fmla="val 6000"/>
-            </a:avLst>
-          </a:prstGeom>
-          <a:solidFill>
-            <a:srgbClr val="121821"/>
-          </a:solidFill>
-          <a:ln w="12700">
-            <a:solidFill>
-              <a:srgbClr val="26323D"/>
-            </a:solidFill>
-          </a:ln>
-          <a:effectLst/>
-        </p:spPr>
-        <p:style>
-          <a:lnRef idx="1">
-            <a:schemeClr val="accent1"/>
-          </a:lnRef>
-          <a:fillRef idx="3">
-            <a:schemeClr val="accent1"/>
-          </a:fillRef>
-          <a:effectRef idx="2">
-            <a:schemeClr val="accent1"/>
-          </a:effectRef>
-          <a:fontRef idx="minor">
-            <a:schemeClr val="lt1"/>
-          </a:fontRef>
-        </p:style>
-        <p:txBody>
-          <a:bodyPr rtlCol="0" anchor="ctr"/>
-          <a:lstStyle/>
-          <a:p>
-            <a:pPr algn="ctr"/>
-          </a:p>
-        </p:txBody>
-      </p:sp>
-      <p:sp>
-        <p:nvSpPr>
-          <p:cNvPr id="16" name="Rectangle 15"/>
-          <p:cNvSpPr/>
-          <p:nvPr/>
-        </p:nvSpPr>
-        <p:spPr>
-          <a:xfrm>
-            <a:off x="502920" y="3172968"/>
-            <a:ext cx="54864" cy="658368"/>
-          </a:xfrm>
-          <a:prstGeom prst="rect">
-            <a:avLst/>
-          </a:prstGeom>
-          <a:solidFill>
-            <a:srgbClr val="B98CF2"/>
-          </a:solidFill>
-          <a:ln>
-            <a:noFill/>
-          </a:ln>
-          <a:effectLst/>
-        </p:spPr>
-        <p:style>
-          <a:lnRef idx="1">
-            <a:schemeClr val="accent1"/>
-          </a:lnRef>
-          <a:fillRef idx="3">
-            <a:schemeClr val="accent1"/>
-          </a:fillRef>
-          <a:effectRef idx="2">
-            <a:schemeClr val="accent1"/>
-          </a:effectRef>
-          <a:fontRef idx="minor">
-            <a:schemeClr val="lt1"/>
-          </a:fontRef>
-        </p:style>
-        <p:txBody>
-          <a:bodyPr rtlCol="0" anchor="ctr"/>
-          <a:lstStyle/>
-          <a:p>
-            <a:pPr algn="ctr"/>
-          </a:p>
-        </p:txBody>
-      </p:sp>
-      <p:sp>
-        <p:nvSpPr>
-          <p:cNvPr id="17" name="TextBox 16"/>
-          <p:cNvSpPr txBox="1"/>
-          <p:nvPr/>
-        </p:nvSpPr>
-        <p:spPr>
-          <a:xfrm>
-            <a:off x="731520" y="3264408"/>
-            <a:ext cx="1005840" cy="457200"/>
-          </a:xfrm>
-          <a:prstGeom prst="rect">
-            <a:avLst/>
-          </a:prstGeom>
-          <a:noFill/>
-        </p:spPr>
-        <p:txBody>
-          <a:bodyPr wrap="square" lIns="0" rIns="0" tIns="0" bIns="0">
-            <a:spAutoFit/>
-          </a:bodyPr>
-          <a:lstStyle/>
-          <a:p>
-            <a:pPr algn="l">
-              <a:lnSpc>
-                <a:spcPct val="120000"/>
-              </a:lnSpc>
-            </a:pPr>
-            <a:r>
-              <a:rPr sz="1300" b="1">
-                <a:solidFill>
-                  <a:srgbClr val="B98CF2"/>
-                </a:solidFill>
-                <a:latin typeface="Segoe UI Semibold"/>
-              </a:rPr>
-              <a:t>15 MIN</a:t>
-            </a:r>
-          </a:p>
-        </p:txBody>
-      </p:sp>
-      <p:sp>
-        <p:nvSpPr>
-          <p:cNvPr id="18" name="TextBox 17"/>
-          <p:cNvSpPr txBox="1"/>
-          <p:nvPr/>
-        </p:nvSpPr>
-        <p:spPr>
-          <a:xfrm>
-            <a:off x="1783080" y="3264408"/>
-            <a:ext cx="9601200" cy="457200"/>
-          </a:xfrm>
-          <a:prstGeom prst="rect">
-            <a:avLst/>
-          </a:prstGeom>
-          <a:noFill/>
-        </p:spPr>
-        <p:txBody>
-          <a:bodyPr wrap="square" lIns="0" rIns="0" tIns="0" bIns="0">
-            <a:spAutoFit/>
-          </a:bodyPr>
-          <a:lstStyle/>
-          <a:p>
-            <a:pPr algn="l">
-              <a:lnSpc>
-                <a:spcPct val="130000"/>
-              </a:lnSpc>
-            </a:pPr>
-            <a:r>
-              <a:rPr sz="1250" b="0">
-                <a:solidFill>
-                  <a:srgbClr val="E7EEF4"/>
-                </a:solidFill>
-                <a:latin typeface="Consolas"/>
-              </a:rPr>
-              <a:t>Pairs: work through Countdown Loop and Add Two Numbers, using each slide’s checkpoint question.</a:t>
-            </a:r>
-          </a:p>
-        </p:txBody>
-      </p:sp>
-      <p:sp>
-        <p:nvSpPr>
-          <p:cNvPr id="19" name="Rounded Rectangle 18"/>
-          <p:cNvSpPr/>
-          <p:nvPr/>
-        </p:nvSpPr>
-        <p:spPr>
-          <a:xfrm>
-            <a:off x="502920" y="3959352"/>
-            <a:ext cx="11155680" cy="658368"/>
-          </a:xfrm>
-          <a:prstGeom prst="roundRect">
-            <a:avLst>
-              <a:gd name="adj" fmla="val 6000"/>
-            </a:avLst>
-          </a:prstGeom>
-          <a:solidFill>
-            <a:srgbClr val="121821"/>
-          </a:solidFill>
-          <a:ln w="12700">
-            <a:solidFill>
-              <a:srgbClr val="26323D"/>
-            </a:solidFill>
-          </a:ln>
-          <a:effectLst/>
-        </p:spPr>
-        <p:style>
-          <a:lnRef idx="1">
-            <a:schemeClr val="accent1"/>
-          </a:lnRef>
-          <a:fillRef idx="3">
-            <a:schemeClr val="accent1"/>
-          </a:fillRef>
-          <a:effectRef idx="2">
-            <a:schemeClr val="accent1"/>
-          </a:effectRef>
-          <a:fontRef idx="minor">
-            <a:schemeClr val="lt1"/>
-          </a:fontRef>
-        </p:style>
-        <p:txBody>
-          <a:bodyPr rtlCol="0" anchor="ctr"/>
-          <a:lstStyle/>
-          <a:p>
-            <a:pPr algn="ctr"/>
-          </a:p>
-        </p:txBody>
-      </p:sp>
-      <p:sp>
-        <p:nvSpPr>
-          <p:cNvPr id="20" name="Rectangle 19"/>
-          <p:cNvSpPr/>
-          <p:nvPr/>
-        </p:nvSpPr>
-        <p:spPr>
-          <a:xfrm>
-            <a:off x="502920" y="3959352"/>
-            <a:ext cx="54864" cy="658368"/>
-          </a:xfrm>
-          <a:prstGeom prst="rect">
-            <a:avLst/>
-          </a:prstGeom>
-          <a:solidFill>
-            <a:srgbClr val="F2A65A"/>
-          </a:solidFill>
-          <a:ln>
-            <a:noFill/>
-          </a:ln>
-          <a:effectLst/>
-        </p:spPr>
-        <p:style>
-          <a:lnRef idx="1">
-            <a:schemeClr val="accent1"/>
-          </a:lnRef>
-          <a:fillRef idx="3">
-            <a:schemeClr val="accent1"/>
-          </a:fillRef>
-          <a:effectRef idx="2">
-            <a:schemeClr val="accent1"/>
-          </a:effectRef>
-          <a:fontRef idx="minor">
-            <a:schemeClr val="lt1"/>
-          </a:fontRef>
-        </p:style>
-        <p:txBody>
-          <a:bodyPr rtlCol="0" anchor="ctr"/>
-          <a:lstStyle/>
-          <a:p>
-            <a:pPr algn="ctr"/>
-          </a:p>
-        </p:txBody>
-      </p:sp>
-      <p:sp>
-        <p:nvSpPr>
-          <p:cNvPr id="21" name="TextBox 20"/>
-          <p:cNvSpPr txBox="1"/>
-          <p:nvPr/>
-        </p:nvSpPr>
-        <p:spPr>
-          <a:xfrm>
-            <a:off x="731520" y="4050792"/>
-            <a:ext cx="1005840" cy="457200"/>
-          </a:xfrm>
-          <a:prstGeom prst="rect">
-            <a:avLst/>
-          </a:prstGeom>
-          <a:noFill/>
-        </p:spPr>
-        <p:txBody>
-          <a:bodyPr wrap="square" lIns="0" rIns="0" tIns="0" bIns="0">
-            <a:spAutoFit/>
-          </a:bodyPr>
-          <a:lstStyle/>
-          <a:p>
-            <a:pPr algn="l">
-              <a:lnSpc>
-                <a:spcPct val="120000"/>
-              </a:lnSpc>
-            </a:pPr>
-            <a:r>
-              <a:rPr sz="1300" b="1">
-                <a:solidFill>
-                  <a:srgbClr val="F2A65A"/>
-                </a:solidFill>
-                <a:latin typeface="Segoe UI Semibold"/>
-              </a:rPr>
-              <a:t>10 MIN</a:t>
-            </a:r>
-          </a:p>
-        </p:txBody>
-      </p:sp>
-      <p:sp>
-        <p:nvSpPr>
-          <p:cNvPr id="22" name="TextBox 21"/>
-          <p:cNvSpPr txBox="1"/>
-          <p:nvPr/>
-        </p:nvSpPr>
-        <p:spPr>
-          <a:xfrm>
-            <a:off x="1783080" y="4050792"/>
-            <a:ext cx="9601200" cy="457200"/>
-          </a:xfrm>
-          <a:prstGeom prst="rect">
-            <a:avLst/>
-          </a:prstGeom>
-          <a:noFill/>
-        </p:spPr>
-        <p:txBody>
-          <a:bodyPr wrap="square" lIns="0" rIns="0" tIns="0" bIns="0">
-            <a:spAutoFit/>
-          </a:bodyPr>
-          <a:lstStyle/>
-          <a:p>
-            <a:pPr algn="l">
-              <a:lnSpc>
-                <a:spcPct val="130000"/>
-              </a:lnSpc>
-            </a:pPr>
-            <a:r>
-              <a:rPr sz="1250" b="0">
-                <a:solidFill>
-                  <a:srgbClr val="E7EEF4"/>
-                </a:solidFill>
-                <a:latin typeface="Consolas"/>
-              </a:rPr>
-              <a:t>Challenge: write a fourth program from scratch — print a name, or add three numbers.</a:t>
-            </a:r>
-          </a:p>
-        </p:txBody>
-      </p:sp>
-      <p:sp>
-        <p:nvSpPr>
-          <p:cNvPr id="23" name="Rounded Rectangle 22"/>
-          <p:cNvSpPr/>
-          <p:nvPr/>
-        </p:nvSpPr>
-        <p:spPr>
-          <a:xfrm>
-            <a:off x="502920" y="4745736"/>
-            <a:ext cx="11155680" cy="658368"/>
-          </a:xfrm>
-          <a:prstGeom prst="roundRect">
-            <a:avLst>
-              <a:gd name="adj" fmla="val 6000"/>
-            </a:avLst>
-          </a:prstGeom>
-          <a:solidFill>
-            <a:srgbClr val="121821"/>
-          </a:solidFill>
-          <a:ln w="12700">
-            <a:solidFill>
-              <a:srgbClr val="26323D"/>
-            </a:solidFill>
-          </a:ln>
-          <a:effectLst/>
-        </p:spPr>
-        <p:style>
-          <a:lnRef idx="1">
-            <a:schemeClr val="accent1"/>
-          </a:lnRef>
-          <a:fillRef idx="3">
-            <a:schemeClr val="accent1"/>
-          </a:fillRef>
-          <a:effectRef idx="2">
-            <a:schemeClr val="accent1"/>
-          </a:effectRef>
-          <a:fontRef idx="minor">
-            <a:schemeClr val="lt1"/>
-          </a:fontRef>
-        </p:style>
-        <p:txBody>
-          <a:bodyPr rtlCol="0" anchor="ctr"/>
-          <a:lstStyle/>
-          <a:p>
-            <a:pPr algn="ctr"/>
-          </a:p>
-        </p:txBody>
-      </p:sp>
-      <p:sp>
-        <p:nvSpPr>
-          <p:cNvPr id="24" name="Rectangle 23"/>
-          <p:cNvSpPr/>
-          <p:nvPr/>
-        </p:nvSpPr>
-        <p:spPr>
-          <a:xfrm>
-            <a:off x="502920" y="4745736"/>
-            <a:ext cx="54864" cy="658368"/>
-          </a:xfrm>
-          <a:prstGeom prst="rect">
-            <a:avLst/>
-          </a:prstGeom>
-          <a:solidFill>
-            <a:srgbClr val="4FD1C5"/>
-          </a:solidFill>
-          <a:ln>
-            <a:noFill/>
-          </a:ln>
-          <a:effectLst/>
-        </p:spPr>
-        <p:style>
-          <a:lnRef idx="1">
-            <a:schemeClr val="accent1"/>
-          </a:lnRef>
-          <a:fillRef idx="3">
-            <a:schemeClr val="accent1"/>
-          </a:fillRef>
-          <a:effectRef idx="2">
-            <a:schemeClr val="accent1"/>
-          </a:effectRef>
-          <a:fontRef idx="minor">
-            <a:schemeClr val="lt1"/>
-          </a:fontRef>
-        </p:style>
-        <p:txBody>
-          <a:bodyPr rtlCol="0" anchor="ctr"/>
-          <a:lstStyle/>
-          <a:p>
-            <a:pPr algn="ctr"/>
-          </a:p>
-        </p:txBody>
-      </p:sp>
-      <p:sp>
-        <p:nvSpPr>
-          <p:cNvPr id="25" name="TextBox 24"/>
-          <p:cNvSpPr txBox="1"/>
-          <p:nvPr/>
-        </p:nvSpPr>
-        <p:spPr>
-          <a:xfrm>
-            <a:off x="731520" y="4837176"/>
-            <a:ext cx="1005840" cy="457200"/>
-          </a:xfrm>
-          <a:prstGeom prst="rect">
-            <a:avLst/>
-          </a:prstGeom>
-          <a:noFill/>
-        </p:spPr>
-        <p:txBody>
-          <a:bodyPr wrap="square" lIns="0" rIns="0" tIns="0" bIns="0">
-            <a:spAutoFit/>
-          </a:bodyPr>
-          <a:lstStyle/>
-          <a:p>
-            <a:pPr algn="l">
-              <a:lnSpc>
-                <a:spcPct val="120000"/>
-              </a:lnSpc>
-            </a:pPr>
-            <a:r>
-              <a:rPr sz="1300" b="1">
-                <a:solidFill>
-                  <a:srgbClr val="4FD1C5"/>
-                </a:solidFill>
-                <a:latin typeface="Segoe UI Semibold"/>
-              </a:rPr>
-              <a:t>5 MIN</a:t>
-            </a:r>
-          </a:p>
-        </p:txBody>
-      </p:sp>
-      <p:sp>
-        <p:nvSpPr>
-          <p:cNvPr id="26" name="TextBox 25"/>
-          <p:cNvSpPr txBox="1"/>
-          <p:nvPr/>
-        </p:nvSpPr>
-        <p:spPr>
-          <a:xfrm>
-            <a:off x="1783080" y="4837176"/>
-            <a:ext cx="9601200" cy="457200"/>
-          </a:xfrm>
-          <a:prstGeom prst="rect">
-            <a:avLst/>
-          </a:prstGeom>
-          <a:noFill/>
-        </p:spPr>
-        <p:txBody>
-          <a:bodyPr wrap="square" lIns="0" rIns="0" tIns="0" bIns="0">
-            <a:spAutoFit/>
-          </a:bodyPr>
-          <a:lstStyle/>
-          <a:p>
-            <a:pPr algn="l">
-              <a:lnSpc>
-                <a:spcPct val="130000"/>
-              </a:lnSpc>
-            </a:pPr>
-            <a:r>
-              <a:rPr sz="1250" b="0">
-                <a:solidFill>
-                  <a:srgbClr val="E7EEF4"/>
-                </a:solidFill>
-                <a:latin typeface="Consolas"/>
-              </a:rPr>
-              <a:t>Wrap-up: what changed in ACC, memory and the console at each step?</a:t>
-            </a:r>
-          </a:p>
-        </p:txBody>
-      </p:sp>
-      <p:sp>
-        <p:nvSpPr>
-          <p:cNvPr id="27" name="TextBox 26"/>
-          <p:cNvSpPr txBox="1"/>
-          <p:nvPr/>
-        </p:nvSpPr>
-        <p:spPr>
-          <a:xfrm>
-            <a:off x="502920" y="6528816"/>
-            <a:ext cx="6400800" cy="274320"/>
-          </a:xfrm>
-          <a:prstGeom prst="rect">
-            <a:avLst/>
-          </a:prstGeom>
-          <a:noFill/>
-        </p:spPr>
-        <p:txBody>
-          <a:bodyPr wrap="square" lIns="0" rIns="0" tIns="0" bIns="0">
-            <a:spAutoFit/>
-          </a:bodyPr>
-          <a:lstStyle/>
-          <a:p>
-            <a:pPr algn="l">
-              <a:lnSpc>
-                <a:spcPct val="120000"/>
-              </a:lnSpc>
-            </a:pPr>
-            <a:r>
-              <a:rPr sz="900" b="0">
-                <a:solidFill>
-                  <a:srgbClr val="54636F"/>
-                </a:solidFill>
-                <a:latin typeface="Consolas"/>
-              </a:rPr>
-              <a:t>DIGITAL TECHNOLOGIES · EDUCPU-8 — VISUAL ASSEMBLY SIMULATOR</a:t>
-            </a:r>
-          </a:p>
-        </p:txBody>
-      </p:sp>
-      <p:sp>
-        <p:nvSpPr>
-          <p:cNvPr id="28" name="TextBox 27"/>
-          <p:cNvSpPr txBox="1"/>
-          <p:nvPr/>
-        </p:nvSpPr>
-        <p:spPr>
-          <a:xfrm>
-            <a:off x="10271455" y="6528816"/>
-            <a:ext cx="1417320" cy="274320"/>
-          </a:xfrm>
-          <a:prstGeom prst="rect">
-            <a:avLst/>
-          </a:prstGeom>
-          <a:noFill/>
-        </p:spPr>
-        <p:txBody>
-          <a:bodyPr wrap="square" lIns="0" rIns="0" tIns="0" bIns="0">
+          <a:bodyPr wrap="square" lIns="0" tIns="0" rIns="0" bIns="0">
             <a:spAutoFit/>
           </a:bodyPr>
           <a:lstStyle/>
@@ -9938,7 +10535,7 @@
                 </a:solidFill>
                 <a:latin typeface="Consolas"/>
               </a:rPr>
-              <a:t>08</a:t>
+              <a:t>09</a:t>
             </a:r>
           </a:p>
         </p:txBody>
@@ -9952,7 +10549,7 @@
 </file>
 
 <file path=ppt/slides/slide9.xml><?xml version="1.0" encoding="utf-8"?>
-<p:sld xmlns:a="http://schemas.openxmlformats.org/drawingml/2006/main" xmlns:p="http://schemas.openxmlformats.org/presentationml/2006/main" xmlns:r="http://schemas.openxmlformats.org/officeDocument/2006/relationships">
+<p:sld xmlns:a="http://schemas.openxmlformats.org/drawingml/2006/main" xmlns:r="http://schemas.openxmlformats.org/officeDocument/2006/relationships" xmlns:p="http://schemas.openxmlformats.org/presentationml/2006/main">
   <p:cSld>
     <p:bg>
       <p:bgPr>
@@ -9968,7 +10565,14 @@
         <p:cNvGrpSpPr/>
         <p:nvPr/>
       </p:nvGrpSpPr>
-      <p:grpSpPr/>
+      <p:grpSpPr>
+        <a:xfrm>
+          <a:off x="0" y="0"/>
+          <a:ext cx="0" cy="0"/>
+          <a:chOff x="0" y="0"/>
+          <a:chExt cx="0" cy="0"/>
+        </a:xfrm>
+      </p:grpSpPr>
       <p:sp>
         <p:nvSpPr>
           <p:cNvPr id="2" name="Rectangle 1"/>
@@ -10010,6 +10614,7 @@
           <a:lstStyle/>
           <a:p>
             <a:pPr algn="ctr"/>
+            <a:endParaRPr/>
           </a:p>
         </p:txBody>
       </p:sp>
@@ -10054,6 +10659,7 @@
           <a:lstStyle/>
           <a:p>
             <a:pPr algn="ctr"/>
+            <a:endParaRPr/>
           </a:p>
         </p:txBody>
       </p:sp>
@@ -10074,7 +10680,7 @@
           <a:noFill/>
         </p:spPr>
         <p:txBody>
-          <a:bodyPr wrap="square" lIns="0" rIns="0" tIns="0" bIns="0">
+          <a:bodyPr wrap="square" lIns="0" tIns="0" rIns="0" bIns="0">
             <a:spAutoFit/>
           </a:bodyPr>
           <a:lstStyle/>
@@ -10113,7 +10719,7 @@
           <a:noFill/>
         </p:spPr>
         <p:txBody>
-          <a:bodyPr wrap="square" lIns="0" rIns="0" tIns="0" bIns="0">
+          <a:bodyPr wrap="square" lIns="0" tIns="0" rIns="0" bIns="0">
             <a:spAutoFit/>
           </a:bodyPr>
           <a:lstStyle/>
@@ -10131,45 +10737,6 @@
                 <a:latin typeface="Segoe UI"/>
               </a:rPr>
               <a:t>Input. Process. Output. Every Time.</a:t>
-            </a:r>
-          </a:p>
-        </p:txBody>
-      </p:sp>
-      <p:sp>
-        <p:nvSpPr>
-          <p:cNvPr id="6" name="TextBox 5"/>
-          <p:cNvSpPr txBox="1"/>
-          <p:nvPr/>
-        </p:nvSpPr>
-        <p:spPr>
-          <a:xfrm>
-            <a:off x="548640" y="1828800"/>
-            <a:ext cx="10515600" cy="457200"/>
-          </a:xfrm>
-          <a:prstGeom prst="rect">
-            <a:avLst/>
-          </a:prstGeom>
-          <a:noFill/>
-        </p:spPr>
-        <p:txBody>
-          <a:bodyPr wrap="square" lIns="0" rIns="0" tIns="0" bIns="0">
-            <a:spAutoFit/>
-          </a:bodyPr>
-          <a:lstStyle/>
-          <a:p>
-            <a:pPr algn="l">
-              <a:lnSpc>
-                <a:spcPct val="130000"/>
-              </a:lnSpc>
-            </a:pPr>
-            <a:r>
-              <a:rPr sz="1300" b="0">
-                <a:solidFill>
-                  <a:srgbClr val="8496A6"/>
-                </a:solidFill>
-                <a:latin typeface="Consolas"/>
-              </a:rPr>
-              <a:t>Once students can point to Input, Process and Output on EduCPU-8, they can point to it in any system — a phone, a website, a game.</a:t>
             </a:r>
           </a:p>
         </p:txBody>
@@ -10219,6 +10786,7 @@
           <a:lstStyle/>
           <a:p>
             <a:pPr algn="ctr"/>
+            <a:endParaRPr/>
           </a:p>
         </p:txBody>
       </p:sp>
@@ -10239,7 +10807,7 @@
           <a:noFill/>
         </p:spPr>
         <p:txBody>
-          <a:bodyPr wrap="square" lIns="0" rIns="0" tIns="0" bIns="0">
+          <a:bodyPr wrap="square" lIns="0" tIns="0" rIns="0" bIns="0">
             <a:spAutoFit/>
           </a:bodyPr>
           <a:lstStyle/>
@@ -10278,7 +10846,7 @@
           <a:noFill/>
         </p:spPr>
         <p:txBody>
-          <a:bodyPr wrap="square" lIns="0" rIns="0" tIns="0" bIns="0">
+          <a:bodyPr wrap="square" lIns="0" tIns="0" rIns="0" bIns="0">
             <a:spAutoFit/>
           </a:bodyPr>
           <a:lstStyle/>
@@ -10317,7 +10885,7 @@
           <a:noFill/>
         </p:spPr>
         <p:txBody>
-          <a:bodyPr wrap="square" lIns="0" rIns="0" tIns="0" bIns="0">
+          <a:bodyPr wrap="square" lIns="0" tIns="0" rIns="0" bIns="0">
             <a:spAutoFit/>
           </a:bodyPr>
           <a:lstStyle/>
@@ -10365,7 +10933,7 @@
           <a:noFill/>
         </p:spPr>
         <p:txBody>
-          <a:bodyPr wrap="square" lIns="0" rIns="0" tIns="0" bIns="0">
+          <a:bodyPr wrap="square" lIns="0" tIns="0" rIns="0" bIns="0">
             <a:spAutoFit/>
           </a:bodyPr>
           <a:lstStyle/>
@@ -10441,6 +11009,7 @@
           <a:lstStyle/>
           <a:p>
             <a:pPr algn="ctr"/>
+            <a:endParaRPr/>
           </a:p>
         </p:txBody>
       </p:sp>
@@ -10461,7 +11030,7 @@
           <a:noFill/>
         </p:spPr>
         <p:txBody>
-          <a:bodyPr wrap="square" lIns="0" rIns="0" tIns="0" bIns="0">
+          <a:bodyPr wrap="square" lIns="0" tIns="0" rIns="0" bIns="0">
             <a:spAutoFit/>
           </a:bodyPr>
           <a:lstStyle/>
@@ -10500,7 +11069,7 @@
           <a:noFill/>
         </p:spPr>
         <p:txBody>
-          <a:bodyPr wrap="square" lIns="0" rIns="0" tIns="0" bIns="0">
+          <a:bodyPr wrap="square" lIns="0" tIns="0" rIns="0" bIns="0">
             <a:spAutoFit/>
           </a:bodyPr>
           <a:lstStyle/>
@@ -10539,7 +11108,7 @@
           <a:noFill/>
         </p:spPr>
         <p:txBody>
-          <a:bodyPr wrap="square" lIns="0" rIns="0" tIns="0" bIns="0">
+          <a:bodyPr wrap="square" lIns="0" tIns="0" rIns="0" bIns="0">
             <a:spAutoFit/>
           </a:bodyPr>
           <a:lstStyle/>
@@ -10587,7 +11156,7 @@
           <a:noFill/>
         </p:spPr>
         <p:txBody>
-          <a:bodyPr wrap="square" lIns="0" rIns="0" tIns="0" bIns="0">
+          <a:bodyPr wrap="square" lIns="0" tIns="0" rIns="0" bIns="0">
             <a:spAutoFit/>
           </a:bodyPr>
           <a:lstStyle/>
@@ -10663,6 +11232,7 @@
           <a:lstStyle/>
           <a:p>
             <a:pPr algn="ctr"/>
+            <a:endParaRPr/>
           </a:p>
         </p:txBody>
       </p:sp>
@@ -10683,7 +11253,7 @@
           <a:noFill/>
         </p:spPr>
         <p:txBody>
-          <a:bodyPr wrap="square" lIns="0" rIns="0" tIns="0" bIns="0">
+          <a:bodyPr wrap="square" lIns="0" tIns="0" rIns="0" bIns="0">
             <a:spAutoFit/>
           </a:bodyPr>
           <a:lstStyle/>
@@ -10722,7 +11292,7 @@
           <a:noFill/>
         </p:spPr>
         <p:txBody>
-          <a:bodyPr wrap="square" lIns="0" rIns="0" tIns="0" bIns="0">
+          <a:bodyPr wrap="square" lIns="0" tIns="0" rIns="0" bIns="0">
             <a:spAutoFit/>
           </a:bodyPr>
           <a:lstStyle/>
@@ -10761,7 +11331,7 @@
           <a:noFill/>
         </p:spPr>
         <p:txBody>
-          <a:bodyPr wrap="square" lIns="0" rIns="0" tIns="0" bIns="0">
+          <a:bodyPr wrap="square" lIns="0" tIns="0" rIns="0" bIns="0">
             <a:spAutoFit/>
           </a:bodyPr>
           <a:lstStyle/>
@@ -10809,7 +11379,7 @@
           <a:noFill/>
         </p:spPr>
         <p:txBody>
-          <a:bodyPr wrap="square" lIns="0" rIns="0" tIns="0" bIns="0">
+          <a:bodyPr wrap="square" lIns="0" tIns="0" rIns="0" bIns="0">
             <a:spAutoFit/>
           </a:bodyPr>
           <a:lstStyle/>
@@ -10842,14 +11412,14 @@
       </p:sp>
       <p:sp>
         <p:nvSpPr>
-          <p:cNvPr id="22" name="TextBox 21"/>
+          <p:cNvPr id="23" name="TextBox 22"/>
           <p:cNvSpPr txBox="1"/>
           <p:nvPr/>
         </p:nvSpPr>
         <p:spPr>
           <a:xfrm>
-            <a:off x="548640" y="5578475"/>
-            <a:ext cx="10972800" cy="457200"/>
+            <a:off x="502920" y="6528816"/>
+            <a:ext cx="6400800" cy="274320"/>
           </a:xfrm>
           <a:prstGeom prst="rect">
             <a:avLst/>
@@ -10857,46 +11427,7 @@
           <a:noFill/>
         </p:spPr>
         <p:txBody>
-          <a:bodyPr wrap="square" lIns="0" rIns="0" tIns="0" bIns="0">
-            <a:spAutoFit/>
-          </a:bodyPr>
-          <a:lstStyle/>
-          <a:p>
-            <a:pPr algn="l">
-              <a:lnSpc>
-                <a:spcPct val="130000"/>
-              </a:lnSpc>
-            </a:pPr>
-            <a:r>
-              <a:rPr sz="1200" b="0">
-                <a:solidFill>
-                  <a:srgbClr val="54636F"/>
-                </a:solidFill>
-                <a:latin typeface="Consolas"/>
-              </a:rPr>
-              <a:t>The tool: open index.html in any browser — no install, no accounts.</a:t>
-            </a:r>
-          </a:p>
-        </p:txBody>
-      </p:sp>
-      <p:sp>
-        <p:nvSpPr>
-          <p:cNvPr id="23" name="TextBox 22"/>
-          <p:cNvSpPr txBox="1"/>
-          <p:nvPr/>
-        </p:nvSpPr>
-        <p:spPr>
-          <a:xfrm>
-            <a:off x="502920" y="6528816"/>
-            <a:ext cx="6400800" cy="274320"/>
-          </a:xfrm>
-          <a:prstGeom prst="rect">
-            <a:avLst/>
-          </a:prstGeom>
-          <a:noFill/>
-        </p:spPr>
-        <p:txBody>
-          <a:bodyPr wrap="square" lIns="0" rIns="0" tIns="0" bIns="0">
+          <a:bodyPr wrap="square" lIns="0" tIns="0" rIns="0" bIns="0">
             <a:spAutoFit/>
           </a:bodyPr>
           <a:lstStyle/>
@@ -10935,7 +11466,7 @@
           <a:noFill/>
         </p:spPr>
         <p:txBody>
-          <a:bodyPr wrap="square" lIns="0" rIns="0" tIns="0" bIns="0">
+          <a:bodyPr wrap="square" lIns="0" tIns="0" rIns="0" bIns="0">
             <a:spAutoFit/>
           </a:bodyPr>
           <a:lstStyle/>
@@ -11283,4 +11814,10 @@
   </a:objectDefaults>
   <a:extraClrSchemeLst/>
 </a:theme>
+</file>
+
+<file path=docMetadata/LabelInfo.xml><?xml version="1.0" encoding="utf-8"?>
+<clbl:labelList xmlns:clbl="http://schemas.microsoft.com/office/2020/mipLabelMetadata">
+  <clbl:label id="{b603dfd7-d93a-4381-a340-2995d8282205}" enabled="1" method="Standard" siteId="{05a0e69a-418a-47c1-9c25-9387261bf991}" removed="0"/>
+</clbl:labelList>
 </file>